--- a/demo-materials/ClassroomBridge-CrackTheCode-Slides.pptx
+++ b/demo-materials/ClassroomBridge-CrackTheCode-Slides.pptx
@@ -14,9 +14,23 @@
     <p:sldId id="262" r:id="rId8"/>
     <p:sldId id="263" r:id="rId9"/>
     <p:sldId id="264" r:id="rId10"/>
+    <p:sldId id="265" r:id="rId11"/>
+    <p:sldId id="266" r:id="rId12"/>
+    <p:sldId id="267" r:id="rId13"/>
+    <p:sldId id="268" r:id="rId14"/>
+    <p:sldId id="269" r:id="rId15"/>
+    <p:sldId id="270" r:id="rId16"/>
+    <p:sldId id="271" r:id="rId17"/>
+    <p:sldId id="272" r:id="rId18"/>
+    <p:sldId id="273" r:id="rId19"/>
+    <p:sldId id="274" r:id="rId20"/>
+    <p:sldId id="275" r:id="rId21"/>
+    <p:sldId id="276" r:id="rId22"/>
+    <p:sldId id="277" r:id="rId23"/>
+    <p:sldId id="278" r:id="rId24"/>
   </p:sldIdLst>
   <p:notesMasterIdLst>
-    <p:notesMasterId r:id="rId11"/>
+    <p:notesMasterId r:id="rId25"/>
   </p:notesMasterIdLst>
   <p:sldSz cx="12192000" cy="6858000"/>
   <p:notesSz cx="6858000" cy="12192000"/>
@@ -115,37 +129,58 @@
   <p:extLst>
     <p:ext uri="{521415D9-36F7-43E2-AB2F-B90AF26B5E84}">
       <p14:sectionLst xmlns:p14="http://schemas.microsoft.com/office/powerpoint/2010/main">
-        <p14:section name="Intro" id="{3a18b72f-de21-ecf2-b52a-31bec4c26ff8}">
+        <p14:section name="Intro" id="{ae347c67-692c-6c53-c55b-e50fcb685ca8}">
           <p14:sldIdLst>
             <p14:sldId id="256"/>
           </p14:sldIdLst>
         </p14:section>
-        <p14:section name="Rules" id="{df041c03-48b1-b765-109c-b8df00c18157}">
+        <p14:section name="Rules" id="{cc662fd5-f883-0c75-43c5-2eff80eb2c92}">
           <p14:sldIdLst>
             <p14:sldId id="257"/>
           </p14:sldIdLst>
         </p14:section>
-        <p14:section name="Keys" id="{aa2b2e3f-f5fb-053a-9754-c104f7a01722}">
+        <p14:section name="Keys" id="{3324f2a1-cc73-34e4-56b6-b696ba40b213}">
           <p14:sldIdLst>
             <p14:sldId id="258"/>
             <p14:sldId id="259"/>
           </p14:sldIdLst>
         </p14:section>
-        <p14:section name="Rounds" id="{f4ee9564-124a-1bec-b288-83e686fdab8a}">
+        <p14:section name="Rounds" id="{7a893fb3-3a06-0eaa-0a36-05e0519b16a5}">
+          <p14:sldIdLst/>
+        </p14:section>
+        <p14:section name="Treble clef" id="{5ba007db-7071-f697-338a-68d616234179}">
           <p14:sldIdLst>
             <p14:sldId id="260"/>
             <p14:sldId id="261"/>
             <p14:sldId id="262"/>
+            <p14:sldId id="263"/>
+            <p14:sldId id="264"/>
+            <p14:sldId id="265"/>
           </p14:sldIdLst>
         </p14:section>
-        <p14:section name="Your turn" id="{88c49c77-6462-fdd4-0880-56cc634e5904}">
+        <p14:section name="Bass clef" id="{b025bbeb-494d-cde3-e454-696bc10aeabd}">
           <p14:sldIdLst>
-            <p14:sldId id="263"/>
+            <p14:sldId id="266"/>
+            <p14:sldId id="267"/>
+            <p14:sldId id="268"/>
+            <p14:sldId id="269"/>
+            <p14:sldId id="270"/>
+            <p14:sldId id="271"/>
           </p14:sldIdLst>
         </p14:section>
-        <p14:section name="Answers" id="{8949caca-0433-5a03-014d-ee7261997e93}">
+        <p14:section name="Mixed clefs" id="{74b12b75-62df-0396-19c3-271030ca2525}">
           <p14:sldIdLst>
-            <p14:sldId id="264"/>
+            <p14:sldId id="272"/>
+            <p14:sldId id="273"/>
+            <p14:sldId id="274"/>
+            <p14:sldId id="275"/>
+          </p14:sldIdLst>
+        </p14:section>
+        <p14:section name="Answers" id="{0844b9bc-c424-a087-e3db-c66f41457a46}">
+          <p14:sldIdLst>
+            <p14:sldId id="276"/>
+            <p14:sldId id="277"/>
+            <p14:sldId id="278"/>
           </p14:sldIdLst>
         </p14:section>
       </p14:sectionLst>
@@ -594,6 +629,886 @@
 </p:notes>
 </file>
 
+<file path=ppt/notesSlides/notesSlide10.xml><?xml version="1.0" encoding="utf-8"?>
+<p:notes xmlns:a="http://schemas.openxmlformats.org/drawingml/2006/main" xmlns:r="http://schemas.openxmlformats.org/officeDocument/2006/relationships" xmlns:p="http://schemas.openxmlformats.org/presentationml/2006/main">
+  <p:cSld>
+    <p:spTree>
+      <p:nvGrpSpPr>
+        <p:cNvPr id="1" name=""/>
+        <p:cNvGrpSpPr/>
+        <p:nvPr/>
+      </p:nvGrpSpPr>
+      <p:grpSpPr>
+        <a:xfrm>
+          <a:off x="0" y="0"/>
+          <a:ext cx="0" cy="0"/>
+          <a:chOff x="0" y="0"/>
+          <a:chExt cx="0" cy="0"/>
+        </a:xfrm>
+      </p:grpSpPr>
+      <p:sp>
+        <p:nvSpPr>
+          <p:cNvPr id="2" name="Slide Image Placeholder 1"/>
+          <p:cNvSpPr>
+            <a:spLocks noGrp="1" noRot="1" noChangeAspect="1"/>
+          </p:cNvSpPr>
+          <p:nvPr>
+            <p:ph type="sldImg"/>
+          </p:nvPr>
+        </p:nvSpPr>
+        <p:spPr/>
+      </p:sp>
+      <p:sp>
+        <p:nvSpPr>
+          <p:cNvPr id="3" name="Notes Placeholder 2"/>
+          <p:cNvSpPr>
+            <a:spLocks noGrp="1"/>
+          </p:cNvSpPr>
+          <p:nvPr>
+            <p:ph type="body" idx="1"/>
+          </p:nvPr>
+        </p:nvSpPr>
+        <p:spPr/>
+        <p:txBody>
+          <a:bodyPr/>
+          <a:lstStyle/>
+          <a:p>
+            <a:r>
+              <a:rPr lang="en-US" dirty="0"/>
+              <a:t>Codes 11 and 12. One volunteer marks on the iPad, everyone else decodes on paper.</a:t>
+            </a:r>
+            <a:endParaRPr lang="en-US" dirty="0"/>
+          </a:p>
+        </p:txBody>
+      </p:sp>
+      <p:sp>
+        <p:nvSpPr>
+          <p:cNvPr id="4" name="Slide Number Placeholder 3"/>
+          <p:cNvSpPr>
+            <a:spLocks noGrp="1"/>
+          </p:cNvSpPr>
+          <p:nvPr>
+            <p:ph type="sldNum" sz="quarter" idx="10"/>
+          </p:nvPr>
+        </p:nvSpPr>
+        <p:spPr/>
+        <p:txBody>
+          <a:bodyPr/>
+          <a:lstStyle/>
+          <a:p>
+            <a:fld id="{F7021451-1387-4CA6-816F-3879F97B5CBC}" type="slidenum">
+              <a:rPr lang="en-US"/>
+              <a:t>10</a:t>
+            </a:fld>
+            <a:endParaRPr lang="en-US"/>
+          </a:p>
+        </p:txBody>
+      </p:sp>
+    </p:spTree>
+    <p:extLst>
+      <p:ext uri="{BB962C8B-B14F-4D97-AF65-F5344CB8AC3E}">
+        <p14:creationId xmlns:p14="http://schemas.microsoft.com/office/powerpoint/2010/main" val="1024086991"/>
+      </p:ext>
+    </p:extLst>
+  </p:cSld>
+  <p:clrMapOvr>
+    <a:masterClrMapping/>
+  </p:clrMapOvr>
+</p:notes>
+</file>
+
+<file path=ppt/notesSlides/notesSlide11.xml><?xml version="1.0" encoding="utf-8"?>
+<p:notes xmlns:a="http://schemas.openxmlformats.org/drawingml/2006/main" xmlns:r="http://schemas.openxmlformats.org/officeDocument/2006/relationships" xmlns:p="http://schemas.openxmlformats.org/presentationml/2006/main">
+  <p:cSld>
+    <p:spTree>
+      <p:nvGrpSpPr>
+        <p:cNvPr id="1" name=""/>
+        <p:cNvGrpSpPr/>
+        <p:nvPr/>
+      </p:nvGrpSpPr>
+      <p:grpSpPr>
+        <a:xfrm>
+          <a:off x="0" y="0"/>
+          <a:ext cx="0" cy="0"/>
+          <a:chOff x="0" y="0"/>
+          <a:chExt cx="0" cy="0"/>
+        </a:xfrm>
+      </p:grpSpPr>
+      <p:sp>
+        <p:nvSpPr>
+          <p:cNvPr id="2" name="Slide Image Placeholder 1"/>
+          <p:cNvSpPr>
+            <a:spLocks noGrp="1" noRot="1" noChangeAspect="1"/>
+          </p:cNvSpPr>
+          <p:nvPr>
+            <p:ph type="sldImg"/>
+          </p:nvPr>
+        </p:nvSpPr>
+        <p:spPr/>
+      </p:sp>
+      <p:sp>
+        <p:nvSpPr>
+          <p:cNvPr id="3" name="Notes Placeholder 2"/>
+          <p:cNvSpPr>
+            <a:spLocks noGrp="1"/>
+          </p:cNvSpPr>
+          <p:nvPr>
+            <p:ph type="body" idx="1"/>
+          </p:nvPr>
+        </p:nvSpPr>
+        <p:spPr/>
+        <p:txBody>
+          <a:bodyPr/>
+          <a:lstStyle/>
+          <a:p>
+            <a:r>
+              <a:rPr lang="en-US" dirty="0"/>
+              <a:t>Same routine in bass clef. The notes move on the stave, so point teachers back to the bass key.</a:t>
+            </a:r>
+            <a:endParaRPr lang="en-US" dirty="0"/>
+          </a:p>
+        </p:txBody>
+      </p:sp>
+      <p:sp>
+        <p:nvSpPr>
+          <p:cNvPr id="4" name="Slide Number Placeholder 3"/>
+          <p:cNvSpPr>
+            <a:spLocks noGrp="1"/>
+          </p:cNvSpPr>
+          <p:nvPr>
+            <p:ph type="sldNum" sz="quarter" idx="10"/>
+          </p:nvPr>
+        </p:nvSpPr>
+        <p:spPr/>
+        <p:txBody>
+          <a:bodyPr/>
+          <a:lstStyle/>
+          <a:p>
+            <a:fld id="{F7021451-1387-4CA6-816F-3879F97B5CBC}" type="slidenum">
+              <a:rPr lang="en-US"/>
+              <a:t>11</a:t>
+            </a:fld>
+            <a:endParaRPr lang="en-US"/>
+          </a:p>
+        </p:txBody>
+      </p:sp>
+    </p:spTree>
+    <p:extLst>
+      <p:ext uri="{BB962C8B-B14F-4D97-AF65-F5344CB8AC3E}">
+        <p14:creationId xmlns:p14="http://schemas.microsoft.com/office/powerpoint/2010/main" val="1024086991"/>
+      </p:ext>
+    </p:extLst>
+  </p:cSld>
+  <p:clrMapOvr>
+    <a:masterClrMapping/>
+  </p:clrMapOvr>
+</p:notes>
+</file>
+
+<file path=ppt/notesSlides/notesSlide12.xml><?xml version="1.0" encoding="utf-8"?>
+<p:notes xmlns:a="http://schemas.openxmlformats.org/drawingml/2006/main" xmlns:r="http://schemas.openxmlformats.org/officeDocument/2006/relationships" xmlns:p="http://schemas.openxmlformats.org/presentationml/2006/main">
+  <p:cSld>
+    <p:spTree>
+      <p:nvGrpSpPr>
+        <p:cNvPr id="1" name=""/>
+        <p:cNvGrpSpPr/>
+        <p:nvPr/>
+      </p:nvGrpSpPr>
+      <p:grpSpPr>
+        <a:xfrm>
+          <a:off x="0" y="0"/>
+          <a:ext cx="0" cy="0"/>
+          <a:chOff x="0" y="0"/>
+          <a:chExt cx="0" cy="0"/>
+        </a:xfrm>
+      </p:grpSpPr>
+      <p:sp>
+        <p:nvSpPr>
+          <p:cNvPr id="2" name="Slide Image Placeholder 1"/>
+          <p:cNvSpPr>
+            <a:spLocks noGrp="1" noRot="1" noChangeAspect="1"/>
+          </p:cNvSpPr>
+          <p:nvPr>
+            <p:ph type="sldImg"/>
+          </p:nvPr>
+        </p:nvSpPr>
+        <p:spPr/>
+      </p:sp>
+      <p:sp>
+        <p:nvSpPr>
+          <p:cNvPr id="3" name="Notes Placeholder 2"/>
+          <p:cNvSpPr>
+            <a:spLocks noGrp="1"/>
+          </p:cNvSpPr>
+          <p:nvPr>
+            <p:ph type="body" idx="1"/>
+          </p:nvPr>
+        </p:nvSpPr>
+        <p:spPr/>
+        <p:txBody>
+          <a:bodyPr/>
+          <a:lstStyle/>
+          <a:p>
+            <a:r>
+              <a:rPr lang="en-US" dirty="0"/>
+              <a:t>Codes 3 and 4. One volunteer marks on the iPad, everyone else decodes on paper.</a:t>
+            </a:r>
+            <a:endParaRPr lang="en-US" dirty="0"/>
+          </a:p>
+        </p:txBody>
+      </p:sp>
+      <p:sp>
+        <p:nvSpPr>
+          <p:cNvPr id="4" name="Slide Number Placeholder 3"/>
+          <p:cNvSpPr>
+            <a:spLocks noGrp="1"/>
+          </p:cNvSpPr>
+          <p:nvPr>
+            <p:ph type="sldNum" sz="quarter" idx="10"/>
+          </p:nvPr>
+        </p:nvSpPr>
+        <p:spPr/>
+        <p:txBody>
+          <a:bodyPr/>
+          <a:lstStyle/>
+          <a:p>
+            <a:fld id="{F7021451-1387-4CA6-816F-3879F97B5CBC}" type="slidenum">
+              <a:rPr lang="en-US"/>
+              <a:t>12</a:t>
+            </a:fld>
+            <a:endParaRPr lang="en-US"/>
+          </a:p>
+        </p:txBody>
+      </p:sp>
+    </p:spTree>
+    <p:extLst>
+      <p:ext uri="{BB962C8B-B14F-4D97-AF65-F5344CB8AC3E}">
+        <p14:creationId xmlns:p14="http://schemas.microsoft.com/office/powerpoint/2010/main" val="1024086991"/>
+      </p:ext>
+    </p:extLst>
+  </p:cSld>
+  <p:clrMapOvr>
+    <a:masterClrMapping/>
+  </p:clrMapOvr>
+</p:notes>
+</file>
+
+<file path=ppt/notesSlides/notesSlide13.xml><?xml version="1.0" encoding="utf-8"?>
+<p:notes xmlns:a="http://schemas.openxmlformats.org/drawingml/2006/main" xmlns:r="http://schemas.openxmlformats.org/officeDocument/2006/relationships" xmlns:p="http://schemas.openxmlformats.org/presentationml/2006/main">
+  <p:cSld>
+    <p:spTree>
+      <p:nvGrpSpPr>
+        <p:cNvPr id="1" name=""/>
+        <p:cNvGrpSpPr/>
+        <p:nvPr/>
+      </p:nvGrpSpPr>
+      <p:grpSpPr>
+        <a:xfrm>
+          <a:off x="0" y="0"/>
+          <a:ext cx="0" cy="0"/>
+          <a:chOff x="0" y="0"/>
+          <a:chExt cx="0" cy="0"/>
+        </a:xfrm>
+      </p:grpSpPr>
+      <p:sp>
+        <p:nvSpPr>
+          <p:cNvPr id="2" name="Slide Image Placeholder 1"/>
+          <p:cNvSpPr>
+            <a:spLocks noGrp="1" noRot="1" noChangeAspect="1"/>
+          </p:cNvSpPr>
+          <p:nvPr>
+            <p:ph type="sldImg"/>
+          </p:nvPr>
+        </p:nvSpPr>
+        <p:spPr/>
+      </p:sp>
+      <p:sp>
+        <p:nvSpPr>
+          <p:cNvPr id="3" name="Notes Placeholder 2"/>
+          <p:cNvSpPr>
+            <a:spLocks noGrp="1"/>
+          </p:cNvSpPr>
+          <p:nvPr>
+            <p:ph type="body" idx="1"/>
+          </p:nvPr>
+        </p:nvSpPr>
+        <p:spPr/>
+        <p:txBody>
+          <a:bodyPr/>
+          <a:lstStyle/>
+          <a:p>
+            <a:r>
+              <a:rPr lang="en-US" dirty="0"/>
+              <a:t>Codes 5 and 6. One volunteer marks on the iPad, everyone else decodes on paper.</a:t>
+            </a:r>
+            <a:endParaRPr lang="en-US" dirty="0"/>
+          </a:p>
+        </p:txBody>
+      </p:sp>
+      <p:sp>
+        <p:nvSpPr>
+          <p:cNvPr id="4" name="Slide Number Placeholder 3"/>
+          <p:cNvSpPr>
+            <a:spLocks noGrp="1"/>
+          </p:cNvSpPr>
+          <p:nvPr>
+            <p:ph type="sldNum" sz="quarter" idx="10"/>
+          </p:nvPr>
+        </p:nvSpPr>
+        <p:spPr/>
+        <p:txBody>
+          <a:bodyPr/>
+          <a:lstStyle/>
+          <a:p>
+            <a:fld id="{F7021451-1387-4CA6-816F-3879F97B5CBC}" type="slidenum">
+              <a:rPr lang="en-US"/>
+              <a:t>13</a:t>
+            </a:fld>
+            <a:endParaRPr lang="en-US"/>
+          </a:p>
+        </p:txBody>
+      </p:sp>
+    </p:spTree>
+    <p:extLst>
+      <p:ext uri="{BB962C8B-B14F-4D97-AF65-F5344CB8AC3E}">
+        <p14:creationId xmlns:p14="http://schemas.microsoft.com/office/powerpoint/2010/main" val="1024086991"/>
+      </p:ext>
+    </p:extLst>
+  </p:cSld>
+  <p:clrMapOvr>
+    <a:masterClrMapping/>
+  </p:clrMapOvr>
+</p:notes>
+</file>
+
+<file path=ppt/notesSlides/notesSlide14.xml><?xml version="1.0" encoding="utf-8"?>
+<p:notes xmlns:a="http://schemas.openxmlformats.org/drawingml/2006/main" xmlns:r="http://schemas.openxmlformats.org/officeDocument/2006/relationships" xmlns:p="http://schemas.openxmlformats.org/presentationml/2006/main">
+  <p:cSld>
+    <p:spTree>
+      <p:nvGrpSpPr>
+        <p:cNvPr id="1" name=""/>
+        <p:cNvGrpSpPr/>
+        <p:nvPr/>
+      </p:nvGrpSpPr>
+      <p:grpSpPr>
+        <a:xfrm>
+          <a:off x="0" y="0"/>
+          <a:ext cx="0" cy="0"/>
+          <a:chOff x="0" y="0"/>
+          <a:chExt cx="0" cy="0"/>
+        </a:xfrm>
+      </p:grpSpPr>
+      <p:sp>
+        <p:nvSpPr>
+          <p:cNvPr id="2" name="Slide Image Placeholder 1"/>
+          <p:cNvSpPr>
+            <a:spLocks noGrp="1" noRot="1" noChangeAspect="1"/>
+          </p:cNvSpPr>
+          <p:nvPr>
+            <p:ph type="sldImg"/>
+          </p:nvPr>
+        </p:nvSpPr>
+        <p:spPr/>
+      </p:sp>
+      <p:sp>
+        <p:nvSpPr>
+          <p:cNvPr id="3" name="Notes Placeholder 2"/>
+          <p:cNvSpPr>
+            <a:spLocks noGrp="1"/>
+          </p:cNvSpPr>
+          <p:nvPr>
+            <p:ph type="body" idx="1"/>
+          </p:nvPr>
+        </p:nvSpPr>
+        <p:spPr/>
+        <p:txBody>
+          <a:bodyPr/>
+          <a:lstStyle/>
+          <a:p>
+            <a:r>
+              <a:rPr lang="en-US" dirty="0"/>
+              <a:t>Codes 7 and 8. One volunteer marks on the iPad, everyone else decodes on paper.</a:t>
+            </a:r>
+            <a:endParaRPr lang="en-US" dirty="0"/>
+          </a:p>
+        </p:txBody>
+      </p:sp>
+      <p:sp>
+        <p:nvSpPr>
+          <p:cNvPr id="4" name="Slide Number Placeholder 3"/>
+          <p:cNvSpPr>
+            <a:spLocks noGrp="1"/>
+          </p:cNvSpPr>
+          <p:nvPr>
+            <p:ph type="sldNum" sz="quarter" idx="10"/>
+          </p:nvPr>
+        </p:nvSpPr>
+        <p:spPr/>
+        <p:txBody>
+          <a:bodyPr/>
+          <a:lstStyle/>
+          <a:p>
+            <a:fld id="{F7021451-1387-4CA6-816F-3879F97B5CBC}" type="slidenum">
+              <a:rPr lang="en-US"/>
+              <a:t>14</a:t>
+            </a:fld>
+            <a:endParaRPr lang="en-US"/>
+          </a:p>
+        </p:txBody>
+      </p:sp>
+    </p:spTree>
+    <p:extLst>
+      <p:ext uri="{BB962C8B-B14F-4D97-AF65-F5344CB8AC3E}">
+        <p14:creationId xmlns:p14="http://schemas.microsoft.com/office/powerpoint/2010/main" val="1024086991"/>
+      </p:ext>
+    </p:extLst>
+  </p:cSld>
+  <p:clrMapOvr>
+    <a:masterClrMapping/>
+  </p:clrMapOvr>
+</p:notes>
+</file>
+
+<file path=ppt/notesSlides/notesSlide15.xml><?xml version="1.0" encoding="utf-8"?>
+<p:notes xmlns:a="http://schemas.openxmlformats.org/drawingml/2006/main" xmlns:r="http://schemas.openxmlformats.org/officeDocument/2006/relationships" xmlns:p="http://schemas.openxmlformats.org/presentationml/2006/main">
+  <p:cSld>
+    <p:spTree>
+      <p:nvGrpSpPr>
+        <p:cNvPr id="1" name=""/>
+        <p:cNvGrpSpPr/>
+        <p:nvPr/>
+      </p:nvGrpSpPr>
+      <p:grpSpPr>
+        <a:xfrm>
+          <a:off x="0" y="0"/>
+          <a:ext cx="0" cy="0"/>
+          <a:chOff x="0" y="0"/>
+          <a:chExt cx="0" cy="0"/>
+        </a:xfrm>
+      </p:grpSpPr>
+      <p:sp>
+        <p:nvSpPr>
+          <p:cNvPr id="2" name="Slide Image Placeholder 1"/>
+          <p:cNvSpPr>
+            <a:spLocks noGrp="1" noRot="1" noChangeAspect="1"/>
+          </p:cNvSpPr>
+          <p:nvPr>
+            <p:ph type="sldImg"/>
+          </p:nvPr>
+        </p:nvSpPr>
+        <p:spPr/>
+      </p:sp>
+      <p:sp>
+        <p:nvSpPr>
+          <p:cNvPr id="3" name="Notes Placeholder 2"/>
+          <p:cNvSpPr>
+            <a:spLocks noGrp="1"/>
+          </p:cNvSpPr>
+          <p:nvPr>
+            <p:ph type="body" idx="1"/>
+          </p:nvPr>
+        </p:nvSpPr>
+        <p:spPr/>
+        <p:txBody>
+          <a:bodyPr/>
+          <a:lstStyle/>
+          <a:p>
+            <a:r>
+              <a:rPr lang="en-US" dirty="0"/>
+              <a:t>Codes 9 and 10. One volunteer marks on the iPad, everyone else decodes on paper.</a:t>
+            </a:r>
+            <a:endParaRPr lang="en-US" dirty="0"/>
+          </a:p>
+        </p:txBody>
+      </p:sp>
+      <p:sp>
+        <p:nvSpPr>
+          <p:cNvPr id="4" name="Slide Number Placeholder 3"/>
+          <p:cNvSpPr>
+            <a:spLocks noGrp="1"/>
+          </p:cNvSpPr>
+          <p:nvPr>
+            <p:ph type="sldNum" sz="quarter" idx="10"/>
+          </p:nvPr>
+        </p:nvSpPr>
+        <p:spPr/>
+        <p:txBody>
+          <a:bodyPr/>
+          <a:lstStyle/>
+          <a:p>
+            <a:fld id="{F7021451-1387-4CA6-816F-3879F97B5CBC}" type="slidenum">
+              <a:rPr lang="en-US"/>
+              <a:t>15</a:t>
+            </a:fld>
+            <a:endParaRPr lang="en-US"/>
+          </a:p>
+        </p:txBody>
+      </p:sp>
+    </p:spTree>
+    <p:extLst>
+      <p:ext uri="{BB962C8B-B14F-4D97-AF65-F5344CB8AC3E}">
+        <p14:creationId xmlns:p14="http://schemas.microsoft.com/office/powerpoint/2010/main" val="1024086991"/>
+      </p:ext>
+    </p:extLst>
+  </p:cSld>
+  <p:clrMapOvr>
+    <a:masterClrMapping/>
+  </p:clrMapOvr>
+</p:notes>
+</file>
+
+<file path=ppt/notesSlides/notesSlide16.xml><?xml version="1.0" encoding="utf-8"?>
+<p:notes xmlns:a="http://schemas.openxmlformats.org/drawingml/2006/main" xmlns:r="http://schemas.openxmlformats.org/officeDocument/2006/relationships" xmlns:p="http://schemas.openxmlformats.org/presentationml/2006/main">
+  <p:cSld>
+    <p:spTree>
+      <p:nvGrpSpPr>
+        <p:cNvPr id="1" name=""/>
+        <p:cNvGrpSpPr/>
+        <p:nvPr/>
+      </p:nvGrpSpPr>
+      <p:grpSpPr>
+        <a:xfrm>
+          <a:off x="0" y="0"/>
+          <a:ext cx="0" cy="0"/>
+          <a:chOff x="0" y="0"/>
+          <a:chExt cx="0" cy="0"/>
+        </a:xfrm>
+      </p:grpSpPr>
+      <p:sp>
+        <p:nvSpPr>
+          <p:cNvPr id="2" name="Slide Image Placeholder 1"/>
+          <p:cNvSpPr>
+            <a:spLocks noGrp="1" noRot="1" noChangeAspect="1"/>
+          </p:cNvSpPr>
+          <p:nvPr>
+            <p:ph type="sldImg"/>
+          </p:nvPr>
+        </p:nvSpPr>
+        <p:spPr/>
+      </p:sp>
+      <p:sp>
+        <p:nvSpPr>
+          <p:cNvPr id="3" name="Notes Placeholder 2"/>
+          <p:cNvSpPr>
+            <a:spLocks noGrp="1"/>
+          </p:cNvSpPr>
+          <p:nvPr>
+            <p:ph type="body" idx="1"/>
+          </p:nvPr>
+        </p:nvSpPr>
+        <p:spPr/>
+        <p:txBody>
+          <a:bodyPr/>
+          <a:lstStyle/>
+          <a:p>
+            <a:r>
+              <a:rPr lang="en-US" dirty="0"/>
+              <a:t>Codes 11 and 12. One volunteer marks on the iPad, everyone else decodes on paper.</a:t>
+            </a:r>
+            <a:endParaRPr lang="en-US" dirty="0"/>
+          </a:p>
+        </p:txBody>
+      </p:sp>
+      <p:sp>
+        <p:nvSpPr>
+          <p:cNvPr id="4" name="Slide Number Placeholder 3"/>
+          <p:cNvSpPr>
+            <a:spLocks noGrp="1"/>
+          </p:cNvSpPr>
+          <p:nvPr>
+            <p:ph type="sldNum" sz="quarter" idx="10"/>
+          </p:nvPr>
+        </p:nvSpPr>
+        <p:spPr/>
+        <p:txBody>
+          <a:bodyPr/>
+          <a:lstStyle/>
+          <a:p>
+            <a:fld id="{F7021451-1387-4CA6-816F-3879F97B5CBC}" type="slidenum">
+              <a:rPr lang="en-US"/>
+              <a:t>16</a:t>
+            </a:fld>
+            <a:endParaRPr lang="en-US"/>
+          </a:p>
+        </p:txBody>
+      </p:sp>
+    </p:spTree>
+    <p:extLst>
+      <p:ext uri="{BB962C8B-B14F-4D97-AF65-F5344CB8AC3E}">
+        <p14:creationId xmlns:p14="http://schemas.microsoft.com/office/powerpoint/2010/main" val="1024086991"/>
+      </p:ext>
+    </p:extLst>
+  </p:cSld>
+  <p:clrMapOvr>
+    <a:masterClrMapping/>
+  </p:clrMapOvr>
+</p:notes>
+</file>
+
+<file path=ppt/notesSlides/notesSlide17.xml><?xml version="1.0" encoding="utf-8"?>
+<p:notes xmlns:a="http://schemas.openxmlformats.org/drawingml/2006/main" xmlns:r="http://schemas.openxmlformats.org/officeDocument/2006/relationships" xmlns:p="http://schemas.openxmlformats.org/presentationml/2006/main">
+  <p:cSld>
+    <p:spTree>
+      <p:nvGrpSpPr>
+        <p:cNvPr id="1" name=""/>
+        <p:cNvGrpSpPr/>
+        <p:nvPr/>
+      </p:nvGrpSpPr>
+      <p:grpSpPr>
+        <a:xfrm>
+          <a:off x="0" y="0"/>
+          <a:ext cx="0" cy="0"/>
+          <a:chOff x="0" y="0"/>
+          <a:chExt cx="0" cy="0"/>
+        </a:xfrm>
+      </p:grpSpPr>
+      <p:sp>
+        <p:nvSpPr>
+          <p:cNvPr id="2" name="Slide Image Placeholder 1"/>
+          <p:cNvSpPr>
+            <a:spLocks noGrp="1" noRot="1" noChangeAspect="1"/>
+          </p:cNvSpPr>
+          <p:nvPr>
+            <p:ph type="sldImg"/>
+          </p:nvPr>
+        </p:nvSpPr>
+        <p:spPr/>
+      </p:sp>
+      <p:sp>
+        <p:nvSpPr>
+          <p:cNvPr id="3" name="Notes Placeholder 2"/>
+          <p:cNvSpPr>
+            <a:spLocks noGrp="1"/>
+          </p:cNvSpPr>
+          <p:nvPr>
+            <p:ph type="body" idx="1"/>
+          </p:nvPr>
+        </p:nvSpPr>
+        <p:spPr/>
+        <p:txBody>
+          <a:bodyPr/>
+          <a:lstStyle/>
+          <a:p>
+            <a:r>
+              <a:rPr lang="en-US" dirty="0"/>
+              <a:t>Each code has two words: a treble word, then a bass word after the bar line. Ask: which clef is it now?</a:t>
+            </a:r>
+            <a:endParaRPr lang="en-US" dirty="0"/>
+          </a:p>
+        </p:txBody>
+      </p:sp>
+      <p:sp>
+        <p:nvSpPr>
+          <p:cNvPr id="4" name="Slide Number Placeholder 3"/>
+          <p:cNvSpPr>
+            <a:spLocks noGrp="1"/>
+          </p:cNvSpPr>
+          <p:nvPr>
+            <p:ph type="sldNum" sz="quarter" idx="10"/>
+          </p:nvPr>
+        </p:nvSpPr>
+        <p:spPr/>
+        <p:txBody>
+          <a:bodyPr/>
+          <a:lstStyle/>
+          <a:p>
+            <a:fld id="{F7021451-1387-4CA6-816F-3879F97B5CBC}" type="slidenum">
+              <a:rPr lang="en-US"/>
+              <a:t>17</a:t>
+            </a:fld>
+            <a:endParaRPr lang="en-US"/>
+          </a:p>
+        </p:txBody>
+      </p:sp>
+    </p:spTree>
+    <p:extLst>
+      <p:ext uri="{BB962C8B-B14F-4D97-AF65-F5344CB8AC3E}">
+        <p14:creationId xmlns:p14="http://schemas.microsoft.com/office/powerpoint/2010/main" val="1024086991"/>
+      </p:ext>
+    </p:extLst>
+  </p:cSld>
+  <p:clrMapOvr>
+    <a:masterClrMapping/>
+  </p:clrMapOvr>
+</p:notes>
+</file>
+
+<file path=ppt/notesSlides/notesSlide18.xml><?xml version="1.0" encoding="utf-8"?>
+<p:notes xmlns:a="http://schemas.openxmlformats.org/drawingml/2006/main" xmlns:r="http://schemas.openxmlformats.org/officeDocument/2006/relationships" xmlns:p="http://schemas.openxmlformats.org/presentationml/2006/main">
+  <p:cSld>
+    <p:spTree>
+      <p:nvGrpSpPr>
+        <p:cNvPr id="1" name=""/>
+        <p:cNvGrpSpPr/>
+        <p:nvPr/>
+      </p:nvGrpSpPr>
+      <p:grpSpPr>
+        <a:xfrm>
+          <a:off x="0" y="0"/>
+          <a:ext cx="0" cy="0"/>
+          <a:chOff x="0" y="0"/>
+          <a:chExt cx="0" cy="0"/>
+        </a:xfrm>
+      </p:grpSpPr>
+      <p:sp>
+        <p:nvSpPr>
+          <p:cNvPr id="2" name="Slide Image Placeholder 1"/>
+          <p:cNvSpPr>
+            <a:spLocks noGrp="1" noRot="1" noChangeAspect="1"/>
+          </p:cNvSpPr>
+          <p:nvPr>
+            <p:ph type="sldImg"/>
+          </p:nvPr>
+        </p:nvSpPr>
+        <p:spPr/>
+      </p:sp>
+      <p:sp>
+        <p:nvSpPr>
+          <p:cNvPr id="3" name="Notes Placeholder 2"/>
+          <p:cNvSpPr>
+            <a:spLocks noGrp="1"/>
+          </p:cNvSpPr>
+          <p:nvPr>
+            <p:ph type="body" idx="1"/>
+          </p:nvPr>
+        </p:nvSpPr>
+        <p:spPr/>
+        <p:txBody>
+          <a:bodyPr/>
+          <a:lstStyle/>
+          <a:p>
+            <a:r>
+              <a:rPr lang="en-US" dirty="0"/>
+              <a:t>Mixed codes 3 and 4.</a:t>
+            </a:r>
+            <a:endParaRPr lang="en-US" dirty="0"/>
+          </a:p>
+        </p:txBody>
+      </p:sp>
+      <p:sp>
+        <p:nvSpPr>
+          <p:cNvPr id="4" name="Slide Number Placeholder 3"/>
+          <p:cNvSpPr>
+            <a:spLocks noGrp="1"/>
+          </p:cNvSpPr>
+          <p:nvPr>
+            <p:ph type="sldNum" sz="quarter" idx="10"/>
+          </p:nvPr>
+        </p:nvSpPr>
+        <p:spPr/>
+        <p:txBody>
+          <a:bodyPr/>
+          <a:lstStyle/>
+          <a:p>
+            <a:fld id="{F7021451-1387-4CA6-816F-3879F97B5CBC}" type="slidenum">
+              <a:rPr lang="en-US"/>
+              <a:t>18</a:t>
+            </a:fld>
+            <a:endParaRPr lang="en-US"/>
+          </a:p>
+        </p:txBody>
+      </p:sp>
+    </p:spTree>
+    <p:extLst>
+      <p:ext uri="{BB962C8B-B14F-4D97-AF65-F5344CB8AC3E}">
+        <p14:creationId xmlns:p14="http://schemas.microsoft.com/office/powerpoint/2010/main" val="1024086991"/>
+      </p:ext>
+    </p:extLst>
+  </p:cSld>
+  <p:clrMapOvr>
+    <a:masterClrMapping/>
+  </p:clrMapOvr>
+</p:notes>
+</file>
+
+<file path=ppt/notesSlides/notesSlide19.xml><?xml version="1.0" encoding="utf-8"?>
+<p:notes xmlns:a="http://schemas.openxmlformats.org/drawingml/2006/main" xmlns:r="http://schemas.openxmlformats.org/officeDocument/2006/relationships" xmlns:p="http://schemas.openxmlformats.org/presentationml/2006/main">
+  <p:cSld>
+    <p:spTree>
+      <p:nvGrpSpPr>
+        <p:cNvPr id="1" name=""/>
+        <p:cNvGrpSpPr/>
+        <p:nvPr/>
+      </p:nvGrpSpPr>
+      <p:grpSpPr>
+        <a:xfrm>
+          <a:off x="0" y="0"/>
+          <a:ext cx="0" cy="0"/>
+          <a:chOff x="0" y="0"/>
+          <a:chExt cx="0" cy="0"/>
+        </a:xfrm>
+      </p:grpSpPr>
+      <p:sp>
+        <p:nvSpPr>
+          <p:cNvPr id="2" name="Slide Image Placeholder 1"/>
+          <p:cNvSpPr>
+            <a:spLocks noGrp="1" noRot="1" noChangeAspect="1"/>
+          </p:cNvSpPr>
+          <p:nvPr>
+            <p:ph type="sldImg"/>
+          </p:nvPr>
+        </p:nvSpPr>
+        <p:spPr/>
+      </p:sp>
+      <p:sp>
+        <p:nvSpPr>
+          <p:cNvPr id="3" name="Notes Placeholder 2"/>
+          <p:cNvSpPr>
+            <a:spLocks noGrp="1"/>
+          </p:cNvSpPr>
+          <p:nvPr>
+            <p:ph type="body" idx="1"/>
+          </p:nvPr>
+        </p:nvSpPr>
+        <p:spPr/>
+        <p:txBody>
+          <a:bodyPr/>
+          <a:lstStyle/>
+          <a:p>
+            <a:r>
+              <a:rPr lang="en-US" dirty="0"/>
+              <a:t>Mixed codes 5 and 6.</a:t>
+            </a:r>
+            <a:endParaRPr lang="en-US" dirty="0"/>
+          </a:p>
+        </p:txBody>
+      </p:sp>
+      <p:sp>
+        <p:nvSpPr>
+          <p:cNvPr id="4" name="Slide Number Placeholder 3"/>
+          <p:cNvSpPr>
+            <a:spLocks noGrp="1"/>
+          </p:cNvSpPr>
+          <p:nvPr>
+            <p:ph type="sldNum" sz="quarter" idx="10"/>
+          </p:nvPr>
+        </p:nvSpPr>
+        <p:spPr/>
+        <p:txBody>
+          <a:bodyPr/>
+          <a:lstStyle/>
+          <a:p>
+            <a:fld id="{F7021451-1387-4CA6-816F-3879F97B5CBC}" type="slidenum">
+              <a:rPr lang="en-US"/>
+              <a:t>19</a:t>
+            </a:fld>
+            <a:endParaRPr lang="en-US"/>
+          </a:p>
+        </p:txBody>
+      </p:sp>
+    </p:spTree>
+    <p:extLst>
+      <p:ext uri="{BB962C8B-B14F-4D97-AF65-F5344CB8AC3E}">
+        <p14:creationId xmlns:p14="http://schemas.microsoft.com/office/powerpoint/2010/main" val="1024086991"/>
+      </p:ext>
+    </p:extLst>
+  </p:cSld>
+  <p:clrMapOvr>
+    <a:masterClrMapping/>
+  </p:clrMapOvr>
+</p:notes>
+</file>
+
 <file path=ppt/notesSlides/notesSlide2.xml><?xml version="1.0" encoding="utf-8"?>
 <p:notes xmlns:a="http://schemas.openxmlformats.org/drawingml/2006/main" xmlns:r="http://schemas.openxmlformats.org/officeDocument/2006/relationships" xmlns:p="http://schemas.openxmlformats.org/presentationml/2006/main">
   <p:cSld>
@@ -664,6 +1579,358 @@
             <a:fld id="{F7021451-1387-4CA6-816F-3879F97B5CBC}" type="slidenum">
               <a:rPr lang="en-US"/>
               <a:t>2</a:t>
+            </a:fld>
+            <a:endParaRPr lang="en-US"/>
+          </a:p>
+        </p:txBody>
+      </p:sp>
+    </p:spTree>
+    <p:extLst>
+      <p:ext uri="{BB962C8B-B14F-4D97-AF65-F5344CB8AC3E}">
+        <p14:creationId xmlns:p14="http://schemas.microsoft.com/office/powerpoint/2010/main" val="1024086991"/>
+      </p:ext>
+    </p:extLst>
+  </p:cSld>
+  <p:clrMapOvr>
+    <a:masterClrMapping/>
+  </p:clrMapOvr>
+</p:notes>
+</file>
+
+<file path=ppt/notesSlides/notesSlide20.xml><?xml version="1.0" encoding="utf-8"?>
+<p:notes xmlns:a="http://schemas.openxmlformats.org/drawingml/2006/main" xmlns:r="http://schemas.openxmlformats.org/officeDocument/2006/relationships" xmlns:p="http://schemas.openxmlformats.org/presentationml/2006/main">
+  <p:cSld>
+    <p:spTree>
+      <p:nvGrpSpPr>
+        <p:cNvPr id="1" name=""/>
+        <p:cNvGrpSpPr/>
+        <p:nvPr/>
+      </p:nvGrpSpPr>
+      <p:grpSpPr>
+        <a:xfrm>
+          <a:off x="0" y="0"/>
+          <a:ext cx="0" cy="0"/>
+          <a:chOff x="0" y="0"/>
+          <a:chExt cx="0" cy="0"/>
+        </a:xfrm>
+      </p:grpSpPr>
+      <p:sp>
+        <p:nvSpPr>
+          <p:cNvPr id="2" name="Slide Image Placeholder 1"/>
+          <p:cNvSpPr>
+            <a:spLocks noGrp="1" noRot="1" noChangeAspect="1"/>
+          </p:cNvSpPr>
+          <p:nvPr>
+            <p:ph type="sldImg"/>
+          </p:nvPr>
+        </p:nvSpPr>
+        <p:spPr/>
+      </p:sp>
+      <p:sp>
+        <p:nvSpPr>
+          <p:cNvPr id="3" name="Notes Placeholder 2"/>
+          <p:cNvSpPr>
+            <a:spLocks noGrp="1"/>
+          </p:cNvSpPr>
+          <p:nvPr>
+            <p:ph type="body" idx="1"/>
+          </p:nvPr>
+        </p:nvSpPr>
+        <p:spPr/>
+        <p:txBody>
+          <a:bodyPr/>
+          <a:lstStyle/>
+          <a:p>
+            <a:r>
+              <a:rPr lang="en-US" dirty="0"/>
+              <a:t>Mixed codes 7 and 8.</a:t>
+            </a:r>
+            <a:endParaRPr lang="en-US" dirty="0"/>
+          </a:p>
+        </p:txBody>
+      </p:sp>
+      <p:sp>
+        <p:nvSpPr>
+          <p:cNvPr id="4" name="Slide Number Placeholder 3"/>
+          <p:cNvSpPr>
+            <a:spLocks noGrp="1"/>
+          </p:cNvSpPr>
+          <p:nvPr>
+            <p:ph type="sldNum" sz="quarter" idx="10"/>
+          </p:nvPr>
+        </p:nvSpPr>
+        <p:spPr/>
+        <p:txBody>
+          <a:bodyPr/>
+          <a:lstStyle/>
+          <a:p>
+            <a:fld id="{F7021451-1387-4CA6-816F-3879F97B5CBC}" type="slidenum">
+              <a:rPr lang="en-US"/>
+              <a:t>20</a:t>
+            </a:fld>
+            <a:endParaRPr lang="en-US"/>
+          </a:p>
+        </p:txBody>
+      </p:sp>
+    </p:spTree>
+    <p:extLst>
+      <p:ext uri="{BB962C8B-B14F-4D97-AF65-F5344CB8AC3E}">
+        <p14:creationId xmlns:p14="http://schemas.microsoft.com/office/powerpoint/2010/main" val="1024086991"/>
+      </p:ext>
+    </p:extLst>
+  </p:cSld>
+  <p:clrMapOvr>
+    <a:masterClrMapping/>
+  </p:clrMapOvr>
+</p:notes>
+</file>
+
+<file path=ppt/notesSlides/notesSlide21.xml><?xml version="1.0" encoding="utf-8"?>
+<p:notes xmlns:a="http://schemas.openxmlformats.org/drawingml/2006/main" xmlns:r="http://schemas.openxmlformats.org/officeDocument/2006/relationships" xmlns:p="http://schemas.openxmlformats.org/presentationml/2006/main">
+  <p:cSld>
+    <p:spTree>
+      <p:nvGrpSpPr>
+        <p:cNvPr id="1" name=""/>
+        <p:cNvGrpSpPr/>
+        <p:nvPr/>
+      </p:nvGrpSpPr>
+      <p:grpSpPr>
+        <a:xfrm>
+          <a:off x="0" y="0"/>
+          <a:ext cx="0" cy="0"/>
+          <a:chOff x="0" y="0"/>
+          <a:chExt cx="0" cy="0"/>
+        </a:xfrm>
+      </p:grpSpPr>
+      <p:sp>
+        <p:nvSpPr>
+          <p:cNvPr id="2" name="Slide Image Placeholder 1"/>
+          <p:cNvSpPr>
+            <a:spLocks noGrp="1" noRot="1" noChangeAspect="1"/>
+          </p:cNvSpPr>
+          <p:nvPr>
+            <p:ph type="sldImg"/>
+          </p:nvPr>
+        </p:nvSpPr>
+        <p:spPr/>
+      </p:sp>
+      <p:sp>
+        <p:nvSpPr>
+          <p:cNvPr id="3" name="Notes Placeholder 2"/>
+          <p:cNvSpPr>
+            <a:spLocks noGrp="1"/>
+          </p:cNvSpPr>
+          <p:nvPr>
+            <p:ph type="body" idx="1"/>
+          </p:nvPr>
+        </p:nvSpPr>
+        <p:spPr/>
+        <p:txBody>
+          <a:bodyPr/>
+          <a:lstStyle/>
+          <a:p>
+            <a:r>
+              <a:rPr lang="en-US" dirty="0"/>
+              <a:t>Reveal only after everyone has had a go.</a:t>
+            </a:r>
+            <a:endParaRPr lang="en-US" dirty="0"/>
+          </a:p>
+        </p:txBody>
+      </p:sp>
+      <p:sp>
+        <p:nvSpPr>
+          <p:cNvPr id="4" name="Slide Number Placeholder 3"/>
+          <p:cNvSpPr>
+            <a:spLocks noGrp="1"/>
+          </p:cNvSpPr>
+          <p:nvPr>
+            <p:ph type="sldNum" sz="quarter" idx="10"/>
+          </p:nvPr>
+        </p:nvSpPr>
+        <p:spPr/>
+        <p:txBody>
+          <a:bodyPr/>
+          <a:lstStyle/>
+          <a:p>
+            <a:fld id="{F7021451-1387-4CA6-816F-3879F97B5CBC}" type="slidenum">
+              <a:rPr lang="en-US"/>
+              <a:t>21</a:t>
+            </a:fld>
+            <a:endParaRPr lang="en-US"/>
+          </a:p>
+        </p:txBody>
+      </p:sp>
+    </p:spTree>
+    <p:extLst>
+      <p:ext uri="{BB962C8B-B14F-4D97-AF65-F5344CB8AC3E}">
+        <p14:creationId xmlns:p14="http://schemas.microsoft.com/office/powerpoint/2010/main" val="1024086991"/>
+      </p:ext>
+    </p:extLst>
+  </p:cSld>
+  <p:clrMapOvr>
+    <a:masterClrMapping/>
+  </p:clrMapOvr>
+</p:notes>
+</file>
+
+<file path=ppt/notesSlides/notesSlide22.xml><?xml version="1.0" encoding="utf-8"?>
+<p:notes xmlns:a="http://schemas.openxmlformats.org/drawingml/2006/main" xmlns:r="http://schemas.openxmlformats.org/officeDocument/2006/relationships" xmlns:p="http://schemas.openxmlformats.org/presentationml/2006/main">
+  <p:cSld>
+    <p:spTree>
+      <p:nvGrpSpPr>
+        <p:cNvPr id="1" name=""/>
+        <p:cNvGrpSpPr/>
+        <p:nvPr/>
+      </p:nvGrpSpPr>
+      <p:grpSpPr>
+        <a:xfrm>
+          <a:off x="0" y="0"/>
+          <a:ext cx="0" cy="0"/>
+          <a:chOff x="0" y="0"/>
+          <a:chExt cx="0" cy="0"/>
+        </a:xfrm>
+      </p:grpSpPr>
+      <p:sp>
+        <p:nvSpPr>
+          <p:cNvPr id="2" name="Slide Image Placeholder 1"/>
+          <p:cNvSpPr>
+            <a:spLocks noGrp="1" noRot="1" noChangeAspect="1"/>
+          </p:cNvSpPr>
+          <p:nvPr>
+            <p:ph type="sldImg"/>
+          </p:nvPr>
+        </p:nvSpPr>
+        <p:spPr/>
+      </p:sp>
+      <p:sp>
+        <p:nvSpPr>
+          <p:cNvPr id="3" name="Notes Placeholder 2"/>
+          <p:cNvSpPr>
+            <a:spLocks noGrp="1"/>
+          </p:cNvSpPr>
+          <p:nvPr>
+            <p:ph type="body" idx="1"/>
+          </p:nvPr>
+        </p:nvSpPr>
+        <p:spPr/>
+        <p:txBody>
+          <a:bodyPr/>
+          <a:lstStyle/>
+          <a:p>
+            <a:r>
+              <a:rPr lang="en-US" dirty="0"/>
+              <a:t>Reveal only after everyone has had a go.</a:t>
+            </a:r>
+            <a:endParaRPr lang="en-US" dirty="0"/>
+          </a:p>
+        </p:txBody>
+      </p:sp>
+      <p:sp>
+        <p:nvSpPr>
+          <p:cNvPr id="4" name="Slide Number Placeholder 3"/>
+          <p:cNvSpPr>
+            <a:spLocks noGrp="1"/>
+          </p:cNvSpPr>
+          <p:nvPr>
+            <p:ph type="sldNum" sz="quarter" idx="10"/>
+          </p:nvPr>
+        </p:nvSpPr>
+        <p:spPr/>
+        <p:txBody>
+          <a:bodyPr/>
+          <a:lstStyle/>
+          <a:p>
+            <a:fld id="{F7021451-1387-4CA6-816F-3879F97B5CBC}" type="slidenum">
+              <a:rPr lang="en-US"/>
+              <a:t>22</a:t>
+            </a:fld>
+            <a:endParaRPr lang="en-US"/>
+          </a:p>
+        </p:txBody>
+      </p:sp>
+    </p:spTree>
+    <p:extLst>
+      <p:ext uri="{BB962C8B-B14F-4D97-AF65-F5344CB8AC3E}">
+        <p14:creationId xmlns:p14="http://schemas.microsoft.com/office/powerpoint/2010/main" val="1024086991"/>
+      </p:ext>
+    </p:extLst>
+  </p:cSld>
+  <p:clrMapOvr>
+    <a:masterClrMapping/>
+  </p:clrMapOvr>
+</p:notes>
+</file>
+
+<file path=ppt/notesSlides/notesSlide23.xml><?xml version="1.0" encoding="utf-8"?>
+<p:notes xmlns:a="http://schemas.openxmlformats.org/drawingml/2006/main" xmlns:r="http://schemas.openxmlformats.org/officeDocument/2006/relationships" xmlns:p="http://schemas.openxmlformats.org/presentationml/2006/main">
+  <p:cSld>
+    <p:spTree>
+      <p:nvGrpSpPr>
+        <p:cNvPr id="1" name=""/>
+        <p:cNvGrpSpPr/>
+        <p:nvPr/>
+      </p:nvGrpSpPr>
+      <p:grpSpPr>
+        <a:xfrm>
+          <a:off x="0" y="0"/>
+          <a:ext cx="0" cy="0"/>
+          <a:chOff x="0" y="0"/>
+          <a:chExt cx="0" cy="0"/>
+        </a:xfrm>
+      </p:grpSpPr>
+      <p:sp>
+        <p:nvSpPr>
+          <p:cNvPr id="2" name="Slide Image Placeholder 1"/>
+          <p:cNvSpPr>
+            <a:spLocks noGrp="1" noRot="1" noChangeAspect="1"/>
+          </p:cNvSpPr>
+          <p:nvPr>
+            <p:ph type="sldImg"/>
+          </p:nvPr>
+        </p:nvSpPr>
+        <p:spPr/>
+      </p:sp>
+      <p:sp>
+        <p:nvSpPr>
+          <p:cNvPr id="3" name="Notes Placeholder 2"/>
+          <p:cNvSpPr>
+            <a:spLocks noGrp="1"/>
+          </p:cNvSpPr>
+          <p:nvPr>
+            <p:ph type="body" idx="1"/>
+          </p:nvPr>
+        </p:nvSpPr>
+        <p:spPr/>
+        <p:txBody>
+          <a:bodyPr/>
+          <a:lstStyle/>
+          <a:p>
+            <a:r>
+              <a:rPr lang="en-US" dirty="0"/>
+              <a:t>Reveal only after everyone has had a go.</a:t>
+            </a:r>
+            <a:endParaRPr lang="en-US" dirty="0"/>
+          </a:p>
+        </p:txBody>
+      </p:sp>
+      <p:sp>
+        <p:nvSpPr>
+          <p:cNvPr id="4" name="Slide Number Placeholder 3"/>
+          <p:cNvSpPr>
+            <a:spLocks noGrp="1"/>
+          </p:cNvSpPr>
+          <p:nvPr>
+            <p:ph type="sldNum" sz="quarter" idx="10"/>
+          </p:nvPr>
+        </p:nvSpPr>
+        <p:spPr/>
+        <p:txBody>
+          <a:bodyPr/>
+          <a:lstStyle/>
+          <a:p>
+            <a:fld id="{F7021451-1387-4CA6-816F-3879F97B5CBC}" type="slidenum">
+              <a:rPr lang="en-US"/>
+              <a:t>23</a:t>
             </a:fld>
             <a:endParaRPr lang="en-US"/>
           </a:p>
@@ -904,7 +2171,7 @@
           <a:p>
             <a:r>
               <a:rPr lang="en-US" dirty="0"/>
-              <a:t>Volunteer 1: take the iPad, write a letter in each box with the Pencil. Pinch to zoom on one note. Everyone else decodes on paper.</a:t>
+              <a:t>Volunteer 1 takes the iPad and writes a letter in each box with the Pencil. Pinch to zoom on one note. Everyone else decodes the same code on paper. Answers are on the last slides.</a:t>
             </a:r>
             <a:endParaRPr lang="en-US" dirty="0"/>
           </a:p>
@@ -992,7 +2259,7 @@
           <a:p>
             <a:r>
               <a:rPr lang="en-US" dirty="0"/>
-              <a:t>Same routine, now in bass clef. Ask a second volunteer, and have them type the answer into a document using the keyboard to show typing.</a:t>
+              <a:t>Codes 3 and 4. One volunteer marks on the iPad, everyone else decodes on paper.</a:t>
             </a:r>
             <a:endParaRPr lang="en-US" dirty="0"/>
           </a:p>
@@ -1080,7 +2347,7 @@
           <a:p>
             <a:r>
               <a:rPr lang="en-US" dirty="0"/>
-              <a:t>Two words, one in each clef. Let the room call out answers while a volunteer marks the staves with the Pencil.</a:t>
+              <a:t>Codes 5 and 6. One volunteer marks on the iPad, everyone else decodes on paper.</a:t>
             </a:r>
             <a:endParaRPr lang="en-US" dirty="0"/>
           </a:p>
@@ -1168,7 +2435,7 @@
           <a:p>
             <a:r>
               <a:rPr lang="en-US" dirty="0"/>
-              <a:t>Camera mode: hold a teacher's page under the iPad. Mark it live with the Pencil and the room sees it on the TV.</a:t>
+              <a:t>Codes 7 and 8. One volunteer marks on the iPad, everyone else decodes on paper.</a:t>
             </a:r>
             <a:endParaRPr lang="en-US" dirty="0"/>
           </a:p>
@@ -1256,7 +2523,7 @@
           <a:p>
             <a:r>
               <a:rPr lang="en-US" dirty="0"/>
-              <a:t>Reveal only after everyone has had a go. Worksheet page 4 is the write-your-own code.</a:t>
+              <a:t>Codes 9 and 10. One volunteer marks on the iPad, everyone else decodes on paper.</a:t>
             </a:r>
             <a:endParaRPr lang="en-US" dirty="0"/>
           </a:p>
@@ -1945,6 +3212,2726 @@
 </p:sld>
 </file>
 
+<file path=ppt/slides/slide10.xml><?xml version="1.0" encoding="utf-8"?>
+<p:sld xmlns:a="http://schemas.openxmlformats.org/drawingml/2006/main" xmlns:r="http://schemas.openxmlformats.org/officeDocument/2006/relationships" xmlns:p="http://schemas.openxmlformats.org/presentationml/2006/main">
+  <p:cSld name="Slide 10">
+    <p:spTree>
+      <p:nvGrpSpPr>
+        <p:cNvPr id="1" name=""/>
+        <p:cNvGrpSpPr/>
+        <p:nvPr/>
+      </p:nvGrpSpPr>
+      <p:grpSpPr>
+        <a:xfrm>
+          <a:off x="0" y="0"/>
+          <a:ext cx="0" cy="0"/>
+          <a:chOff x="0" y="0"/>
+          <a:chExt cx="0" cy="0"/>
+        </a:xfrm>
+      </p:grpSpPr>
+      <p:sp>
+        <p:nvSpPr>
+          <p:cNvPr id="2" name="Text 0"/>
+          <p:cNvSpPr/>
+          <p:nvPr>
+            <p:ph idx="100" type="title" hasCustomPrompt="1"/>
+          </p:nvPr>
+        </p:nvSpPr>
+        <p:spPr>
+          <a:xfrm>
+            <a:off x="640080" y="320040"/>
+            <a:ext cx="10881360" cy="868680"/>
+          </a:xfrm>
+          <a:prstGeom prst="rect">
+            <a:avLst/>
+          </a:prstGeom>
+          <a:noFill/>
+          <a:ln/>
+        </p:spPr>
+        <p:txBody>
+          <a:bodyPr wrap="square" lIns="0" tIns="0" rIns="0" bIns="0" rtlCol="0" anchor="ctr"/>
+          <a:lstStyle/>
+          <a:p>
+            <a:pPr algn="l" indent="0" marL="0">
+              <a:buNone/>
+            </a:pPr>
+            <a:r>
+              <a:rPr lang="en-US" sz="4000" b="1" dirty="0">
+                <a:solidFill>
+                  <a:schemeClr val="tx1"/>
+                </a:solidFill>
+                <a:latin typeface="Cambria" pitchFamily="34" charset="0"/>
+                <a:ea typeface="Cambria" pitchFamily="34" charset="-122"/>
+                <a:cs typeface="Cambria" pitchFamily="34" charset="-120"/>
+              </a:rPr>
+              <a:t>Treble clef: 11 and 12</a:t>
+            </a:r>
+            <a:endParaRPr lang="en-US" sz="4000" dirty="0"/>
+          </a:p>
+        </p:txBody>
+      </p:sp>
+      <p:sp>
+        <p:nvSpPr>
+          <p:cNvPr id="3" name="Treble clef 11 badge"/>
+          <p:cNvSpPr/>
+          <p:nvPr/>
+        </p:nvSpPr>
+        <p:spPr>
+          <a:xfrm>
+            <a:off x="640080" y="1417320"/>
+            <a:ext cx="548640" cy="548640"/>
+          </a:xfrm>
+          <a:prstGeom prst="ellipse">
+            <a:avLst/>
+          </a:prstGeom>
+          <a:solidFill>
+            <a:schemeClr val="accent1"/>
+          </a:solidFill>
+          <a:ln w="12700">
+            <a:solidFill>
+              <a:schemeClr val="accent1"/>
+            </a:solidFill>
+            <a:prstDash val="solid"/>
+          </a:ln>
+        </p:spPr>
+      </p:sp>
+      <p:sp>
+        <p:nvSpPr>
+          <p:cNvPr id="4" name="Treble clef 11 number"/>
+          <p:cNvSpPr txBox="1"/>
+          <p:nvPr/>
+        </p:nvSpPr>
+        <p:spPr>
+          <a:xfrm>
+            <a:off x="640080" y="1417320"/>
+            <a:ext cx="548640" cy="548640"/>
+          </a:xfrm>
+          <a:prstGeom prst="rect">
+            <a:avLst/>
+          </a:prstGeom>
+          <a:noFill/>
+          <a:ln/>
+        </p:spPr>
+        <p:txBody>
+          <a:bodyPr wrap="square" lIns="0" tIns="0" rIns="0" bIns="0" rtlCol="0" anchor="ctr"/>
+          <a:lstStyle/>
+          <a:p>
+            <a:pPr algn="ctr" indent="0" marL="0">
+              <a:buNone/>
+            </a:pPr>
+            <a:r>
+              <a:rPr lang="en-US" sz="2200" b="1" dirty="0">
+                <a:solidFill>
+                  <a:schemeClr val="tx1"/>
+                </a:solidFill>
+              </a:rPr>
+              <a:t>11</a:t>
+            </a:r>
+            <a:endParaRPr lang="en-US" sz="2200" dirty="0"/>
+          </a:p>
+        </p:txBody>
+      </p:sp>
+      <p:pic>
+        <p:nvPicPr>
+          <p:cNvPr id="5" name="t11" descr="Treble clef code 11: stave with 6 notes and 6 empty answer boxes">    </p:cNvPr>
+          <p:cNvPicPr>
+            <a:picLocks noChangeAspect="1"/>
+          </p:cNvPicPr>
+          <p:nvPr/>
+        </p:nvPicPr>
+        <p:blipFill>
+          <a:blip r:embed="rId1"/>
+          <a:stretch>
+            <a:fillRect/>
+          </a:stretch>
+        </p:blipFill>
+        <p:spPr>
+          <a:xfrm>
+            <a:off x="640080" y="2148840"/>
+            <a:ext cx="5303520" cy="2394308"/>
+          </a:xfrm>
+          <a:prstGeom prst="rect">
+            <a:avLst/>
+          </a:prstGeom>
+        </p:spPr>
+      </p:pic>
+      <p:sp>
+        <p:nvSpPr>
+          <p:cNvPr id="6" name="Treble clef 12 badge"/>
+          <p:cNvSpPr/>
+          <p:nvPr/>
+        </p:nvSpPr>
+        <p:spPr>
+          <a:xfrm>
+            <a:off x="6309360" y="1417320"/>
+            <a:ext cx="548640" cy="548640"/>
+          </a:xfrm>
+          <a:prstGeom prst="ellipse">
+            <a:avLst/>
+          </a:prstGeom>
+          <a:solidFill>
+            <a:schemeClr val="accent1"/>
+          </a:solidFill>
+          <a:ln w="12700">
+            <a:solidFill>
+              <a:schemeClr val="accent1"/>
+            </a:solidFill>
+            <a:prstDash val="solid"/>
+          </a:ln>
+        </p:spPr>
+      </p:sp>
+      <p:sp>
+        <p:nvSpPr>
+          <p:cNvPr id="7" name="Treble clef 12 number"/>
+          <p:cNvSpPr txBox="1"/>
+          <p:nvPr/>
+        </p:nvSpPr>
+        <p:spPr>
+          <a:xfrm>
+            <a:off x="6309360" y="1417320"/>
+            <a:ext cx="548640" cy="548640"/>
+          </a:xfrm>
+          <a:prstGeom prst="rect">
+            <a:avLst/>
+          </a:prstGeom>
+          <a:noFill/>
+          <a:ln/>
+        </p:spPr>
+        <p:txBody>
+          <a:bodyPr wrap="square" lIns="0" tIns="0" rIns="0" bIns="0" rtlCol="0" anchor="ctr"/>
+          <a:lstStyle/>
+          <a:p>
+            <a:pPr algn="ctr" indent="0" marL="0">
+              <a:buNone/>
+            </a:pPr>
+            <a:r>
+              <a:rPr lang="en-US" sz="2200" b="1" dirty="0">
+                <a:solidFill>
+                  <a:schemeClr val="tx1"/>
+                </a:solidFill>
+              </a:rPr>
+              <a:t>12</a:t>
+            </a:r>
+            <a:endParaRPr lang="en-US" sz="2200" dirty="0"/>
+          </a:p>
+        </p:txBody>
+      </p:sp>
+      <p:pic>
+        <p:nvPicPr>
+          <p:cNvPr id="8" name="t12" descr="Treble clef code 12: stave with 6 notes and 6 empty answer boxes">    </p:cNvPr>
+          <p:cNvPicPr>
+            <a:picLocks noChangeAspect="1"/>
+          </p:cNvPicPr>
+          <p:nvPr/>
+        </p:nvPicPr>
+        <p:blipFill>
+          <a:blip r:embed="rId2"/>
+          <a:stretch>
+            <a:fillRect/>
+          </a:stretch>
+        </p:blipFill>
+        <p:spPr>
+          <a:xfrm>
+            <a:off x="6309360" y="2148840"/>
+            <a:ext cx="5303520" cy="2394308"/>
+          </a:xfrm>
+          <a:prstGeom prst="rect">
+            <a:avLst/>
+          </a:prstGeom>
+        </p:spPr>
+      </p:pic>
+      <p:sp>
+        <p:nvSpPr>
+          <p:cNvPr id="9" name="Key reminder"/>
+          <p:cNvSpPr txBox="1"/>
+          <p:nvPr/>
+        </p:nvSpPr>
+        <p:spPr>
+          <a:xfrm>
+            <a:off x="640080" y="6172200"/>
+            <a:ext cx="10881360" cy="365760"/>
+          </a:xfrm>
+          <a:prstGeom prst="rect">
+            <a:avLst/>
+          </a:prstGeom>
+          <a:noFill/>
+          <a:ln/>
+        </p:spPr>
+        <p:txBody>
+          <a:bodyPr wrap="square" lIns="0" tIns="0" rIns="0" bIns="0" rtlCol="0" anchor="ctr"/>
+          <a:lstStyle/>
+          <a:p>
+            <a:pPr indent="0" marL="0">
+              <a:buNone/>
+            </a:pPr>
+            <a:r>
+              <a:rPr lang="en-US" sz="1600" i="1" dirty="0">
+                <a:solidFill>
+                  <a:schemeClr val="tx1"/>
+                </a:solidFill>
+              </a:rPr>
+              <a:t>Lines: E G B D F   |   Spaces: F A C E</a:t>
+            </a:r>
+            <a:endParaRPr lang="en-US" sz="1600" dirty="0"/>
+          </a:p>
+        </p:txBody>
+      </p:sp>
+    </p:spTree>
+  </p:cSld>
+  <p:clrMapOvr>
+    <a:masterClrMapping/>
+  </p:clrMapOvr>
+</p:sld>
+</file>
+
+<file path=ppt/slides/slide11.xml><?xml version="1.0" encoding="utf-8"?>
+<p:sld xmlns:a="http://schemas.openxmlformats.org/drawingml/2006/main" xmlns:r="http://schemas.openxmlformats.org/officeDocument/2006/relationships" xmlns:p="http://schemas.openxmlformats.org/presentationml/2006/main">
+  <p:cSld name="Slide 11">
+    <p:spTree>
+      <p:nvGrpSpPr>
+        <p:cNvPr id="1" name=""/>
+        <p:cNvGrpSpPr/>
+        <p:nvPr/>
+      </p:nvGrpSpPr>
+      <p:grpSpPr>
+        <a:xfrm>
+          <a:off x="0" y="0"/>
+          <a:ext cx="0" cy="0"/>
+          <a:chOff x="0" y="0"/>
+          <a:chExt cx="0" cy="0"/>
+        </a:xfrm>
+      </p:grpSpPr>
+      <p:sp>
+        <p:nvSpPr>
+          <p:cNvPr id="2" name="Text 0"/>
+          <p:cNvSpPr/>
+          <p:nvPr>
+            <p:ph idx="100" type="title" hasCustomPrompt="1"/>
+          </p:nvPr>
+        </p:nvSpPr>
+        <p:spPr>
+          <a:xfrm>
+            <a:off x="640080" y="320040"/>
+            <a:ext cx="10881360" cy="868680"/>
+          </a:xfrm>
+          <a:prstGeom prst="rect">
+            <a:avLst/>
+          </a:prstGeom>
+          <a:noFill/>
+          <a:ln/>
+        </p:spPr>
+        <p:txBody>
+          <a:bodyPr wrap="square" lIns="0" tIns="0" rIns="0" bIns="0" rtlCol="0" anchor="ctr"/>
+          <a:lstStyle/>
+          <a:p>
+            <a:pPr algn="l" indent="0" marL="0">
+              <a:buNone/>
+            </a:pPr>
+            <a:r>
+              <a:rPr lang="en-US" sz="4000" b="1" dirty="0">
+                <a:solidFill>
+                  <a:schemeClr val="tx1"/>
+                </a:solidFill>
+                <a:latin typeface="Cambria" pitchFamily="34" charset="0"/>
+                <a:ea typeface="Cambria" pitchFamily="34" charset="-122"/>
+                <a:cs typeface="Cambria" pitchFamily="34" charset="-120"/>
+              </a:rPr>
+              <a:t>Bass clef: 1 and 2</a:t>
+            </a:r>
+            <a:endParaRPr lang="en-US" sz="4000" dirty="0"/>
+          </a:p>
+        </p:txBody>
+      </p:sp>
+      <p:sp>
+        <p:nvSpPr>
+          <p:cNvPr id="3" name="Bass clef 1 badge"/>
+          <p:cNvSpPr/>
+          <p:nvPr/>
+        </p:nvSpPr>
+        <p:spPr>
+          <a:xfrm>
+            <a:off x="640080" y="1417320"/>
+            <a:ext cx="548640" cy="548640"/>
+          </a:xfrm>
+          <a:prstGeom prst="ellipse">
+            <a:avLst/>
+          </a:prstGeom>
+          <a:solidFill>
+            <a:schemeClr val="accent1"/>
+          </a:solidFill>
+          <a:ln w="12700">
+            <a:solidFill>
+              <a:schemeClr val="accent1"/>
+            </a:solidFill>
+            <a:prstDash val="solid"/>
+          </a:ln>
+        </p:spPr>
+      </p:sp>
+      <p:sp>
+        <p:nvSpPr>
+          <p:cNvPr id="4" name="Bass clef 1 number"/>
+          <p:cNvSpPr txBox="1"/>
+          <p:nvPr/>
+        </p:nvSpPr>
+        <p:spPr>
+          <a:xfrm>
+            <a:off x="640080" y="1417320"/>
+            <a:ext cx="548640" cy="548640"/>
+          </a:xfrm>
+          <a:prstGeom prst="rect">
+            <a:avLst/>
+          </a:prstGeom>
+          <a:noFill/>
+          <a:ln/>
+        </p:spPr>
+        <p:txBody>
+          <a:bodyPr wrap="square" lIns="0" tIns="0" rIns="0" bIns="0" rtlCol="0" anchor="ctr"/>
+          <a:lstStyle/>
+          <a:p>
+            <a:pPr algn="ctr" indent="0" marL="0">
+              <a:buNone/>
+            </a:pPr>
+            <a:r>
+              <a:rPr lang="en-US" sz="2200" b="1" dirty="0">
+                <a:solidFill>
+                  <a:schemeClr val="tx1"/>
+                </a:solidFill>
+              </a:rPr>
+              <a:t>1</a:t>
+            </a:r>
+            <a:endParaRPr lang="en-US" sz="2200" dirty="0"/>
+          </a:p>
+        </p:txBody>
+      </p:sp>
+      <p:pic>
+        <p:nvPicPr>
+          <p:cNvPr id="5" name="b01" descr="Bass clef code 1: stave with 3 notes and 3 empty answer boxes">    </p:cNvPr>
+          <p:cNvPicPr>
+            <a:picLocks noChangeAspect="1"/>
+          </p:cNvPicPr>
+          <p:nvPr/>
+        </p:nvPicPr>
+        <p:blipFill>
+          <a:blip r:embed="rId1"/>
+          <a:stretch>
+            <a:fillRect/>
+          </a:stretch>
+        </p:blipFill>
+        <p:spPr>
+          <a:xfrm>
+            <a:off x="640080" y="2148840"/>
+            <a:ext cx="5303520" cy="3506699"/>
+          </a:xfrm>
+          <a:prstGeom prst="rect">
+            <a:avLst/>
+          </a:prstGeom>
+        </p:spPr>
+      </p:pic>
+      <p:sp>
+        <p:nvSpPr>
+          <p:cNvPr id="6" name="Bass clef 2 badge"/>
+          <p:cNvSpPr/>
+          <p:nvPr/>
+        </p:nvSpPr>
+        <p:spPr>
+          <a:xfrm>
+            <a:off x="6309360" y="1417320"/>
+            <a:ext cx="548640" cy="548640"/>
+          </a:xfrm>
+          <a:prstGeom prst="ellipse">
+            <a:avLst/>
+          </a:prstGeom>
+          <a:solidFill>
+            <a:schemeClr val="accent1"/>
+          </a:solidFill>
+          <a:ln w="12700">
+            <a:solidFill>
+              <a:schemeClr val="accent1"/>
+            </a:solidFill>
+            <a:prstDash val="solid"/>
+          </a:ln>
+        </p:spPr>
+      </p:sp>
+      <p:sp>
+        <p:nvSpPr>
+          <p:cNvPr id="7" name="Bass clef 2 number"/>
+          <p:cNvSpPr txBox="1"/>
+          <p:nvPr/>
+        </p:nvSpPr>
+        <p:spPr>
+          <a:xfrm>
+            <a:off x="6309360" y="1417320"/>
+            <a:ext cx="548640" cy="548640"/>
+          </a:xfrm>
+          <a:prstGeom prst="rect">
+            <a:avLst/>
+          </a:prstGeom>
+          <a:noFill/>
+          <a:ln/>
+        </p:spPr>
+        <p:txBody>
+          <a:bodyPr wrap="square" lIns="0" tIns="0" rIns="0" bIns="0" rtlCol="0" anchor="ctr"/>
+          <a:lstStyle/>
+          <a:p>
+            <a:pPr algn="ctr" indent="0" marL="0">
+              <a:buNone/>
+            </a:pPr>
+            <a:r>
+              <a:rPr lang="en-US" sz="2200" b="1" dirty="0">
+                <a:solidFill>
+                  <a:schemeClr val="tx1"/>
+                </a:solidFill>
+              </a:rPr>
+              <a:t>2</a:t>
+            </a:r>
+            <a:endParaRPr lang="en-US" sz="2200" dirty="0"/>
+          </a:p>
+        </p:txBody>
+      </p:sp>
+      <p:pic>
+        <p:nvPicPr>
+          <p:cNvPr id="8" name="b02" descr="Bass clef code 2: stave with 3 notes and 3 empty answer boxes">    </p:cNvPr>
+          <p:cNvPicPr>
+            <a:picLocks noChangeAspect="1"/>
+          </p:cNvPicPr>
+          <p:nvPr/>
+        </p:nvPicPr>
+        <p:blipFill>
+          <a:blip r:embed="rId2"/>
+          <a:stretch>
+            <a:fillRect/>
+          </a:stretch>
+        </p:blipFill>
+        <p:spPr>
+          <a:xfrm>
+            <a:off x="6309360" y="2148840"/>
+            <a:ext cx="5303520" cy="3702321"/>
+          </a:xfrm>
+          <a:prstGeom prst="rect">
+            <a:avLst/>
+          </a:prstGeom>
+        </p:spPr>
+      </p:pic>
+      <p:sp>
+        <p:nvSpPr>
+          <p:cNvPr id="9" name="Key reminder"/>
+          <p:cNvSpPr txBox="1"/>
+          <p:nvPr/>
+        </p:nvSpPr>
+        <p:spPr>
+          <a:xfrm>
+            <a:off x="640080" y="6172200"/>
+            <a:ext cx="10881360" cy="365760"/>
+          </a:xfrm>
+          <a:prstGeom prst="rect">
+            <a:avLst/>
+          </a:prstGeom>
+          <a:noFill/>
+          <a:ln/>
+        </p:spPr>
+        <p:txBody>
+          <a:bodyPr wrap="square" lIns="0" tIns="0" rIns="0" bIns="0" rtlCol="0" anchor="ctr"/>
+          <a:lstStyle/>
+          <a:p>
+            <a:pPr indent="0" marL="0">
+              <a:buNone/>
+            </a:pPr>
+            <a:r>
+              <a:rPr lang="en-US" sz="1600" i="1" dirty="0">
+                <a:solidFill>
+                  <a:schemeClr val="tx1"/>
+                </a:solidFill>
+              </a:rPr>
+              <a:t>Lines: G B D F A   |   Spaces: A C E G</a:t>
+            </a:r>
+            <a:endParaRPr lang="en-US" sz="1600" dirty="0"/>
+          </a:p>
+        </p:txBody>
+      </p:sp>
+    </p:spTree>
+  </p:cSld>
+  <p:clrMapOvr>
+    <a:masterClrMapping/>
+  </p:clrMapOvr>
+</p:sld>
+</file>
+
+<file path=ppt/slides/slide12.xml><?xml version="1.0" encoding="utf-8"?>
+<p:sld xmlns:a="http://schemas.openxmlformats.org/drawingml/2006/main" xmlns:r="http://schemas.openxmlformats.org/officeDocument/2006/relationships" xmlns:p="http://schemas.openxmlformats.org/presentationml/2006/main">
+  <p:cSld name="Slide 12">
+    <p:spTree>
+      <p:nvGrpSpPr>
+        <p:cNvPr id="1" name=""/>
+        <p:cNvGrpSpPr/>
+        <p:nvPr/>
+      </p:nvGrpSpPr>
+      <p:grpSpPr>
+        <a:xfrm>
+          <a:off x="0" y="0"/>
+          <a:ext cx="0" cy="0"/>
+          <a:chOff x="0" y="0"/>
+          <a:chExt cx="0" cy="0"/>
+        </a:xfrm>
+      </p:grpSpPr>
+      <p:sp>
+        <p:nvSpPr>
+          <p:cNvPr id="2" name="Text 0"/>
+          <p:cNvSpPr/>
+          <p:nvPr>
+            <p:ph idx="100" type="title" hasCustomPrompt="1"/>
+          </p:nvPr>
+        </p:nvSpPr>
+        <p:spPr>
+          <a:xfrm>
+            <a:off x="640080" y="320040"/>
+            <a:ext cx="10881360" cy="868680"/>
+          </a:xfrm>
+          <a:prstGeom prst="rect">
+            <a:avLst/>
+          </a:prstGeom>
+          <a:noFill/>
+          <a:ln/>
+        </p:spPr>
+        <p:txBody>
+          <a:bodyPr wrap="square" lIns="0" tIns="0" rIns="0" bIns="0" rtlCol="0" anchor="ctr"/>
+          <a:lstStyle/>
+          <a:p>
+            <a:pPr algn="l" indent="0" marL="0">
+              <a:buNone/>
+            </a:pPr>
+            <a:r>
+              <a:rPr lang="en-US" sz="4000" b="1" dirty="0">
+                <a:solidFill>
+                  <a:schemeClr val="tx1"/>
+                </a:solidFill>
+                <a:latin typeface="Cambria" pitchFamily="34" charset="0"/>
+                <a:ea typeface="Cambria" pitchFamily="34" charset="-122"/>
+                <a:cs typeface="Cambria" pitchFamily="34" charset="-120"/>
+              </a:rPr>
+              <a:t>Bass clef: 3 and 4</a:t>
+            </a:r>
+            <a:endParaRPr lang="en-US" sz="4000" dirty="0"/>
+          </a:p>
+        </p:txBody>
+      </p:sp>
+      <p:sp>
+        <p:nvSpPr>
+          <p:cNvPr id="3" name="Bass clef 3 badge"/>
+          <p:cNvSpPr/>
+          <p:nvPr/>
+        </p:nvSpPr>
+        <p:spPr>
+          <a:xfrm>
+            <a:off x="640080" y="1417320"/>
+            <a:ext cx="548640" cy="548640"/>
+          </a:xfrm>
+          <a:prstGeom prst="ellipse">
+            <a:avLst/>
+          </a:prstGeom>
+          <a:solidFill>
+            <a:schemeClr val="accent1"/>
+          </a:solidFill>
+          <a:ln w="12700">
+            <a:solidFill>
+              <a:schemeClr val="accent1"/>
+            </a:solidFill>
+            <a:prstDash val="solid"/>
+          </a:ln>
+        </p:spPr>
+      </p:sp>
+      <p:sp>
+        <p:nvSpPr>
+          <p:cNvPr id="4" name="Bass clef 3 number"/>
+          <p:cNvSpPr txBox="1"/>
+          <p:nvPr/>
+        </p:nvSpPr>
+        <p:spPr>
+          <a:xfrm>
+            <a:off x="640080" y="1417320"/>
+            <a:ext cx="548640" cy="548640"/>
+          </a:xfrm>
+          <a:prstGeom prst="rect">
+            <a:avLst/>
+          </a:prstGeom>
+          <a:noFill/>
+          <a:ln/>
+        </p:spPr>
+        <p:txBody>
+          <a:bodyPr wrap="square" lIns="0" tIns="0" rIns="0" bIns="0" rtlCol="0" anchor="ctr"/>
+          <a:lstStyle/>
+          <a:p>
+            <a:pPr algn="ctr" indent="0" marL="0">
+              <a:buNone/>
+            </a:pPr>
+            <a:r>
+              <a:rPr lang="en-US" sz="2200" b="1" dirty="0">
+                <a:solidFill>
+                  <a:schemeClr val="tx1"/>
+                </a:solidFill>
+              </a:rPr>
+              <a:t>3</a:t>
+            </a:r>
+            <a:endParaRPr lang="en-US" sz="2200" dirty="0"/>
+          </a:p>
+        </p:txBody>
+      </p:sp>
+      <p:pic>
+        <p:nvPicPr>
+          <p:cNvPr id="5" name="b03" descr="Bass clef code 3: stave with 3 notes and 3 empty answer boxes">    </p:cNvPr>
+          <p:cNvPicPr>
+            <a:picLocks noChangeAspect="1"/>
+          </p:cNvPicPr>
+          <p:nvPr/>
+        </p:nvPicPr>
+        <p:blipFill>
+          <a:blip r:embed="rId1"/>
+          <a:stretch>
+            <a:fillRect/>
+          </a:stretch>
+        </p:blipFill>
+        <p:spPr>
+          <a:xfrm>
+            <a:off x="640080" y="2148840"/>
+            <a:ext cx="5303520" cy="3506699"/>
+          </a:xfrm>
+          <a:prstGeom prst="rect">
+            <a:avLst/>
+          </a:prstGeom>
+        </p:spPr>
+      </p:pic>
+      <p:sp>
+        <p:nvSpPr>
+          <p:cNvPr id="6" name="Bass clef 4 badge"/>
+          <p:cNvSpPr/>
+          <p:nvPr/>
+        </p:nvSpPr>
+        <p:spPr>
+          <a:xfrm>
+            <a:off x="6309360" y="1417320"/>
+            <a:ext cx="548640" cy="548640"/>
+          </a:xfrm>
+          <a:prstGeom prst="ellipse">
+            <a:avLst/>
+          </a:prstGeom>
+          <a:solidFill>
+            <a:schemeClr val="accent1"/>
+          </a:solidFill>
+          <a:ln w="12700">
+            <a:solidFill>
+              <a:schemeClr val="accent1"/>
+            </a:solidFill>
+            <a:prstDash val="solid"/>
+          </a:ln>
+        </p:spPr>
+      </p:sp>
+      <p:sp>
+        <p:nvSpPr>
+          <p:cNvPr id="7" name="Bass clef 4 number"/>
+          <p:cNvSpPr txBox="1"/>
+          <p:nvPr/>
+        </p:nvSpPr>
+        <p:spPr>
+          <a:xfrm>
+            <a:off x="6309360" y="1417320"/>
+            <a:ext cx="548640" cy="548640"/>
+          </a:xfrm>
+          <a:prstGeom prst="rect">
+            <a:avLst/>
+          </a:prstGeom>
+          <a:noFill/>
+          <a:ln/>
+        </p:spPr>
+        <p:txBody>
+          <a:bodyPr wrap="square" lIns="0" tIns="0" rIns="0" bIns="0" rtlCol="0" anchor="ctr"/>
+          <a:lstStyle/>
+          <a:p>
+            <a:pPr algn="ctr" indent="0" marL="0">
+              <a:buNone/>
+            </a:pPr>
+            <a:r>
+              <a:rPr lang="en-US" sz="2200" b="1" dirty="0">
+                <a:solidFill>
+                  <a:schemeClr val="tx1"/>
+                </a:solidFill>
+              </a:rPr>
+              <a:t>4</a:t>
+            </a:r>
+            <a:endParaRPr lang="en-US" sz="2200" dirty="0"/>
+          </a:p>
+        </p:txBody>
+      </p:sp>
+      <p:pic>
+        <p:nvPicPr>
+          <p:cNvPr id="8" name="b04" descr="Bass clef code 4: stave with 3 notes and 3 empty answer boxes">    </p:cNvPr>
+          <p:cNvPicPr>
+            <a:picLocks noChangeAspect="1"/>
+          </p:cNvPicPr>
+          <p:nvPr/>
+        </p:nvPicPr>
+        <p:blipFill>
+          <a:blip r:embed="rId2"/>
+          <a:stretch>
+            <a:fillRect/>
+          </a:stretch>
+        </p:blipFill>
+        <p:spPr>
+          <a:xfrm>
+            <a:off x="6309360" y="2148840"/>
+            <a:ext cx="5303520" cy="3506699"/>
+          </a:xfrm>
+          <a:prstGeom prst="rect">
+            <a:avLst/>
+          </a:prstGeom>
+        </p:spPr>
+      </p:pic>
+      <p:sp>
+        <p:nvSpPr>
+          <p:cNvPr id="9" name="Key reminder"/>
+          <p:cNvSpPr txBox="1"/>
+          <p:nvPr/>
+        </p:nvSpPr>
+        <p:spPr>
+          <a:xfrm>
+            <a:off x="640080" y="6172200"/>
+            <a:ext cx="10881360" cy="365760"/>
+          </a:xfrm>
+          <a:prstGeom prst="rect">
+            <a:avLst/>
+          </a:prstGeom>
+          <a:noFill/>
+          <a:ln/>
+        </p:spPr>
+        <p:txBody>
+          <a:bodyPr wrap="square" lIns="0" tIns="0" rIns="0" bIns="0" rtlCol="0" anchor="ctr"/>
+          <a:lstStyle/>
+          <a:p>
+            <a:pPr indent="0" marL="0">
+              <a:buNone/>
+            </a:pPr>
+            <a:r>
+              <a:rPr lang="en-US" sz="1600" i="1" dirty="0">
+                <a:solidFill>
+                  <a:schemeClr val="tx1"/>
+                </a:solidFill>
+              </a:rPr>
+              <a:t>Lines: G B D F A   |   Spaces: A C E G</a:t>
+            </a:r>
+            <a:endParaRPr lang="en-US" sz="1600" dirty="0"/>
+          </a:p>
+        </p:txBody>
+      </p:sp>
+    </p:spTree>
+  </p:cSld>
+  <p:clrMapOvr>
+    <a:masterClrMapping/>
+  </p:clrMapOvr>
+</p:sld>
+</file>
+
+<file path=ppt/slides/slide13.xml><?xml version="1.0" encoding="utf-8"?>
+<p:sld xmlns:a="http://schemas.openxmlformats.org/drawingml/2006/main" xmlns:r="http://schemas.openxmlformats.org/officeDocument/2006/relationships" xmlns:p="http://schemas.openxmlformats.org/presentationml/2006/main">
+  <p:cSld name="Slide 13">
+    <p:spTree>
+      <p:nvGrpSpPr>
+        <p:cNvPr id="1" name=""/>
+        <p:cNvGrpSpPr/>
+        <p:nvPr/>
+      </p:nvGrpSpPr>
+      <p:grpSpPr>
+        <a:xfrm>
+          <a:off x="0" y="0"/>
+          <a:ext cx="0" cy="0"/>
+          <a:chOff x="0" y="0"/>
+          <a:chExt cx="0" cy="0"/>
+        </a:xfrm>
+      </p:grpSpPr>
+      <p:sp>
+        <p:nvSpPr>
+          <p:cNvPr id="2" name="Text 0"/>
+          <p:cNvSpPr/>
+          <p:nvPr>
+            <p:ph idx="100" type="title" hasCustomPrompt="1"/>
+          </p:nvPr>
+        </p:nvSpPr>
+        <p:spPr>
+          <a:xfrm>
+            <a:off x="640080" y="320040"/>
+            <a:ext cx="10881360" cy="868680"/>
+          </a:xfrm>
+          <a:prstGeom prst="rect">
+            <a:avLst/>
+          </a:prstGeom>
+          <a:noFill/>
+          <a:ln/>
+        </p:spPr>
+        <p:txBody>
+          <a:bodyPr wrap="square" lIns="0" tIns="0" rIns="0" bIns="0" rtlCol="0" anchor="ctr"/>
+          <a:lstStyle/>
+          <a:p>
+            <a:pPr algn="l" indent="0" marL="0">
+              <a:buNone/>
+            </a:pPr>
+            <a:r>
+              <a:rPr lang="en-US" sz="4000" b="1" dirty="0">
+                <a:solidFill>
+                  <a:schemeClr val="tx1"/>
+                </a:solidFill>
+                <a:latin typeface="Cambria" pitchFamily="34" charset="0"/>
+                <a:ea typeface="Cambria" pitchFamily="34" charset="-122"/>
+                <a:cs typeface="Cambria" pitchFamily="34" charset="-120"/>
+              </a:rPr>
+              <a:t>Bass clef: 5 and 6</a:t>
+            </a:r>
+            <a:endParaRPr lang="en-US" sz="4000" dirty="0"/>
+          </a:p>
+        </p:txBody>
+      </p:sp>
+      <p:sp>
+        <p:nvSpPr>
+          <p:cNvPr id="3" name="Bass clef 5 badge"/>
+          <p:cNvSpPr/>
+          <p:nvPr/>
+        </p:nvSpPr>
+        <p:spPr>
+          <a:xfrm>
+            <a:off x="640080" y="1417320"/>
+            <a:ext cx="548640" cy="548640"/>
+          </a:xfrm>
+          <a:prstGeom prst="ellipse">
+            <a:avLst/>
+          </a:prstGeom>
+          <a:solidFill>
+            <a:schemeClr val="accent1"/>
+          </a:solidFill>
+          <a:ln w="12700">
+            <a:solidFill>
+              <a:schemeClr val="accent1"/>
+            </a:solidFill>
+            <a:prstDash val="solid"/>
+          </a:ln>
+        </p:spPr>
+      </p:sp>
+      <p:sp>
+        <p:nvSpPr>
+          <p:cNvPr id="4" name="Bass clef 5 number"/>
+          <p:cNvSpPr txBox="1"/>
+          <p:nvPr/>
+        </p:nvSpPr>
+        <p:spPr>
+          <a:xfrm>
+            <a:off x="640080" y="1417320"/>
+            <a:ext cx="548640" cy="548640"/>
+          </a:xfrm>
+          <a:prstGeom prst="rect">
+            <a:avLst/>
+          </a:prstGeom>
+          <a:noFill/>
+          <a:ln/>
+        </p:spPr>
+        <p:txBody>
+          <a:bodyPr wrap="square" lIns="0" tIns="0" rIns="0" bIns="0" rtlCol="0" anchor="ctr"/>
+          <a:lstStyle/>
+          <a:p>
+            <a:pPr algn="ctr" indent="0" marL="0">
+              <a:buNone/>
+            </a:pPr>
+            <a:r>
+              <a:rPr lang="en-US" sz="2200" b="1" dirty="0">
+                <a:solidFill>
+                  <a:schemeClr val="tx1"/>
+                </a:solidFill>
+              </a:rPr>
+              <a:t>5</a:t>
+            </a:r>
+            <a:endParaRPr lang="en-US" sz="2200" dirty="0"/>
+          </a:p>
+        </p:txBody>
+      </p:sp>
+      <p:pic>
+        <p:nvPicPr>
+          <p:cNvPr id="5" name="b05" descr="Bass clef code 5: stave with 4 notes and 4 empty answer boxes">    </p:cNvPr>
+          <p:cNvPicPr>
+            <a:picLocks noChangeAspect="1"/>
+          </p:cNvPicPr>
+          <p:nvPr/>
+        </p:nvPicPr>
+        <p:blipFill>
+          <a:blip r:embed="rId1"/>
+          <a:stretch>
+            <a:fillRect/>
+          </a:stretch>
+        </p:blipFill>
+        <p:spPr>
+          <a:xfrm>
+            <a:off x="640080" y="2148840"/>
+            <a:ext cx="5303520" cy="2852115"/>
+          </a:xfrm>
+          <a:prstGeom prst="rect">
+            <a:avLst/>
+          </a:prstGeom>
+        </p:spPr>
+      </p:pic>
+      <p:sp>
+        <p:nvSpPr>
+          <p:cNvPr id="6" name="Bass clef 6 badge"/>
+          <p:cNvSpPr/>
+          <p:nvPr/>
+        </p:nvSpPr>
+        <p:spPr>
+          <a:xfrm>
+            <a:off x="6309360" y="1417320"/>
+            <a:ext cx="548640" cy="548640"/>
+          </a:xfrm>
+          <a:prstGeom prst="ellipse">
+            <a:avLst/>
+          </a:prstGeom>
+          <a:solidFill>
+            <a:schemeClr val="accent1"/>
+          </a:solidFill>
+          <a:ln w="12700">
+            <a:solidFill>
+              <a:schemeClr val="accent1"/>
+            </a:solidFill>
+            <a:prstDash val="solid"/>
+          </a:ln>
+        </p:spPr>
+      </p:sp>
+      <p:sp>
+        <p:nvSpPr>
+          <p:cNvPr id="7" name="Bass clef 6 number"/>
+          <p:cNvSpPr txBox="1"/>
+          <p:nvPr/>
+        </p:nvSpPr>
+        <p:spPr>
+          <a:xfrm>
+            <a:off x="6309360" y="1417320"/>
+            <a:ext cx="548640" cy="548640"/>
+          </a:xfrm>
+          <a:prstGeom prst="rect">
+            <a:avLst/>
+          </a:prstGeom>
+          <a:noFill/>
+          <a:ln/>
+        </p:spPr>
+        <p:txBody>
+          <a:bodyPr wrap="square" lIns="0" tIns="0" rIns="0" bIns="0" rtlCol="0" anchor="ctr"/>
+          <a:lstStyle/>
+          <a:p>
+            <a:pPr algn="ctr" indent="0" marL="0">
+              <a:buNone/>
+            </a:pPr>
+            <a:r>
+              <a:rPr lang="en-US" sz="2200" b="1" dirty="0">
+                <a:solidFill>
+                  <a:schemeClr val="tx1"/>
+                </a:solidFill>
+              </a:rPr>
+              <a:t>6</a:t>
+            </a:r>
+            <a:endParaRPr lang="en-US" sz="2200" dirty="0"/>
+          </a:p>
+        </p:txBody>
+      </p:sp>
+      <p:pic>
+        <p:nvPicPr>
+          <p:cNvPr id="8" name="b06" descr="Bass clef code 6: stave with 4 notes and 4 empty answer boxes">    </p:cNvPr>
+          <p:cNvPicPr>
+            <a:picLocks noChangeAspect="1"/>
+          </p:cNvPicPr>
+          <p:nvPr/>
+        </p:nvPicPr>
+        <p:blipFill>
+          <a:blip r:embed="rId2"/>
+          <a:stretch>
+            <a:fillRect/>
+          </a:stretch>
+        </p:blipFill>
+        <p:spPr>
+          <a:xfrm>
+            <a:off x="6309360" y="2148840"/>
+            <a:ext cx="5303520" cy="3011221"/>
+          </a:xfrm>
+          <a:prstGeom prst="rect">
+            <a:avLst/>
+          </a:prstGeom>
+        </p:spPr>
+      </p:pic>
+      <p:sp>
+        <p:nvSpPr>
+          <p:cNvPr id="9" name="Key reminder"/>
+          <p:cNvSpPr txBox="1"/>
+          <p:nvPr/>
+        </p:nvSpPr>
+        <p:spPr>
+          <a:xfrm>
+            <a:off x="640080" y="6172200"/>
+            <a:ext cx="10881360" cy="365760"/>
+          </a:xfrm>
+          <a:prstGeom prst="rect">
+            <a:avLst/>
+          </a:prstGeom>
+          <a:noFill/>
+          <a:ln/>
+        </p:spPr>
+        <p:txBody>
+          <a:bodyPr wrap="square" lIns="0" tIns="0" rIns="0" bIns="0" rtlCol="0" anchor="ctr"/>
+          <a:lstStyle/>
+          <a:p>
+            <a:pPr indent="0" marL="0">
+              <a:buNone/>
+            </a:pPr>
+            <a:r>
+              <a:rPr lang="en-US" sz="1600" i="1" dirty="0">
+                <a:solidFill>
+                  <a:schemeClr val="tx1"/>
+                </a:solidFill>
+              </a:rPr>
+              <a:t>Lines: G B D F A   |   Spaces: A C E G</a:t>
+            </a:r>
+            <a:endParaRPr lang="en-US" sz="1600" dirty="0"/>
+          </a:p>
+        </p:txBody>
+      </p:sp>
+    </p:spTree>
+  </p:cSld>
+  <p:clrMapOvr>
+    <a:masterClrMapping/>
+  </p:clrMapOvr>
+</p:sld>
+</file>
+
+<file path=ppt/slides/slide14.xml><?xml version="1.0" encoding="utf-8"?>
+<p:sld xmlns:a="http://schemas.openxmlformats.org/drawingml/2006/main" xmlns:r="http://schemas.openxmlformats.org/officeDocument/2006/relationships" xmlns:p="http://schemas.openxmlformats.org/presentationml/2006/main">
+  <p:cSld name="Slide 14">
+    <p:spTree>
+      <p:nvGrpSpPr>
+        <p:cNvPr id="1" name=""/>
+        <p:cNvGrpSpPr/>
+        <p:nvPr/>
+      </p:nvGrpSpPr>
+      <p:grpSpPr>
+        <a:xfrm>
+          <a:off x="0" y="0"/>
+          <a:ext cx="0" cy="0"/>
+          <a:chOff x="0" y="0"/>
+          <a:chExt cx="0" cy="0"/>
+        </a:xfrm>
+      </p:grpSpPr>
+      <p:sp>
+        <p:nvSpPr>
+          <p:cNvPr id="2" name="Text 0"/>
+          <p:cNvSpPr/>
+          <p:nvPr>
+            <p:ph idx="100" type="title" hasCustomPrompt="1"/>
+          </p:nvPr>
+        </p:nvSpPr>
+        <p:spPr>
+          <a:xfrm>
+            <a:off x="640080" y="320040"/>
+            <a:ext cx="10881360" cy="868680"/>
+          </a:xfrm>
+          <a:prstGeom prst="rect">
+            <a:avLst/>
+          </a:prstGeom>
+          <a:noFill/>
+          <a:ln/>
+        </p:spPr>
+        <p:txBody>
+          <a:bodyPr wrap="square" lIns="0" tIns="0" rIns="0" bIns="0" rtlCol="0" anchor="ctr"/>
+          <a:lstStyle/>
+          <a:p>
+            <a:pPr algn="l" indent="0" marL="0">
+              <a:buNone/>
+            </a:pPr>
+            <a:r>
+              <a:rPr lang="en-US" sz="4000" b="1" dirty="0">
+                <a:solidFill>
+                  <a:schemeClr val="tx1"/>
+                </a:solidFill>
+                <a:latin typeface="Cambria" pitchFamily="34" charset="0"/>
+                <a:ea typeface="Cambria" pitchFamily="34" charset="-122"/>
+                <a:cs typeface="Cambria" pitchFamily="34" charset="-120"/>
+              </a:rPr>
+              <a:t>Bass clef: 7 and 8</a:t>
+            </a:r>
+            <a:endParaRPr lang="en-US" sz="4000" dirty="0"/>
+          </a:p>
+        </p:txBody>
+      </p:sp>
+      <p:sp>
+        <p:nvSpPr>
+          <p:cNvPr id="3" name="Bass clef 7 badge"/>
+          <p:cNvSpPr/>
+          <p:nvPr/>
+        </p:nvSpPr>
+        <p:spPr>
+          <a:xfrm>
+            <a:off x="640080" y="1417320"/>
+            <a:ext cx="548640" cy="548640"/>
+          </a:xfrm>
+          <a:prstGeom prst="ellipse">
+            <a:avLst/>
+          </a:prstGeom>
+          <a:solidFill>
+            <a:schemeClr val="accent1"/>
+          </a:solidFill>
+          <a:ln w="12700">
+            <a:solidFill>
+              <a:schemeClr val="accent1"/>
+            </a:solidFill>
+            <a:prstDash val="solid"/>
+          </a:ln>
+        </p:spPr>
+      </p:sp>
+      <p:sp>
+        <p:nvSpPr>
+          <p:cNvPr id="4" name="Bass clef 7 number"/>
+          <p:cNvSpPr txBox="1"/>
+          <p:nvPr/>
+        </p:nvSpPr>
+        <p:spPr>
+          <a:xfrm>
+            <a:off x="640080" y="1417320"/>
+            <a:ext cx="548640" cy="548640"/>
+          </a:xfrm>
+          <a:prstGeom prst="rect">
+            <a:avLst/>
+          </a:prstGeom>
+          <a:noFill/>
+          <a:ln/>
+        </p:spPr>
+        <p:txBody>
+          <a:bodyPr wrap="square" lIns="0" tIns="0" rIns="0" bIns="0" rtlCol="0" anchor="ctr"/>
+          <a:lstStyle/>
+          <a:p>
+            <a:pPr algn="ctr" indent="0" marL="0">
+              <a:buNone/>
+            </a:pPr>
+            <a:r>
+              <a:rPr lang="en-US" sz="2200" b="1" dirty="0">
+                <a:solidFill>
+                  <a:schemeClr val="tx1"/>
+                </a:solidFill>
+              </a:rPr>
+              <a:t>7</a:t>
+            </a:r>
+            <a:endParaRPr lang="en-US" sz="2200" dirty="0"/>
+          </a:p>
+        </p:txBody>
+      </p:sp>
+      <p:pic>
+        <p:nvPicPr>
+          <p:cNvPr id="5" name="b07" descr="Bass clef code 7: stave with 4 notes and 4 empty answer boxes">    </p:cNvPr>
+          <p:cNvPicPr>
+            <a:picLocks noChangeAspect="1"/>
+          </p:cNvPicPr>
+          <p:nvPr/>
+        </p:nvPicPr>
+        <p:blipFill>
+          <a:blip r:embed="rId1"/>
+          <a:stretch>
+            <a:fillRect/>
+          </a:stretch>
+        </p:blipFill>
+        <p:spPr>
+          <a:xfrm>
+            <a:off x="640080" y="2148840"/>
+            <a:ext cx="5303520" cy="2852115"/>
+          </a:xfrm>
+          <a:prstGeom prst="rect">
+            <a:avLst/>
+          </a:prstGeom>
+        </p:spPr>
+      </p:pic>
+      <p:sp>
+        <p:nvSpPr>
+          <p:cNvPr id="6" name="Bass clef 8 badge"/>
+          <p:cNvSpPr/>
+          <p:nvPr/>
+        </p:nvSpPr>
+        <p:spPr>
+          <a:xfrm>
+            <a:off x="6309360" y="1417320"/>
+            <a:ext cx="548640" cy="548640"/>
+          </a:xfrm>
+          <a:prstGeom prst="ellipse">
+            <a:avLst/>
+          </a:prstGeom>
+          <a:solidFill>
+            <a:schemeClr val="accent1"/>
+          </a:solidFill>
+          <a:ln w="12700">
+            <a:solidFill>
+              <a:schemeClr val="accent1"/>
+            </a:solidFill>
+            <a:prstDash val="solid"/>
+          </a:ln>
+        </p:spPr>
+      </p:sp>
+      <p:sp>
+        <p:nvSpPr>
+          <p:cNvPr id="7" name="Bass clef 8 number"/>
+          <p:cNvSpPr txBox="1"/>
+          <p:nvPr/>
+        </p:nvSpPr>
+        <p:spPr>
+          <a:xfrm>
+            <a:off x="6309360" y="1417320"/>
+            <a:ext cx="548640" cy="548640"/>
+          </a:xfrm>
+          <a:prstGeom prst="rect">
+            <a:avLst/>
+          </a:prstGeom>
+          <a:noFill/>
+          <a:ln/>
+        </p:spPr>
+        <p:txBody>
+          <a:bodyPr wrap="square" lIns="0" tIns="0" rIns="0" bIns="0" rtlCol="0" anchor="ctr"/>
+          <a:lstStyle/>
+          <a:p>
+            <a:pPr algn="ctr" indent="0" marL="0">
+              <a:buNone/>
+            </a:pPr>
+            <a:r>
+              <a:rPr lang="en-US" sz="2200" b="1" dirty="0">
+                <a:solidFill>
+                  <a:schemeClr val="tx1"/>
+                </a:solidFill>
+              </a:rPr>
+              <a:t>8</a:t>
+            </a:r>
+            <a:endParaRPr lang="en-US" sz="2200" dirty="0"/>
+          </a:p>
+        </p:txBody>
+      </p:sp>
+      <p:pic>
+        <p:nvPicPr>
+          <p:cNvPr id="8" name="b08" descr="Bass clef code 8: stave with 4 notes and 4 empty answer boxes">    </p:cNvPr>
+          <p:cNvPicPr>
+            <a:picLocks noChangeAspect="1"/>
+          </p:cNvPicPr>
+          <p:nvPr/>
+        </p:nvPicPr>
+        <p:blipFill>
+          <a:blip r:embed="rId2"/>
+          <a:stretch>
+            <a:fillRect/>
+          </a:stretch>
+        </p:blipFill>
+        <p:spPr>
+          <a:xfrm>
+            <a:off x="6309360" y="2148840"/>
+            <a:ext cx="5303520" cy="3011221"/>
+          </a:xfrm>
+          <a:prstGeom prst="rect">
+            <a:avLst/>
+          </a:prstGeom>
+        </p:spPr>
+      </p:pic>
+      <p:sp>
+        <p:nvSpPr>
+          <p:cNvPr id="9" name="Key reminder"/>
+          <p:cNvSpPr txBox="1"/>
+          <p:nvPr/>
+        </p:nvSpPr>
+        <p:spPr>
+          <a:xfrm>
+            <a:off x="640080" y="6172200"/>
+            <a:ext cx="10881360" cy="365760"/>
+          </a:xfrm>
+          <a:prstGeom prst="rect">
+            <a:avLst/>
+          </a:prstGeom>
+          <a:noFill/>
+          <a:ln/>
+        </p:spPr>
+        <p:txBody>
+          <a:bodyPr wrap="square" lIns="0" tIns="0" rIns="0" bIns="0" rtlCol="0" anchor="ctr"/>
+          <a:lstStyle/>
+          <a:p>
+            <a:pPr indent="0" marL="0">
+              <a:buNone/>
+            </a:pPr>
+            <a:r>
+              <a:rPr lang="en-US" sz="1600" i="1" dirty="0">
+                <a:solidFill>
+                  <a:schemeClr val="tx1"/>
+                </a:solidFill>
+              </a:rPr>
+              <a:t>Lines: G B D F A   |   Spaces: A C E G</a:t>
+            </a:r>
+            <a:endParaRPr lang="en-US" sz="1600" dirty="0"/>
+          </a:p>
+        </p:txBody>
+      </p:sp>
+    </p:spTree>
+  </p:cSld>
+  <p:clrMapOvr>
+    <a:masterClrMapping/>
+  </p:clrMapOvr>
+</p:sld>
+</file>
+
+<file path=ppt/slides/slide15.xml><?xml version="1.0" encoding="utf-8"?>
+<p:sld xmlns:a="http://schemas.openxmlformats.org/drawingml/2006/main" xmlns:r="http://schemas.openxmlformats.org/officeDocument/2006/relationships" xmlns:p="http://schemas.openxmlformats.org/presentationml/2006/main">
+  <p:cSld name="Slide 15">
+    <p:spTree>
+      <p:nvGrpSpPr>
+        <p:cNvPr id="1" name=""/>
+        <p:cNvGrpSpPr/>
+        <p:nvPr/>
+      </p:nvGrpSpPr>
+      <p:grpSpPr>
+        <a:xfrm>
+          <a:off x="0" y="0"/>
+          <a:ext cx="0" cy="0"/>
+          <a:chOff x="0" y="0"/>
+          <a:chExt cx="0" cy="0"/>
+        </a:xfrm>
+      </p:grpSpPr>
+      <p:sp>
+        <p:nvSpPr>
+          <p:cNvPr id="2" name="Text 0"/>
+          <p:cNvSpPr/>
+          <p:nvPr>
+            <p:ph idx="100" type="title" hasCustomPrompt="1"/>
+          </p:nvPr>
+        </p:nvSpPr>
+        <p:spPr>
+          <a:xfrm>
+            <a:off x="640080" y="320040"/>
+            <a:ext cx="10881360" cy="868680"/>
+          </a:xfrm>
+          <a:prstGeom prst="rect">
+            <a:avLst/>
+          </a:prstGeom>
+          <a:noFill/>
+          <a:ln/>
+        </p:spPr>
+        <p:txBody>
+          <a:bodyPr wrap="square" lIns="0" tIns="0" rIns="0" bIns="0" rtlCol="0" anchor="ctr"/>
+          <a:lstStyle/>
+          <a:p>
+            <a:pPr algn="l" indent="0" marL="0">
+              <a:buNone/>
+            </a:pPr>
+            <a:r>
+              <a:rPr lang="en-US" sz="4000" b="1" dirty="0">
+                <a:solidFill>
+                  <a:schemeClr val="tx1"/>
+                </a:solidFill>
+                <a:latin typeface="Cambria" pitchFamily="34" charset="0"/>
+                <a:ea typeface="Cambria" pitchFamily="34" charset="-122"/>
+                <a:cs typeface="Cambria" pitchFamily="34" charset="-120"/>
+              </a:rPr>
+              <a:t>Bass clef: 9 and 10</a:t>
+            </a:r>
+            <a:endParaRPr lang="en-US" sz="4000" dirty="0"/>
+          </a:p>
+        </p:txBody>
+      </p:sp>
+      <p:sp>
+        <p:nvSpPr>
+          <p:cNvPr id="3" name="Bass clef 9 badge"/>
+          <p:cNvSpPr/>
+          <p:nvPr/>
+        </p:nvSpPr>
+        <p:spPr>
+          <a:xfrm>
+            <a:off x="640080" y="1417320"/>
+            <a:ext cx="548640" cy="548640"/>
+          </a:xfrm>
+          <a:prstGeom prst="ellipse">
+            <a:avLst/>
+          </a:prstGeom>
+          <a:solidFill>
+            <a:schemeClr val="accent1"/>
+          </a:solidFill>
+          <a:ln w="12700">
+            <a:solidFill>
+              <a:schemeClr val="accent1"/>
+            </a:solidFill>
+            <a:prstDash val="solid"/>
+          </a:ln>
+        </p:spPr>
+      </p:sp>
+      <p:sp>
+        <p:nvSpPr>
+          <p:cNvPr id="4" name="Bass clef 9 number"/>
+          <p:cNvSpPr txBox="1"/>
+          <p:nvPr/>
+        </p:nvSpPr>
+        <p:spPr>
+          <a:xfrm>
+            <a:off x="640080" y="1417320"/>
+            <a:ext cx="548640" cy="548640"/>
+          </a:xfrm>
+          <a:prstGeom prst="rect">
+            <a:avLst/>
+          </a:prstGeom>
+          <a:noFill/>
+          <a:ln/>
+        </p:spPr>
+        <p:txBody>
+          <a:bodyPr wrap="square" lIns="0" tIns="0" rIns="0" bIns="0" rtlCol="0" anchor="ctr"/>
+          <a:lstStyle/>
+          <a:p>
+            <a:pPr algn="ctr" indent="0" marL="0">
+              <a:buNone/>
+            </a:pPr>
+            <a:r>
+              <a:rPr lang="en-US" sz="2200" b="1" dirty="0">
+                <a:solidFill>
+                  <a:schemeClr val="tx1"/>
+                </a:solidFill>
+              </a:rPr>
+              <a:t>9</a:t>
+            </a:r>
+            <a:endParaRPr lang="en-US" sz="2200" dirty="0"/>
+          </a:p>
+        </p:txBody>
+      </p:sp>
+      <p:pic>
+        <p:nvPicPr>
+          <p:cNvPr id="5" name="b09" descr="Bass clef code 9: stave with 5 notes and 5 empty answer boxes">    </p:cNvPr>
+          <p:cNvPicPr>
+            <a:picLocks noChangeAspect="1"/>
+          </p:cNvPicPr>
+          <p:nvPr/>
+        </p:nvPicPr>
+        <p:blipFill>
+          <a:blip r:embed="rId1"/>
+          <a:stretch>
+            <a:fillRect/>
+          </a:stretch>
+        </p:blipFill>
+        <p:spPr>
+          <a:xfrm>
+            <a:off x="640080" y="2148840"/>
+            <a:ext cx="5303520" cy="2403468"/>
+          </a:xfrm>
+          <a:prstGeom prst="rect">
+            <a:avLst/>
+          </a:prstGeom>
+        </p:spPr>
+      </p:pic>
+      <p:sp>
+        <p:nvSpPr>
+          <p:cNvPr id="6" name="Bass clef 10 badge"/>
+          <p:cNvSpPr/>
+          <p:nvPr/>
+        </p:nvSpPr>
+        <p:spPr>
+          <a:xfrm>
+            <a:off x="6309360" y="1417320"/>
+            <a:ext cx="548640" cy="548640"/>
+          </a:xfrm>
+          <a:prstGeom prst="ellipse">
+            <a:avLst/>
+          </a:prstGeom>
+          <a:solidFill>
+            <a:schemeClr val="accent1"/>
+          </a:solidFill>
+          <a:ln w="12700">
+            <a:solidFill>
+              <a:schemeClr val="accent1"/>
+            </a:solidFill>
+            <a:prstDash val="solid"/>
+          </a:ln>
+        </p:spPr>
+      </p:sp>
+      <p:sp>
+        <p:nvSpPr>
+          <p:cNvPr id="7" name="Bass clef 10 number"/>
+          <p:cNvSpPr txBox="1"/>
+          <p:nvPr/>
+        </p:nvSpPr>
+        <p:spPr>
+          <a:xfrm>
+            <a:off x="6309360" y="1417320"/>
+            <a:ext cx="548640" cy="548640"/>
+          </a:xfrm>
+          <a:prstGeom prst="rect">
+            <a:avLst/>
+          </a:prstGeom>
+          <a:noFill/>
+          <a:ln/>
+        </p:spPr>
+        <p:txBody>
+          <a:bodyPr wrap="square" lIns="0" tIns="0" rIns="0" bIns="0" rtlCol="0" anchor="ctr"/>
+          <a:lstStyle/>
+          <a:p>
+            <a:pPr algn="ctr" indent="0" marL="0">
+              <a:buNone/>
+            </a:pPr>
+            <a:r>
+              <a:rPr lang="en-US" sz="2200" b="1" dirty="0">
+                <a:solidFill>
+                  <a:schemeClr val="tx1"/>
+                </a:solidFill>
+              </a:rPr>
+              <a:t>10</a:t>
+            </a:r>
+            <a:endParaRPr lang="en-US" sz="2200" dirty="0"/>
+          </a:p>
+        </p:txBody>
+      </p:sp>
+      <p:pic>
+        <p:nvPicPr>
+          <p:cNvPr id="8" name="b10" descr="Bass clef code 10: stave with 5 notes and 5 empty answer boxes">    </p:cNvPr>
+          <p:cNvPicPr>
+            <a:picLocks noChangeAspect="1"/>
+          </p:cNvPicPr>
+          <p:nvPr/>
+        </p:nvPicPr>
+        <p:blipFill>
+          <a:blip r:embed="rId2"/>
+          <a:stretch>
+            <a:fillRect/>
+          </a:stretch>
+        </p:blipFill>
+        <p:spPr>
+          <a:xfrm>
+            <a:off x="6309360" y="2148840"/>
+            <a:ext cx="5303520" cy="2537546"/>
+          </a:xfrm>
+          <a:prstGeom prst="rect">
+            <a:avLst/>
+          </a:prstGeom>
+        </p:spPr>
+      </p:pic>
+      <p:sp>
+        <p:nvSpPr>
+          <p:cNvPr id="9" name="Key reminder"/>
+          <p:cNvSpPr txBox="1"/>
+          <p:nvPr/>
+        </p:nvSpPr>
+        <p:spPr>
+          <a:xfrm>
+            <a:off x="640080" y="6172200"/>
+            <a:ext cx="10881360" cy="365760"/>
+          </a:xfrm>
+          <a:prstGeom prst="rect">
+            <a:avLst/>
+          </a:prstGeom>
+          <a:noFill/>
+          <a:ln/>
+        </p:spPr>
+        <p:txBody>
+          <a:bodyPr wrap="square" lIns="0" tIns="0" rIns="0" bIns="0" rtlCol="0" anchor="ctr"/>
+          <a:lstStyle/>
+          <a:p>
+            <a:pPr indent="0" marL="0">
+              <a:buNone/>
+            </a:pPr>
+            <a:r>
+              <a:rPr lang="en-US" sz="1600" i="1" dirty="0">
+                <a:solidFill>
+                  <a:schemeClr val="tx1"/>
+                </a:solidFill>
+              </a:rPr>
+              <a:t>Lines: G B D F A   |   Spaces: A C E G</a:t>
+            </a:r>
+            <a:endParaRPr lang="en-US" sz="1600" dirty="0"/>
+          </a:p>
+        </p:txBody>
+      </p:sp>
+    </p:spTree>
+  </p:cSld>
+  <p:clrMapOvr>
+    <a:masterClrMapping/>
+  </p:clrMapOvr>
+</p:sld>
+</file>
+
+<file path=ppt/slides/slide16.xml><?xml version="1.0" encoding="utf-8"?>
+<p:sld xmlns:a="http://schemas.openxmlformats.org/drawingml/2006/main" xmlns:r="http://schemas.openxmlformats.org/officeDocument/2006/relationships" xmlns:p="http://schemas.openxmlformats.org/presentationml/2006/main">
+  <p:cSld name="Slide 16">
+    <p:spTree>
+      <p:nvGrpSpPr>
+        <p:cNvPr id="1" name=""/>
+        <p:cNvGrpSpPr/>
+        <p:nvPr/>
+      </p:nvGrpSpPr>
+      <p:grpSpPr>
+        <a:xfrm>
+          <a:off x="0" y="0"/>
+          <a:ext cx="0" cy="0"/>
+          <a:chOff x="0" y="0"/>
+          <a:chExt cx="0" cy="0"/>
+        </a:xfrm>
+      </p:grpSpPr>
+      <p:sp>
+        <p:nvSpPr>
+          <p:cNvPr id="2" name="Text 0"/>
+          <p:cNvSpPr/>
+          <p:nvPr>
+            <p:ph idx="100" type="title" hasCustomPrompt="1"/>
+          </p:nvPr>
+        </p:nvSpPr>
+        <p:spPr>
+          <a:xfrm>
+            <a:off x="640080" y="320040"/>
+            <a:ext cx="10881360" cy="868680"/>
+          </a:xfrm>
+          <a:prstGeom prst="rect">
+            <a:avLst/>
+          </a:prstGeom>
+          <a:noFill/>
+          <a:ln/>
+        </p:spPr>
+        <p:txBody>
+          <a:bodyPr wrap="square" lIns="0" tIns="0" rIns="0" bIns="0" rtlCol="0" anchor="ctr"/>
+          <a:lstStyle/>
+          <a:p>
+            <a:pPr algn="l" indent="0" marL="0">
+              <a:buNone/>
+            </a:pPr>
+            <a:r>
+              <a:rPr lang="en-US" sz="4000" b="1" dirty="0">
+                <a:solidFill>
+                  <a:schemeClr val="tx1"/>
+                </a:solidFill>
+                <a:latin typeface="Cambria" pitchFamily="34" charset="0"/>
+                <a:ea typeface="Cambria" pitchFamily="34" charset="-122"/>
+                <a:cs typeface="Cambria" pitchFamily="34" charset="-120"/>
+              </a:rPr>
+              <a:t>Bass clef: 11 and 12</a:t>
+            </a:r>
+            <a:endParaRPr lang="en-US" sz="4000" dirty="0"/>
+          </a:p>
+        </p:txBody>
+      </p:sp>
+      <p:sp>
+        <p:nvSpPr>
+          <p:cNvPr id="3" name="Bass clef 11 badge"/>
+          <p:cNvSpPr/>
+          <p:nvPr/>
+        </p:nvSpPr>
+        <p:spPr>
+          <a:xfrm>
+            <a:off x="640080" y="1417320"/>
+            <a:ext cx="548640" cy="548640"/>
+          </a:xfrm>
+          <a:prstGeom prst="ellipse">
+            <a:avLst/>
+          </a:prstGeom>
+          <a:solidFill>
+            <a:schemeClr val="accent1"/>
+          </a:solidFill>
+          <a:ln w="12700">
+            <a:solidFill>
+              <a:schemeClr val="accent1"/>
+            </a:solidFill>
+            <a:prstDash val="solid"/>
+          </a:ln>
+        </p:spPr>
+      </p:sp>
+      <p:sp>
+        <p:nvSpPr>
+          <p:cNvPr id="4" name="Bass clef 11 number"/>
+          <p:cNvSpPr txBox="1"/>
+          <p:nvPr/>
+        </p:nvSpPr>
+        <p:spPr>
+          <a:xfrm>
+            <a:off x="640080" y="1417320"/>
+            <a:ext cx="548640" cy="548640"/>
+          </a:xfrm>
+          <a:prstGeom prst="rect">
+            <a:avLst/>
+          </a:prstGeom>
+          <a:noFill/>
+          <a:ln/>
+        </p:spPr>
+        <p:txBody>
+          <a:bodyPr wrap="square" lIns="0" tIns="0" rIns="0" bIns="0" rtlCol="0" anchor="ctr"/>
+          <a:lstStyle/>
+          <a:p>
+            <a:pPr algn="ctr" indent="0" marL="0">
+              <a:buNone/>
+            </a:pPr>
+            <a:r>
+              <a:rPr lang="en-US" sz="2200" b="1" dirty="0">
+                <a:solidFill>
+                  <a:schemeClr val="tx1"/>
+                </a:solidFill>
+              </a:rPr>
+              <a:t>11</a:t>
+            </a:r>
+            <a:endParaRPr lang="en-US" sz="2200" dirty="0"/>
+          </a:p>
+        </p:txBody>
+      </p:sp>
+      <p:pic>
+        <p:nvPicPr>
+          <p:cNvPr id="5" name="b11" descr="Bass clef code 11: stave with 6 notes and 6 empty answer boxes">    </p:cNvPr>
+          <p:cNvPicPr>
+            <a:picLocks noChangeAspect="1"/>
+          </p:cNvPicPr>
+          <p:nvPr/>
+        </p:nvPicPr>
+        <p:blipFill>
+          <a:blip r:embed="rId1"/>
+          <a:stretch>
+            <a:fillRect/>
+          </a:stretch>
+        </p:blipFill>
+        <p:spPr>
+          <a:xfrm>
+            <a:off x="640080" y="2148840"/>
+            <a:ext cx="5303520" cy="2076783"/>
+          </a:xfrm>
+          <a:prstGeom prst="rect">
+            <a:avLst/>
+          </a:prstGeom>
+        </p:spPr>
+      </p:pic>
+      <p:sp>
+        <p:nvSpPr>
+          <p:cNvPr id="6" name="Bass clef 12 badge"/>
+          <p:cNvSpPr/>
+          <p:nvPr/>
+        </p:nvSpPr>
+        <p:spPr>
+          <a:xfrm>
+            <a:off x="6309360" y="1417320"/>
+            <a:ext cx="548640" cy="548640"/>
+          </a:xfrm>
+          <a:prstGeom prst="ellipse">
+            <a:avLst/>
+          </a:prstGeom>
+          <a:solidFill>
+            <a:schemeClr val="accent1"/>
+          </a:solidFill>
+          <a:ln w="12700">
+            <a:solidFill>
+              <a:schemeClr val="accent1"/>
+            </a:solidFill>
+            <a:prstDash val="solid"/>
+          </a:ln>
+        </p:spPr>
+      </p:sp>
+      <p:sp>
+        <p:nvSpPr>
+          <p:cNvPr id="7" name="Bass clef 12 number"/>
+          <p:cNvSpPr txBox="1"/>
+          <p:nvPr/>
+        </p:nvSpPr>
+        <p:spPr>
+          <a:xfrm>
+            <a:off x="6309360" y="1417320"/>
+            <a:ext cx="548640" cy="548640"/>
+          </a:xfrm>
+          <a:prstGeom prst="rect">
+            <a:avLst/>
+          </a:prstGeom>
+          <a:noFill/>
+          <a:ln/>
+        </p:spPr>
+        <p:txBody>
+          <a:bodyPr wrap="square" lIns="0" tIns="0" rIns="0" bIns="0" rtlCol="0" anchor="ctr"/>
+          <a:lstStyle/>
+          <a:p>
+            <a:pPr algn="ctr" indent="0" marL="0">
+              <a:buNone/>
+            </a:pPr>
+            <a:r>
+              <a:rPr lang="en-US" sz="2200" b="1" dirty="0">
+                <a:solidFill>
+                  <a:schemeClr val="tx1"/>
+                </a:solidFill>
+              </a:rPr>
+              <a:t>12</a:t>
+            </a:r>
+            <a:endParaRPr lang="en-US" sz="2200" dirty="0"/>
+          </a:p>
+        </p:txBody>
+      </p:sp>
+      <p:pic>
+        <p:nvPicPr>
+          <p:cNvPr id="8" name="b12" descr="Bass clef code 12: stave with 6 notes and 6 empty answer boxes">    </p:cNvPr>
+          <p:cNvPicPr>
+            <a:picLocks noChangeAspect="1"/>
+          </p:cNvPicPr>
+          <p:nvPr/>
+        </p:nvPicPr>
+        <p:blipFill>
+          <a:blip r:embed="rId2"/>
+          <a:stretch>
+            <a:fillRect/>
+          </a:stretch>
+        </p:blipFill>
+        <p:spPr>
+          <a:xfrm>
+            <a:off x="6309360" y="2148840"/>
+            <a:ext cx="5303520" cy="2192637"/>
+          </a:xfrm>
+          <a:prstGeom prst="rect">
+            <a:avLst/>
+          </a:prstGeom>
+        </p:spPr>
+      </p:pic>
+      <p:sp>
+        <p:nvSpPr>
+          <p:cNvPr id="9" name="Key reminder"/>
+          <p:cNvSpPr txBox="1"/>
+          <p:nvPr/>
+        </p:nvSpPr>
+        <p:spPr>
+          <a:xfrm>
+            <a:off x="640080" y="6172200"/>
+            <a:ext cx="10881360" cy="365760"/>
+          </a:xfrm>
+          <a:prstGeom prst="rect">
+            <a:avLst/>
+          </a:prstGeom>
+          <a:noFill/>
+          <a:ln/>
+        </p:spPr>
+        <p:txBody>
+          <a:bodyPr wrap="square" lIns="0" tIns="0" rIns="0" bIns="0" rtlCol="0" anchor="ctr"/>
+          <a:lstStyle/>
+          <a:p>
+            <a:pPr indent="0" marL="0">
+              <a:buNone/>
+            </a:pPr>
+            <a:r>
+              <a:rPr lang="en-US" sz="1600" i="1" dirty="0">
+                <a:solidFill>
+                  <a:schemeClr val="tx1"/>
+                </a:solidFill>
+              </a:rPr>
+              <a:t>Lines: G B D F A   |   Spaces: A C E G</a:t>
+            </a:r>
+            <a:endParaRPr lang="en-US" sz="1600" dirty="0"/>
+          </a:p>
+        </p:txBody>
+      </p:sp>
+    </p:spTree>
+  </p:cSld>
+  <p:clrMapOvr>
+    <a:masterClrMapping/>
+  </p:clrMapOvr>
+</p:sld>
+</file>
+
+<file path=ppt/slides/slide17.xml><?xml version="1.0" encoding="utf-8"?>
+<p:sld xmlns:a="http://schemas.openxmlformats.org/drawingml/2006/main" xmlns:r="http://schemas.openxmlformats.org/officeDocument/2006/relationships" xmlns:p="http://schemas.openxmlformats.org/presentationml/2006/main">
+  <p:cSld name="Slide 17">
+    <p:spTree>
+      <p:nvGrpSpPr>
+        <p:cNvPr id="1" name=""/>
+        <p:cNvGrpSpPr/>
+        <p:nvPr/>
+      </p:nvGrpSpPr>
+      <p:grpSpPr>
+        <a:xfrm>
+          <a:off x="0" y="0"/>
+          <a:ext cx="0" cy="0"/>
+          <a:chOff x="0" y="0"/>
+          <a:chExt cx="0" cy="0"/>
+        </a:xfrm>
+      </p:grpSpPr>
+      <p:sp>
+        <p:nvSpPr>
+          <p:cNvPr id="2" name="Text 0"/>
+          <p:cNvSpPr/>
+          <p:nvPr>
+            <p:ph idx="100" type="title" hasCustomPrompt="1"/>
+          </p:nvPr>
+        </p:nvSpPr>
+        <p:spPr>
+          <a:xfrm>
+            <a:off x="640080" y="320040"/>
+            <a:ext cx="10881360" cy="868680"/>
+          </a:xfrm>
+          <a:prstGeom prst="rect">
+            <a:avLst/>
+          </a:prstGeom>
+          <a:noFill/>
+          <a:ln/>
+        </p:spPr>
+        <p:txBody>
+          <a:bodyPr wrap="square" lIns="0" tIns="0" rIns="0" bIns="0" rtlCol="0" anchor="ctr"/>
+          <a:lstStyle/>
+          <a:p>
+            <a:pPr algn="l" indent="0" marL="0">
+              <a:buNone/>
+            </a:pPr>
+            <a:r>
+              <a:rPr lang="en-US" sz="4000" b="1" dirty="0">
+                <a:solidFill>
+                  <a:schemeClr val="tx1"/>
+                </a:solidFill>
+                <a:latin typeface="Cambria" pitchFamily="34" charset="0"/>
+                <a:ea typeface="Cambria" pitchFamily="34" charset="-122"/>
+                <a:cs typeface="Cambria" pitchFamily="34" charset="-120"/>
+              </a:rPr>
+              <a:t>Mixed clefs: 1 and 2</a:t>
+            </a:r>
+            <a:endParaRPr lang="en-US" sz="4000" dirty="0"/>
+          </a:p>
+        </p:txBody>
+      </p:sp>
+      <p:sp>
+        <p:nvSpPr>
+          <p:cNvPr id="3" name="Clef change hint"/>
+          <p:cNvSpPr txBox="1"/>
+          <p:nvPr/>
+        </p:nvSpPr>
+        <p:spPr>
+          <a:xfrm>
+            <a:off x="7315200" y="502920"/>
+            <a:ext cx="4206240" cy="548640"/>
+          </a:xfrm>
+          <a:prstGeom prst="rect">
+            <a:avLst/>
+          </a:prstGeom>
+          <a:noFill/>
+          <a:ln/>
+        </p:spPr>
+        <p:txBody>
+          <a:bodyPr wrap="square" lIns="0" tIns="0" rIns="0" bIns="0" rtlCol="0" anchor="ctr"/>
+          <a:lstStyle/>
+          <a:p>
+            <a:pPr algn="r" indent="0" marL="0">
+              <a:buNone/>
+            </a:pPr>
+            <a:r>
+              <a:rPr lang="en-US" sz="1800" i="1" dirty="0">
+                <a:solidFill>
+                  <a:schemeClr val="accent2"/>
+                </a:solidFill>
+              </a:rPr>
+              <a:t>The clef changes halfway. Check each one!</a:t>
+            </a:r>
+            <a:endParaRPr lang="en-US" sz="1800" dirty="0"/>
+          </a:p>
+        </p:txBody>
+      </p:sp>
+      <p:sp>
+        <p:nvSpPr>
+          <p:cNvPr id="4" name="Mixed 1 badge"/>
+          <p:cNvSpPr/>
+          <p:nvPr/>
+        </p:nvSpPr>
+        <p:spPr>
+          <a:xfrm>
+            <a:off x="640080" y="1463040"/>
+            <a:ext cx="548640" cy="548640"/>
+          </a:xfrm>
+          <a:prstGeom prst="ellipse">
+            <a:avLst/>
+          </a:prstGeom>
+          <a:solidFill>
+            <a:schemeClr val="accent1"/>
+          </a:solidFill>
+          <a:ln w="12700">
+            <a:solidFill>
+              <a:schemeClr val="accent1"/>
+            </a:solidFill>
+            <a:prstDash val="solid"/>
+          </a:ln>
+        </p:spPr>
+      </p:sp>
+      <p:sp>
+        <p:nvSpPr>
+          <p:cNvPr id="5" name="Mixed 1 number"/>
+          <p:cNvSpPr txBox="1"/>
+          <p:nvPr/>
+        </p:nvSpPr>
+        <p:spPr>
+          <a:xfrm>
+            <a:off x="640080" y="1463040"/>
+            <a:ext cx="548640" cy="548640"/>
+          </a:xfrm>
+          <a:prstGeom prst="rect">
+            <a:avLst/>
+          </a:prstGeom>
+          <a:noFill/>
+          <a:ln/>
+        </p:spPr>
+        <p:txBody>
+          <a:bodyPr wrap="square" lIns="0" tIns="0" rIns="0" bIns="0" rtlCol="0" anchor="ctr"/>
+          <a:lstStyle/>
+          <a:p>
+            <a:pPr algn="ctr" indent="0" marL="0">
+              <a:buNone/>
+            </a:pPr>
+            <a:r>
+              <a:rPr lang="en-US" sz="2200" b="1" dirty="0">
+                <a:solidFill>
+                  <a:schemeClr val="tx1"/>
+                </a:solidFill>
+              </a:rPr>
+              <a:t>1</a:t>
+            </a:r>
+            <a:endParaRPr lang="en-US" sz="2200" dirty="0"/>
+          </a:p>
+        </p:txBody>
+      </p:sp>
+      <p:pic>
+        <p:nvPicPr>
+          <p:cNvPr id="6" name="m01" descr="Mixed code 1: treble clef notes, then bass clef notes, each with an empty answer box">    </p:cNvPr>
+          <p:cNvPicPr>
+            <a:picLocks noChangeAspect="1"/>
+          </p:cNvPicPr>
+          <p:nvPr/>
+        </p:nvPicPr>
+        <p:blipFill>
+          <a:blip r:embed="rId1"/>
+          <a:stretch>
+            <a:fillRect/>
+          </a:stretch>
+        </p:blipFill>
+        <p:spPr>
+          <a:xfrm>
+            <a:off x="1463040" y="1417320"/>
+            <a:ext cx="6287237" cy="2468880"/>
+          </a:xfrm>
+          <a:prstGeom prst="rect">
+            <a:avLst/>
+          </a:prstGeom>
+        </p:spPr>
+      </p:pic>
+      <p:sp>
+        <p:nvSpPr>
+          <p:cNvPr id="7" name="Mixed 2 badge"/>
+          <p:cNvSpPr/>
+          <p:nvPr/>
+        </p:nvSpPr>
+        <p:spPr>
+          <a:xfrm>
+            <a:off x="640080" y="4160520"/>
+            <a:ext cx="548640" cy="548640"/>
+          </a:xfrm>
+          <a:prstGeom prst="ellipse">
+            <a:avLst/>
+          </a:prstGeom>
+          <a:solidFill>
+            <a:schemeClr val="accent1"/>
+          </a:solidFill>
+          <a:ln w="12700">
+            <a:solidFill>
+              <a:schemeClr val="accent1"/>
+            </a:solidFill>
+            <a:prstDash val="solid"/>
+          </a:ln>
+        </p:spPr>
+      </p:sp>
+      <p:sp>
+        <p:nvSpPr>
+          <p:cNvPr id="8" name="Mixed 2 number"/>
+          <p:cNvSpPr txBox="1"/>
+          <p:nvPr/>
+        </p:nvSpPr>
+        <p:spPr>
+          <a:xfrm>
+            <a:off x="640080" y="4160520"/>
+            <a:ext cx="548640" cy="548640"/>
+          </a:xfrm>
+          <a:prstGeom prst="rect">
+            <a:avLst/>
+          </a:prstGeom>
+          <a:noFill/>
+          <a:ln/>
+        </p:spPr>
+        <p:txBody>
+          <a:bodyPr wrap="square" lIns="0" tIns="0" rIns="0" bIns="0" rtlCol="0" anchor="ctr"/>
+          <a:lstStyle/>
+          <a:p>
+            <a:pPr algn="ctr" indent="0" marL="0">
+              <a:buNone/>
+            </a:pPr>
+            <a:r>
+              <a:rPr lang="en-US" sz="2200" b="1" dirty="0">
+                <a:solidFill>
+                  <a:schemeClr val="tx1"/>
+                </a:solidFill>
+              </a:rPr>
+              <a:t>2</a:t>
+            </a:r>
+            <a:endParaRPr lang="en-US" sz="2200" dirty="0"/>
+          </a:p>
+        </p:txBody>
+      </p:sp>
+      <p:pic>
+        <p:nvPicPr>
+          <p:cNvPr id="9" name="m02" descr="Mixed code 2: treble clef notes, then bass clef notes, each with an empty answer box">    </p:cNvPr>
+          <p:cNvPicPr>
+            <a:picLocks noChangeAspect="1"/>
+          </p:cNvPicPr>
+          <p:nvPr/>
+        </p:nvPicPr>
+        <p:blipFill>
+          <a:blip r:embed="rId2"/>
+          <a:stretch>
+            <a:fillRect/>
+          </a:stretch>
+        </p:blipFill>
+        <p:spPr>
+          <a:xfrm>
+            <a:off x="1463040" y="4114800"/>
+            <a:ext cx="7773875" cy="2468880"/>
+          </a:xfrm>
+          <a:prstGeom prst="rect">
+            <a:avLst/>
+          </a:prstGeom>
+        </p:spPr>
+      </p:pic>
+    </p:spTree>
+  </p:cSld>
+  <p:clrMapOvr>
+    <a:masterClrMapping/>
+  </p:clrMapOvr>
+</p:sld>
+</file>
+
+<file path=ppt/slides/slide18.xml><?xml version="1.0" encoding="utf-8"?>
+<p:sld xmlns:a="http://schemas.openxmlformats.org/drawingml/2006/main" xmlns:r="http://schemas.openxmlformats.org/officeDocument/2006/relationships" xmlns:p="http://schemas.openxmlformats.org/presentationml/2006/main">
+  <p:cSld name="Slide 18">
+    <p:spTree>
+      <p:nvGrpSpPr>
+        <p:cNvPr id="1" name=""/>
+        <p:cNvGrpSpPr/>
+        <p:nvPr/>
+      </p:nvGrpSpPr>
+      <p:grpSpPr>
+        <a:xfrm>
+          <a:off x="0" y="0"/>
+          <a:ext cx="0" cy="0"/>
+          <a:chOff x="0" y="0"/>
+          <a:chExt cx="0" cy="0"/>
+        </a:xfrm>
+      </p:grpSpPr>
+      <p:sp>
+        <p:nvSpPr>
+          <p:cNvPr id="2" name="Text 0"/>
+          <p:cNvSpPr/>
+          <p:nvPr>
+            <p:ph idx="100" type="title" hasCustomPrompt="1"/>
+          </p:nvPr>
+        </p:nvSpPr>
+        <p:spPr>
+          <a:xfrm>
+            <a:off x="640080" y="320040"/>
+            <a:ext cx="10881360" cy="868680"/>
+          </a:xfrm>
+          <a:prstGeom prst="rect">
+            <a:avLst/>
+          </a:prstGeom>
+          <a:noFill/>
+          <a:ln/>
+        </p:spPr>
+        <p:txBody>
+          <a:bodyPr wrap="square" lIns="0" tIns="0" rIns="0" bIns="0" rtlCol="0" anchor="ctr"/>
+          <a:lstStyle/>
+          <a:p>
+            <a:pPr algn="l" indent="0" marL="0">
+              <a:buNone/>
+            </a:pPr>
+            <a:r>
+              <a:rPr lang="en-US" sz="4000" b="1" dirty="0">
+                <a:solidFill>
+                  <a:schemeClr val="tx1"/>
+                </a:solidFill>
+                <a:latin typeface="Cambria" pitchFamily="34" charset="0"/>
+                <a:ea typeface="Cambria" pitchFamily="34" charset="-122"/>
+                <a:cs typeface="Cambria" pitchFamily="34" charset="-120"/>
+              </a:rPr>
+              <a:t>Mixed clefs: 3 and 4</a:t>
+            </a:r>
+            <a:endParaRPr lang="en-US" sz="4000" dirty="0"/>
+          </a:p>
+        </p:txBody>
+      </p:sp>
+      <p:sp>
+        <p:nvSpPr>
+          <p:cNvPr id="3" name="Clef change hint"/>
+          <p:cNvSpPr txBox="1"/>
+          <p:nvPr/>
+        </p:nvSpPr>
+        <p:spPr>
+          <a:xfrm>
+            <a:off x="7315200" y="502920"/>
+            <a:ext cx="4206240" cy="548640"/>
+          </a:xfrm>
+          <a:prstGeom prst="rect">
+            <a:avLst/>
+          </a:prstGeom>
+          <a:noFill/>
+          <a:ln/>
+        </p:spPr>
+        <p:txBody>
+          <a:bodyPr wrap="square" lIns="0" tIns="0" rIns="0" bIns="0" rtlCol="0" anchor="ctr"/>
+          <a:lstStyle/>
+          <a:p>
+            <a:pPr algn="r" indent="0" marL="0">
+              <a:buNone/>
+            </a:pPr>
+            <a:r>
+              <a:rPr lang="en-US" sz="1800" i="1" dirty="0">
+                <a:solidFill>
+                  <a:schemeClr val="accent2"/>
+                </a:solidFill>
+              </a:rPr>
+              <a:t>The clef changes halfway. Check each one!</a:t>
+            </a:r>
+            <a:endParaRPr lang="en-US" sz="1800" dirty="0"/>
+          </a:p>
+        </p:txBody>
+      </p:sp>
+      <p:sp>
+        <p:nvSpPr>
+          <p:cNvPr id="4" name="Mixed 3 badge"/>
+          <p:cNvSpPr/>
+          <p:nvPr/>
+        </p:nvSpPr>
+        <p:spPr>
+          <a:xfrm>
+            <a:off x="640080" y="1463040"/>
+            <a:ext cx="548640" cy="548640"/>
+          </a:xfrm>
+          <a:prstGeom prst="ellipse">
+            <a:avLst/>
+          </a:prstGeom>
+          <a:solidFill>
+            <a:schemeClr val="accent1"/>
+          </a:solidFill>
+          <a:ln w="12700">
+            <a:solidFill>
+              <a:schemeClr val="accent1"/>
+            </a:solidFill>
+            <a:prstDash val="solid"/>
+          </a:ln>
+        </p:spPr>
+      </p:sp>
+      <p:sp>
+        <p:nvSpPr>
+          <p:cNvPr id="5" name="Mixed 3 number"/>
+          <p:cNvSpPr txBox="1"/>
+          <p:nvPr/>
+        </p:nvSpPr>
+        <p:spPr>
+          <a:xfrm>
+            <a:off x="640080" y="1463040"/>
+            <a:ext cx="548640" cy="548640"/>
+          </a:xfrm>
+          <a:prstGeom prst="rect">
+            <a:avLst/>
+          </a:prstGeom>
+          <a:noFill/>
+          <a:ln/>
+        </p:spPr>
+        <p:txBody>
+          <a:bodyPr wrap="square" lIns="0" tIns="0" rIns="0" bIns="0" rtlCol="0" anchor="ctr"/>
+          <a:lstStyle/>
+          <a:p>
+            <a:pPr algn="ctr" indent="0" marL="0">
+              <a:buNone/>
+            </a:pPr>
+            <a:r>
+              <a:rPr lang="en-US" sz="2200" b="1" dirty="0">
+                <a:solidFill>
+                  <a:schemeClr val="tx1"/>
+                </a:solidFill>
+              </a:rPr>
+              <a:t>3</a:t>
+            </a:r>
+            <a:endParaRPr lang="en-US" sz="2200" dirty="0"/>
+          </a:p>
+        </p:txBody>
+      </p:sp>
+      <p:pic>
+        <p:nvPicPr>
+          <p:cNvPr id="6" name="m03" descr="Mixed code 3: treble clef notes, then bass clef notes, each with an empty answer box">    </p:cNvPr>
+          <p:cNvPicPr>
+            <a:picLocks noChangeAspect="1"/>
+          </p:cNvPicPr>
+          <p:nvPr/>
+        </p:nvPicPr>
+        <p:blipFill>
+          <a:blip r:embed="rId1"/>
+          <a:stretch>
+            <a:fillRect/>
+          </a:stretch>
+        </p:blipFill>
+        <p:spPr>
+          <a:xfrm>
+            <a:off x="1463040" y="1417320"/>
+            <a:ext cx="6287237" cy="2468880"/>
+          </a:xfrm>
+          <a:prstGeom prst="rect">
+            <a:avLst/>
+          </a:prstGeom>
+        </p:spPr>
+      </p:pic>
+      <p:sp>
+        <p:nvSpPr>
+          <p:cNvPr id="7" name="Mixed 4 badge"/>
+          <p:cNvSpPr/>
+          <p:nvPr/>
+        </p:nvSpPr>
+        <p:spPr>
+          <a:xfrm>
+            <a:off x="640080" y="4160520"/>
+            <a:ext cx="548640" cy="548640"/>
+          </a:xfrm>
+          <a:prstGeom prst="ellipse">
+            <a:avLst/>
+          </a:prstGeom>
+          <a:solidFill>
+            <a:schemeClr val="accent1"/>
+          </a:solidFill>
+          <a:ln w="12700">
+            <a:solidFill>
+              <a:schemeClr val="accent1"/>
+            </a:solidFill>
+            <a:prstDash val="solid"/>
+          </a:ln>
+        </p:spPr>
+      </p:sp>
+      <p:sp>
+        <p:nvSpPr>
+          <p:cNvPr id="8" name="Mixed 4 number"/>
+          <p:cNvSpPr txBox="1"/>
+          <p:nvPr/>
+        </p:nvSpPr>
+        <p:spPr>
+          <a:xfrm>
+            <a:off x="640080" y="4160520"/>
+            <a:ext cx="548640" cy="548640"/>
+          </a:xfrm>
+          <a:prstGeom prst="rect">
+            <a:avLst/>
+          </a:prstGeom>
+          <a:noFill/>
+          <a:ln/>
+        </p:spPr>
+        <p:txBody>
+          <a:bodyPr wrap="square" lIns="0" tIns="0" rIns="0" bIns="0" rtlCol="0" anchor="ctr"/>
+          <a:lstStyle/>
+          <a:p>
+            <a:pPr algn="ctr" indent="0" marL="0">
+              <a:buNone/>
+            </a:pPr>
+            <a:r>
+              <a:rPr lang="en-US" sz="2200" b="1" dirty="0">
+                <a:solidFill>
+                  <a:schemeClr val="tx1"/>
+                </a:solidFill>
+              </a:rPr>
+              <a:t>4</a:t>
+            </a:r>
+            <a:endParaRPr lang="en-US" sz="2200" dirty="0"/>
+          </a:p>
+        </p:txBody>
+      </p:sp>
+      <p:pic>
+        <p:nvPicPr>
+          <p:cNvPr id="9" name="m04" descr="Mixed code 4: treble clef notes, then bass clef notes, each with an empty answer box">    </p:cNvPr>
+          <p:cNvPicPr>
+            <a:picLocks noChangeAspect="1"/>
+          </p:cNvPicPr>
+          <p:nvPr/>
+        </p:nvPicPr>
+        <p:blipFill>
+          <a:blip r:embed="rId2"/>
+          <a:stretch>
+            <a:fillRect/>
+          </a:stretch>
+        </p:blipFill>
+        <p:spPr>
+          <a:xfrm>
+            <a:off x="1463040" y="4114800"/>
+            <a:ext cx="7773875" cy="2468880"/>
+          </a:xfrm>
+          <a:prstGeom prst="rect">
+            <a:avLst/>
+          </a:prstGeom>
+        </p:spPr>
+      </p:pic>
+    </p:spTree>
+  </p:cSld>
+  <p:clrMapOvr>
+    <a:masterClrMapping/>
+  </p:clrMapOvr>
+</p:sld>
+</file>
+
+<file path=ppt/slides/slide19.xml><?xml version="1.0" encoding="utf-8"?>
+<p:sld xmlns:a="http://schemas.openxmlformats.org/drawingml/2006/main" xmlns:r="http://schemas.openxmlformats.org/officeDocument/2006/relationships" xmlns:p="http://schemas.openxmlformats.org/presentationml/2006/main">
+  <p:cSld name="Slide 19">
+    <p:spTree>
+      <p:nvGrpSpPr>
+        <p:cNvPr id="1" name=""/>
+        <p:cNvGrpSpPr/>
+        <p:nvPr/>
+      </p:nvGrpSpPr>
+      <p:grpSpPr>
+        <a:xfrm>
+          <a:off x="0" y="0"/>
+          <a:ext cx="0" cy="0"/>
+          <a:chOff x="0" y="0"/>
+          <a:chExt cx="0" cy="0"/>
+        </a:xfrm>
+      </p:grpSpPr>
+      <p:sp>
+        <p:nvSpPr>
+          <p:cNvPr id="2" name="Text 0"/>
+          <p:cNvSpPr/>
+          <p:nvPr>
+            <p:ph idx="100" type="title" hasCustomPrompt="1"/>
+          </p:nvPr>
+        </p:nvSpPr>
+        <p:spPr>
+          <a:xfrm>
+            <a:off x="640080" y="320040"/>
+            <a:ext cx="10881360" cy="868680"/>
+          </a:xfrm>
+          <a:prstGeom prst="rect">
+            <a:avLst/>
+          </a:prstGeom>
+          <a:noFill/>
+          <a:ln/>
+        </p:spPr>
+        <p:txBody>
+          <a:bodyPr wrap="square" lIns="0" tIns="0" rIns="0" bIns="0" rtlCol="0" anchor="ctr"/>
+          <a:lstStyle/>
+          <a:p>
+            <a:pPr algn="l" indent="0" marL="0">
+              <a:buNone/>
+            </a:pPr>
+            <a:r>
+              <a:rPr lang="en-US" sz="4000" b="1" dirty="0">
+                <a:solidFill>
+                  <a:schemeClr val="tx1"/>
+                </a:solidFill>
+                <a:latin typeface="Cambria" pitchFamily="34" charset="0"/>
+                <a:ea typeface="Cambria" pitchFamily="34" charset="-122"/>
+                <a:cs typeface="Cambria" pitchFamily="34" charset="-120"/>
+              </a:rPr>
+              <a:t>Mixed clefs: 5 and 6</a:t>
+            </a:r>
+            <a:endParaRPr lang="en-US" sz="4000" dirty="0"/>
+          </a:p>
+        </p:txBody>
+      </p:sp>
+      <p:sp>
+        <p:nvSpPr>
+          <p:cNvPr id="3" name="Clef change hint"/>
+          <p:cNvSpPr txBox="1"/>
+          <p:nvPr/>
+        </p:nvSpPr>
+        <p:spPr>
+          <a:xfrm>
+            <a:off x="7315200" y="502920"/>
+            <a:ext cx="4206240" cy="548640"/>
+          </a:xfrm>
+          <a:prstGeom prst="rect">
+            <a:avLst/>
+          </a:prstGeom>
+          <a:noFill/>
+          <a:ln/>
+        </p:spPr>
+        <p:txBody>
+          <a:bodyPr wrap="square" lIns="0" tIns="0" rIns="0" bIns="0" rtlCol="0" anchor="ctr"/>
+          <a:lstStyle/>
+          <a:p>
+            <a:pPr algn="r" indent="0" marL="0">
+              <a:buNone/>
+            </a:pPr>
+            <a:r>
+              <a:rPr lang="en-US" sz="1800" i="1" dirty="0">
+                <a:solidFill>
+                  <a:schemeClr val="accent2"/>
+                </a:solidFill>
+              </a:rPr>
+              <a:t>The clef changes halfway. Check each one!</a:t>
+            </a:r>
+            <a:endParaRPr lang="en-US" sz="1800" dirty="0"/>
+          </a:p>
+        </p:txBody>
+      </p:sp>
+      <p:sp>
+        <p:nvSpPr>
+          <p:cNvPr id="4" name="Mixed 5 badge"/>
+          <p:cNvSpPr/>
+          <p:nvPr/>
+        </p:nvSpPr>
+        <p:spPr>
+          <a:xfrm>
+            <a:off x="640080" y="1463040"/>
+            <a:ext cx="548640" cy="548640"/>
+          </a:xfrm>
+          <a:prstGeom prst="ellipse">
+            <a:avLst/>
+          </a:prstGeom>
+          <a:solidFill>
+            <a:schemeClr val="accent1"/>
+          </a:solidFill>
+          <a:ln w="12700">
+            <a:solidFill>
+              <a:schemeClr val="accent1"/>
+            </a:solidFill>
+            <a:prstDash val="solid"/>
+          </a:ln>
+        </p:spPr>
+      </p:sp>
+      <p:sp>
+        <p:nvSpPr>
+          <p:cNvPr id="5" name="Mixed 5 number"/>
+          <p:cNvSpPr txBox="1"/>
+          <p:nvPr/>
+        </p:nvSpPr>
+        <p:spPr>
+          <a:xfrm>
+            <a:off x="640080" y="1463040"/>
+            <a:ext cx="548640" cy="548640"/>
+          </a:xfrm>
+          <a:prstGeom prst="rect">
+            <a:avLst/>
+          </a:prstGeom>
+          <a:noFill/>
+          <a:ln/>
+        </p:spPr>
+        <p:txBody>
+          <a:bodyPr wrap="square" lIns="0" tIns="0" rIns="0" bIns="0" rtlCol="0" anchor="ctr"/>
+          <a:lstStyle/>
+          <a:p>
+            <a:pPr algn="ctr" indent="0" marL="0">
+              <a:buNone/>
+            </a:pPr>
+            <a:r>
+              <a:rPr lang="en-US" sz="2200" b="1" dirty="0">
+                <a:solidFill>
+                  <a:schemeClr val="tx1"/>
+                </a:solidFill>
+              </a:rPr>
+              <a:t>5</a:t>
+            </a:r>
+            <a:endParaRPr lang="en-US" sz="2200" dirty="0"/>
+          </a:p>
+        </p:txBody>
+      </p:sp>
+      <p:pic>
+        <p:nvPicPr>
+          <p:cNvPr id="6" name="m05" descr="Mixed code 5: treble clef notes, then bass clef notes, each with an empty answer box">    </p:cNvPr>
+          <p:cNvPicPr>
+            <a:picLocks noChangeAspect="1"/>
+          </p:cNvPicPr>
+          <p:nvPr/>
+        </p:nvPicPr>
+        <p:blipFill>
+          <a:blip r:embed="rId1"/>
+          <a:stretch>
+            <a:fillRect/>
+          </a:stretch>
+        </p:blipFill>
+        <p:spPr>
+          <a:xfrm>
+            <a:off x="1463040" y="1417320"/>
+            <a:ext cx="6287237" cy="2468880"/>
+          </a:xfrm>
+          <a:prstGeom prst="rect">
+            <a:avLst/>
+          </a:prstGeom>
+        </p:spPr>
+      </p:pic>
+      <p:sp>
+        <p:nvSpPr>
+          <p:cNvPr id="7" name="Mixed 6 badge"/>
+          <p:cNvSpPr/>
+          <p:nvPr/>
+        </p:nvSpPr>
+        <p:spPr>
+          <a:xfrm>
+            <a:off x="640080" y="4160520"/>
+            <a:ext cx="548640" cy="548640"/>
+          </a:xfrm>
+          <a:prstGeom prst="ellipse">
+            <a:avLst/>
+          </a:prstGeom>
+          <a:solidFill>
+            <a:schemeClr val="accent1"/>
+          </a:solidFill>
+          <a:ln w="12700">
+            <a:solidFill>
+              <a:schemeClr val="accent1"/>
+            </a:solidFill>
+            <a:prstDash val="solid"/>
+          </a:ln>
+        </p:spPr>
+      </p:sp>
+      <p:sp>
+        <p:nvSpPr>
+          <p:cNvPr id="8" name="Mixed 6 number"/>
+          <p:cNvSpPr txBox="1"/>
+          <p:nvPr/>
+        </p:nvSpPr>
+        <p:spPr>
+          <a:xfrm>
+            <a:off x="640080" y="4160520"/>
+            <a:ext cx="548640" cy="548640"/>
+          </a:xfrm>
+          <a:prstGeom prst="rect">
+            <a:avLst/>
+          </a:prstGeom>
+          <a:noFill/>
+          <a:ln/>
+        </p:spPr>
+        <p:txBody>
+          <a:bodyPr wrap="square" lIns="0" tIns="0" rIns="0" bIns="0" rtlCol="0" anchor="ctr"/>
+          <a:lstStyle/>
+          <a:p>
+            <a:pPr algn="ctr" indent="0" marL="0">
+              <a:buNone/>
+            </a:pPr>
+            <a:r>
+              <a:rPr lang="en-US" sz="2200" b="1" dirty="0">
+                <a:solidFill>
+                  <a:schemeClr val="tx1"/>
+                </a:solidFill>
+              </a:rPr>
+              <a:t>6</a:t>
+            </a:r>
+            <a:endParaRPr lang="en-US" sz="2200" dirty="0"/>
+          </a:p>
+        </p:txBody>
+      </p:sp>
+      <p:pic>
+        <p:nvPicPr>
+          <p:cNvPr id="9" name="m06" descr="Mixed code 6: treble clef notes, then bass clef notes, each with an empty answer box">    </p:cNvPr>
+          <p:cNvPicPr>
+            <a:picLocks noChangeAspect="1"/>
+          </p:cNvPicPr>
+          <p:nvPr/>
+        </p:nvPicPr>
+        <p:blipFill>
+          <a:blip r:embed="rId2"/>
+          <a:stretch>
+            <a:fillRect/>
+          </a:stretch>
+        </p:blipFill>
+        <p:spPr>
+          <a:xfrm>
+            <a:off x="1463040" y="4114800"/>
+            <a:ext cx="6287237" cy="2468880"/>
+          </a:xfrm>
+          <a:prstGeom prst="rect">
+            <a:avLst/>
+          </a:prstGeom>
+        </p:spPr>
+      </p:pic>
+    </p:spTree>
+  </p:cSld>
+  <p:clrMapOvr>
+    <a:masterClrMapping/>
+  </p:clrMapOvr>
+</p:sld>
+</file>
+
 <file path=ppt/slides/slide2.xml><?xml version="1.0" encoding="utf-8"?>
 <p:sld xmlns:a="http://schemas.openxmlformats.org/drawingml/2006/main" xmlns:r="http://schemas.openxmlformats.org/officeDocument/2006/relationships" xmlns:p="http://schemas.openxmlformats.org/presentationml/2006/main">
   <p:cSld name="Slide 2">
@@ -2807,6 +6794,1980 @@
               <a:t>G</a:t>
             </a:r>
             <a:endParaRPr lang="en-US" sz="3200" dirty="0"/>
+          </a:p>
+        </p:txBody>
+      </p:sp>
+    </p:spTree>
+  </p:cSld>
+  <p:clrMapOvr>
+    <a:masterClrMapping/>
+  </p:clrMapOvr>
+</p:sld>
+</file>
+
+<file path=ppt/slides/slide20.xml><?xml version="1.0" encoding="utf-8"?>
+<p:sld xmlns:a="http://schemas.openxmlformats.org/drawingml/2006/main" xmlns:r="http://schemas.openxmlformats.org/officeDocument/2006/relationships" xmlns:p="http://schemas.openxmlformats.org/presentationml/2006/main">
+  <p:cSld name="Slide 20">
+    <p:spTree>
+      <p:nvGrpSpPr>
+        <p:cNvPr id="1" name=""/>
+        <p:cNvGrpSpPr/>
+        <p:nvPr/>
+      </p:nvGrpSpPr>
+      <p:grpSpPr>
+        <a:xfrm>
+          <a:off x="0" y="0"/>
+          <a:ext cx="0" cy="0"/>
+          <a:chOff x="0" y="0"/>
+          <a:chExt cx="0" cy="0"/>
+        </a:xfrm>
+      </p:grpSpPr>
+      <p:sp>
+        <p:nvSpPr>
+          <p:cNvPr id="2" name="Text 0"/>
+          <p:cNvSpPr/>
+          <p:nvPr>
+            <p:ph idx="100" type="title" hasCustomPrompt="1"/>
+          </p:nvPr>
+        </p:nvSpPr>
+        <p:spPr>
+          <a:xfrm>
+            <a:off x="640080" y="320040"/>
+            <a:ext cx="10881360" cy="868680"/>
+          </a:xfrm>
+          <a:prstGeom prst="rect">
+            <a:avLst/>
+          </a:prstGeom>
+          <a:noFill/>
+          <a:ln/>
+        </p:spPr>
+        <p:txBody>
+          <a:bodyPr wrap="square" lIns="0" tIns="0" rIns="0" bIns="0" rtlCol="0" anchor="ctr"/>
+          <a:lstStyle/>
+          <a:p>
+            <a:pPr algn="l" indent="0" marL="0">
+              <a:buNone/>
+            </a:pPr>
+            <a:r>
+              <a:rPr lang="en-US" sz="4000" b="1" dirty="0">
+                <a:solidFill>
+                  <a:schemeClr val="tx1"/>
+                </a:solidFill>
+                <a:latin typeface="Cambria" pitchFamily="34" charset="0"/>
+                <a:ea typeface="Cambria" pitchFamily="34" charset="-122"/>
+                <a:cs typeface="Cambria" pitchFamily="34" charset="-120"/>
+              </a:rPr>
+              <a:t>Mixed clefs: 7 and 8</a:t>
+            </a:r>
+            <a:endParaRPr lang="en-US" sz="4000" dirty="0"/>
+          </a:p>
+        </p:txBody>
+      </p:sp>
+      <p:sp>
+        <p:nvSpPr>
+          <p:cNvPr id="3" name="Clef change hint"/>
+          <p:cNvSpPr txBox="1"/>
+          <p:nvPr/>
+        </p:nvSpPr>
+        <p:spPr>
+          <a:xfrm>
+            <a:off x="7315200" y="502920"/>
+            <a:ext cx="4206240" cy="548640"/>
+          </a:xfrm>
+          <a:prstGeom prst="rect">
+            <a:avLst/>
+          </a:prstGeom>
+          <a:noFill/>
+          <a:ln/>
+        </p:spPr>
+        <p:txBody>
+          <a:bodyPr wrap="square" lIns="0" tIns="0" rIns="0" bIns="0" rtlCol="0" anchor="ctr"/>
+          <a:lstStyle/>
+          <a:p>
+            <a:pPr algn="r" indent="0" marL="0">
+              <a:buNone/>
+            </a:pPr>
+            <a:r>
+              <a:rPr lang="en-US" sz="1800" i="1" dirty="0">
+                <a:solidFill>
+                  <a:schemeClr val="accent2"/>
+                </a:solidFill>
+              </a:rPr>
+              <a:t>The clef changes halfway. Check each one!</a:t>
+            </a:r>
+            <a:endParaRPr lang="en-US" sz="1800" dirty="0"/>
+          </a:p>
+        </p:txBody>
+      </p:sp>
+      <p:sp>
+        <p:nvSpPr>
+          <p:cNvPr id="4" name="Mixed 7 badge"/>
+          <p:cNvSpPr/>
+          <p:nvPr/>
+        </p:nvSpPr>
+        <p:spPr>
+          <a:xfrm>
+            <a:off x="640080" y="1463040"/>
+            <a:ext cx="548640" cy="548640"/>
+          </a:xfrm>
+          <a:prstGeom prst="ellipse">
+            <a:avLst/>
+          </a:prstGeom>
+          <a:solidFill>
+            <a:schemeClr val="accent1"/>
+          </a:solidFill>
+          <a:ln w="12700">
+            <a:solidFill>
+              <a:schemeClr val="accent1"/>
+            </a:solidFill>
+            <a:prstDash val="solid"/>
+          </a:ln>
+        </p:spPr>
+      </p:sp>
+      <p:sp>
+        <p:nvSpPr>
+          <p:cNvPr id="5" name="Mixed 7 number"/>
+          <p:cNvSpPr txBox="1"/>
+          <p:nvPr/>
+        </p:nvSpPr>
+        <p:spPr>
+          <a:xfrm>
+            <a:off x="640080" y="1463040"/>
+            <a:ext cx="548640" cy="548640"/>
+          </a:xfrm>
+          <a:prstGeom prst="rect">
+            <a:avLst/>
+          </a:prstGeom>
+          <a:noFill/>
+          <a:ln/>
+        </p:spPr>
+        <p:txBody>
+          <a:bodyPr wrap="square" lIns="0" tIns="0" rIns="0" bIns="0" rtlCol="0" anchor="ctr"/>
+          <a:lstStyle/>
+          <a:p>
+            <a:pPr algn="ctr" indent="0" marL="0">
+              <a:buNone/>
+            </a:pPr>
+            <a:r>
+              <a:rPr lang="en-US" sz="2200" b="1" dirty="0">
+                <a:solidFill>
+                  <a:schemeClr val="tx1"/>
+                </a:solidFill>
+              </a:rPr>
+              <a:t>7</a:t>
+            </a:r>
+            <a:endParaRPr lang="en-US" sz="2200" dirty="0"/>
+          </a:p>
+        </p:txBody>
+      </p:sp>
+      <p:pic>
+        <p:nvPicPr>
+          <p:cNvPr id="6" name="m07" descr="Mixed code 7: treble clef notes, then bass clef notes, each with an empty answer box">    </p:cNvPr>
+          <p:cNvPicPr>
+            <a:picLocks noChangeAspect="1"/>
+          </p:cNvPicPr>
+          <p:nvPr/>
+        </p:nvPicPr>
+        <p:blipFill>
+          <a:blip r:embed="rId1"/>
+          <a:stretch>
+            <a:fillRect/>
+          </a:stretch>
+        </p:blipFill>
+        <p:spPr>
+          <a:xfrm>
+            <a:off x="1463040" y="1417320"/>
+            <a:ext cx="7030556" cy="2468880"/>
+          </a:xfrm>
+          <a:prstGeom prst="rect">
+            <a:avLst/>
+          </a:prstGeom>
+        </p:spPr>
+      </p:pic>
+      <p:sp>
+        <p:nvSpPr>
+          <p:cNvPr id="7" name="Mixed 8 badge"/>
+          <p:cNvSpPr/>
+          <p:nvPr/>
+        </p:nvSpPr>
+        <p:spPr>
+          <a:xfrm>
+            <a:off x="640080" y="4160520"/>
+            <a:ext cx="548640" cy="548640"/>
+          </a:xfrm>
+          <a:prstGeom prst="ellipse">
+            <a:avLst/>
+          </a:prstGeom>
+          <a:solidFill>
+            <a:schemeClr val="accent1"/>
+          </a:solidFill>
+          <a:ln w="12700">
+            <a:solidFill>
+              <a:schemeClr val="accent1"/>
+            </a:solidFill>
+            <a:prstDash val="solid"/>
+          </a:ln>
+        </p:spPr>
+      </p:sp>
+      <p:sp>
+        <p:nvSpPr>
+          <p:cNvPr id="8" name="Mixed 8 number"/>
+          <p:cNvSpPr txBox="1"/>
+          <p:nvPr/>
+        </p:nvSpPr>
+        <p:spPr>
+          <a:xfrm>
+            <a:off x="640080" y="4160520"/>
+            <a:ext cx="548640" cy="548640"/>
+          </a:xfrm>
+          <a:prstGeom prst="rect">
+            <a:avLst/>
+          </a:prstGeom>
+          <a:noFill/>
+          <a:ln/>
+        </p:spPr>
+        <p:txBody>
+          <a:bodyPr wrap="square" lIns="0" tIns="0" rIns="0" bIns="0" rtlCol="0" anchor="ctr"/>
+          <a:lstStyle/>
+          <a:p>
+            <a:pPr algn="ctr" indent="0" marL="0">
+              <a:buNone/>
+            </a:pPr>
+            <a:r>
+              <a:rPr lang="en-US" sz="2200" b="1" dirty="0">
+                <a:solidFill>
+                  <a:schemeClr val="tx1"/>
+                </a:solidFill>
+              </a:rPr>
+              <a:t>8</a:t>
+            </a:r>
+            <a:endParaRPr lang="en-US" sz="2200" dirty="0"/>
+          </a:p>
+        </p:txBody>
+      </p:sp>
+      <p:pic>
+        <p:nvPicPr>
+          <p:cNvPr id="9" name="m08" descr="Mixed code 8: treble clef notes, then bass clef notes, each with an empty answer box">    </p:cNvPr>
+          <p:cNvPicPr>
+            <a:picLocks noChangeAspect="1"/>
+          </p:cNvPicPr>
+          <p:nvPr/>
+        </p:nvPicPr>
+        <p:blipFill>
+          <a:blip r:embed="rId2"/>
+          <a:stretch>
+            <a:fillRect/>
+          </a:stretch>
+        </p:blipFill>
+        <p:spPr>
+          <a:xfrm>
+            <a:off x="1463040" y="4114800"/>
+            <a:ext cx="7030556" cy="2468880"/>
+          </a:xfrm>
+          <a:prstGeom prst="rect">
+            <a:avLst/>
+          </a:prstGeom>
+        </p:spPr>
+      </p:pic>
+    </p:spTree>
+  </p:cSld>
+  <p:clrMapOvr>
+    <a:masterClrMapping/>
+  </p:clrMapOvr>
+</p:sld>
+</file>
+
+<file path=ppt/slides/slide21.xml><?xml version="1.0" encoding="utf-8"?>
+<p:sld xmlns:a="http://schemas.openxmlformats.org/drawingml/2006/main" xmlns:r="http://schemas.openxmlformats.org/officeDocument/2006/relationships" xmlns:p="http://schemas.openxmlformats.org/presentationml/2006/main">
+  <p:cSld name="Slide 21">
+    <p:spTree>
+      <p:nvGrpSpPr>
+        <p:cNvPr id="1" name=""/>
+        <p:cNvGrpSpPr/>
+        <p:nvPr/>
+      </p:nvGrpSpPr>
+      <p:grpSpPr>
+        <a:xfrm>
+          <a:off x="0" y="0"/>
+          <a:ext cx="0" cy="0"/>
+          <a:chOff x="0" y="0"/>
+          <a:chExt cx="0" cy="0"/>
+        </a:xfrm>
+      </p:grpSpPr>
+      <p:sp>
+        <p:nvSpPr>
+          <p:cNvPr id="2" name="Text 0"/>
+          <p:cNvSpPr/>
+          <p:nvPr>
+            <p:ph idx="100" type="title" hasCustomPrompt="1"/>
+          </p:nvPr>
+        </p:nvSpPr>
+        <p:spPr>
+          <a:xfrm>
+            <a:off x="640080" y="457200"/>
+            <a:ext cx="10881360" cy="914400"/>
+          </a:xfrm>
+          <a:prstGeom prst="rect">
+            <a:avLst/>
+          </a:prstGeom>
+          <a:noFill/>
+          <a:ln/>
+        </p:spPr>
+        <p:txBody>
+          <a:bodyPr wrap="square" lIns="0" tIns="0" rIns="0" bIns="0" rtlCol="0" anchor="ctr"/>
+          <a:lstStyle/>
+          <a:p>
+            <a:pPr algn="l" indent="0" marL="0">
+              <a:buNone/>
+            </a:pPr>
+            <a:r>
+              <a:rPr lang="en-US" sz="4400" b="1" dirty="0">
+                <a:solidFill>
+                  <a:schemeClr val="bg1"/>
+                </a:solidFill>
+                <a:latin typeface="Cambria" pitchFamily="34" charset="0"/>
+                <a:ea typeface="Cambria" pitchFamily="34" charset="-122"/>
+                <a:cs typeface="Cambria" pitchFamily="34" charset="-120"/>
+              </a:rPr>
+              <a:t>Answers: Treble clef</a:t>
+            </a:r>
+            <a:endParaRPr lang="en-US" sz="4400" dirty="0"/>
+          </a:p>
+        </p:txBody>
+      </p:sp>
+      <p:sp>
+        <p:nvSpPr>
+          <p:cNvPr id="3" name="Answer Answers: Treble clef 1"/>
+          <p:cNvSpPr txBox="1"/>
+          <p:nvPr/>
+        </p:nvSpPr>
+        <p:spPr>
+          <a:xfrm>
+            <a:off x="640080" y="1737360"/>
+            <a:ext cx="3444240" cy="822960"/>
+          </a:xfrm>
+          <a:prstGeom prst="rect">
+            <a:avLst/>
+          </a:prstGeom>
+          <a:noFill/>
+          <a:ln/>
+        </p:spPr>
+        <p:txBody>
+          <a:bodyPr wrap="square" lIns="0" tIns="0" rIns="0" bIns="0" rtlCol="0" anchor="ctr"/>
+          <a:lstStyle/>
+          <a:p>
+            <a:pPr indent="0" marL="0">
+              <a:buNone/>
+            </a:pPr>
+            <a:r>
+              <a:rPr lang="en-US" sz="3000" b="1" dirty="0">
+                <a:solidFill>
+                  <a:schemeClr val="accent1"/>
+                </a:solidFill>
+              </a:rPr>
+              <a:t> 1   </a:t>
+            </a:r>
+            <a:pPr indent="0" marL="0">
+              <a:buNone/>
+            </a:pPr>
+            <a:r>
+              <a:rPr lang="en-US" sz="3000" b="1" dirty="0">
+                <a:solidFill>
+                  <a:schemeClr val="bg1"/>
+                </a:solidFill>
+              </a:rPr>
+              <a:t>ACE</a:t>
+            </a:r>
+            <a:endParaRPr lang="en-US" sz="3000" dirty="0"/>
+          </a:p>
+        </p:txBody>
+      </p:sp>
+      <p:sp>
+        <p:nvSpPr>
+          <p:cNvPr id="4" name="Answer Answers: Treble clef 2"/>
+          <p:cNvSpPr txBox="1"/>
+          <p:nvPr/>
+        </p:nvSpPr>
+        <p:spPr>
+          <a:xfrm>
+            <a:off x="640080" y="2788920"/>
+            <a:ext cx="3444240" cy="822960"/>
+          </a:xfrm>
+          <a:prstGeom prst="rect">
+            <a:avLst/>
+          </a:prstGeom>
+          <a:noFill/>
+          <a:ln/>
+        </p:spPr>
+        <p:txBody>
+          <a:bodyPr wrap="square" lIns="0" tIns="0" rIns="0" bIns="0" rtlCol="0" anchor="ctr"/>
+          <a:lstStyle/>
+          <a:p>
+            <a:pPr indent="0" marL="0">
+              <a:buNone/>
+            </a:pPr>
+            <a:r>
+              <a:rPr lang="en-US" sz="3000" b="1" dirty="0">
+                <a:solidFill>
+                  <a:schemeClr val="accent1"/>
+                </a:solidFill>
+              </a:rPr>
+              <a:t> 2   </a:t>
+            </a:r>
+            <a:pPr indent="0" marL="0">
+              <a:buNone/>
+            </a:pPr>
+            <a:r>
+              <a:rPr lang="en-US" sz="3000" b="1" dirty="0">
+                <a:solidFill>
+                  <a:schemeClr val="bg1"/>
+                </a:solidFill>
+              </a:rPr>
+              <a:t>BAG</a:t>
+            </a:r>
+            <a:endParaRPr lang="en-US" sz="3000" dirty="0"/>
+          </a:p>
+        </p:txBody>
+      </p:sp>
+      <p:sp>
+        <p:nvSpPr>
+          <p:cNvPr id="5" name="Answer Answers: Treble clef 3"/>
+          <p:cNvSpPr txBox="1"/>
+          <p:nvPr/>
+        </p:nvSpPr>
+        <p:spPr>
+          <a:xfrm>
+            <a:off x="640080" y="3840480"/>
+            <a:ext cx="3444240" cy="822960"/>
+          </a:xfrm>
+          <a:prstGeom prst="rect">
+            <a:avLst/>
+          </a:prstGeom>
+          <a:noFill/>
+          <a:ln/>
+        </p:spPr>
+        <p:txBody>
+          <a:bodyPr wrap="square" lIns="0" tIns="0" rIns="0" bIns="0" rtlCol="0" anchor="ctr"/>
+          <a:lstStyle/>
+          <a:p>
+            <a:pPr indent="0" marL="0">
+              <a:buNone/>
+            </a:pPr>
+            <a:r>
+              <a:rPr lang="en-US" sz="3000" b="1" dirty="0">
+                <a:solidFill>
+                  <a:schemeClr val="accent1"/>
+                </a:solidFill>
+              </a:rPr>
+              <a:t> 3   </a:t>
+            </a:r>
+            <a:pPr indent="0" marL="0">
+              <a:buNone/>
+            </a:pPr>
+            <a:r>
+              <a:rPr lang="en-US" sz="3000" b="1" dirty="0">
+                <a:solidFill>
+                  <a:schemeClr val="bg1"/>
+                </a:solidFill>
+              </a:rPr>
+              <a:t>EGG</a:t>
+            </a:r>
+            <a:endParaRPr lang="en-US" sz="3000" dirty="0"/>
+          </a:p>
+        </p:txBody>
+      </p:sp>
+      <p:sp>
+        <p:nvSpPr>
+          <p:cNvPr id="6" name="Answer Answers: Treble clef 4"/>
+          <p:cNvSpPr txBox="1"/>
+          <p:nvPr/>
+        </p:nvSpPr>
+        <p:spPr>
+          <a:xfrm>
+            <a:off x="640080" y="4892040"/>
+            <a:ext cx="3444240" cy="822960"/>
+          </a:xfrm>
+          <a:prstGeom prst="rect">
+            <a:avLst/>
+          </a:prstGeom>
+          <a:noFill/>
+          <a:ln/>
+        </p:spPr>
+        <p:txBody>
+          <a:bodyPr wrap="square" lIns="0" tIns="0" rIns="0" bIns="0" rtlCol="0" anchor="ctr"/>
+          <a:lstStyle/>
+          <a:p>
+            <a:pPr indent="0" marL="0">
+              <a:buNone/>
+            </a:pPr>
+            <a:r>
+              <a:rPr lang="en-US" sz="3000" b="1" dirty="0">
+                <a:solidFill>
+                  <a:schemeClr val="accent1"/>
+                </a:solidFill>
+              </a:rPr>
+              <a:t> 4   </a:t>
+            </a:r>
+            <a:pPr indent="0" marL="0">
+              <a:buNone/>
+            </a:pPr>
+            <a:r>
+              <a:rPr lang="en-US" sz="3000" b="1" dirty="0">
+                <a:solidFill>
+                  <a:schemeClr val="bg1"/>
+                </a:solidFill>
+              </a:rPr>
+              <a:t>BED</a:t>
+            </a:r>
+            <a:endParaRPr lang="en-US" sz="3000" dirty="0"/>
+          </a:p>
+        </p:txBody>
+      </p:sp>
+      <p:sp>
+        <p:nvSpPr>
+          <p:cNvPr id="7" name="Answer Answers: Treble clef 5"/>
+          <p:cNvSpPr txBox="1"/>
+          <p:nvPr/>
+        </p:nvSpPr>
+        <p:spPr>
+          <a:xfrm>
+            <a:off x="4267200" y="1737360"/>
+            <a:ext cx="3444240" cy="822960"/>
+          </a:xfrm>
+          <a:prstGeom prst="rect">
+            <a:avLst/>
+          </a:prstGeom>
+          <a:noFill/>
+          <a:ln/>
+        </p:spPr>
+        <p:txBody>
+          <a:bodyPr wrap="square" lIns="0" tIns="0" rIns="0" bIns="0" rtlCol="0" anchor="ctr"/>
+          <a:lstStyle/>
+          <a:p>
+            <a:pPr indent="0" marL="0">
+              <a:buNone/>
+            </a:pPr>
+            <a:r>
+              <a:rPr lang="en-US" sz="3000" b="1" dirty="0">
+                <a:solidFill>
+                  <a:schemeClr val="accent1"/>
+                </a:solidFill>
+              </a:rPr>
+              <a:t> 5   </a:t>
+            </a:r>
+            <a:pPr indent="0" marL="0">
+              <a:buNone/>
+            </a:pPr>
+            <a:r>
+              <a:rPr lang="en-US" sz="3000" b="1" dirty="0">
+                <a:solidFill>
+                  <a:schemeClr val="bg1"/>
+                </a:solidFill>
+              </a:rPr>
+              <a:t>FACE</a:t>
+            </a:r>
+            <a:endParaRPr lang="en-US" sz="3000" dirty="0"/>
+          </a:p>
+        </p:txBody>
+      </p:sp>
+      <p:sp>
+        <p:nvSpPr>
+          <p:cNvPr id="8" name="Answer Answers: Treble clef 6"/>
+          <p:cNvSpPr txBox="1"/>
+          <p:nvPr/>
+        </p:nvSpPr>
+        <p:spPr>
+          <a:xfrm>
+            <a:off x="4267200" y="2788920"/>
+            <a:ext cx="3444240" cy="822960"/>
+          </a:xfrm>
+          <a:prstGeom prst="rect">
+            <a:avLst/>
+          </a:prstGeom>
+          <a:noFill/>
+          <a:ln/>
+        </p:spPr>
+        <p:txBody>
+          <a:bodyPr wrap="square" lIns="0" tIns="0" rIns="0" bIns="0" rtlCol="0" anchor="ctr"/>
+          <a:lstStyle/>
+          <a:p>
+            <a:pPr indent="0" marL="0">
+              <a:buNone/>
+            </a:pPr>
+            <a:r>
+              <a:rPr lang="en-US" sz="3000" b="1" dirty="0">
+                <a:solidFill>
+                  <a:schemeClr val="accent1"/>
+                </a:solidFill>
+              </a:rPr>
+              <a:t> 6   </a:t>
+            </a:r>
+            <a:pPr indent="0" marL="0">
+              <a:buNone/>
+            </a:pPr>
+            <a:r>
+              <a:rPr lang="en-US" sz="3000" b="1" dirty="0">
+                <a:solidFill>
+                  <a:schemeClr val="bg1"/>
+                </a:solidFill>
+              </a:rPr>
+              <a:t>CAGE</a:t>
+            </a:r>
+            <a:endParaRPr lang="en-US" sz="3000" dirty="0"/>
+          </a:p>
+        </p:txBody>
+      </p:sp>
+      <p:sp>
+        <p:nvSpPr>
+          <p:cNvPr id="9" name="Answer Answers: Treble clef 7"/>
+          <p:cNvSpPr txBox="1"/>
+          <p:nvPr/>
+        </p:nvSpPr>
+        <p:spPr>
+          <a:xfrm>
+            <a:off x="4267200" y="3840480"/>
+            <a:ext cx="3444240" cy="822960"/>
+          </a:xfrm>
+          <a:prstGeom prst="rect">
+            <a:avLst/>
+          </a:prstGeom>
+          <a:noFill/>
+          <a:ln/>
+        </p:spPr>
+        <p:txBody>
+          <a:bodyPr wrap="square" lIns="0" tIns="0" rIns="0" bIns="0" rtlCol="0" anchor="ctr"/>
+          <a:lstStyle/>
+          <a:p>
+            <a:pPr indent="0" marL="0">
+              <a:buNone/>
+            </a:pPr>
+            <a:r>
+              <a:rPr lang="en-US" sz="3000" b="1" dirty="0">
+                <a:solidFill>
+                  <a:schemeClr val="accent1"/>
+                </a:solidFill>
+              </a:rPr>
+              <a:t> 7   </a:t>
+            </a:r>
+            <a:pPr indent="0" marL="0">
+              <a:buNone/>
+            </a:pPr>
+            <a:r>
+              <a:rPr lang="en-US" sz="3000" b="1" dirty="0">
+                <a:solidFill>
+                  <a:schemeClr val="bg1"/>
+                </a:solidFill>
+              </a:rPr>
+              <a:t>FADE</a:t>
+            </a:r>
+            <a:endParaRPr lang="en-US" sz="3000" dirty="0"/>
+          </a:p>
+        </p:txBody>
+      </p:sp>
+      <p:sp>
+        <p:nvSpPr>
+          <p:cNvPr id="10" name="Answer Answers: Treble clef 8"/>
+          <p:cNvSpPr txBox="1"/>
+          <p:nvPr/>
+        </p:nvSpPr>
+        <p:spPr>
+          <a:xfrm>
+            <a:off x="4267200" y="4892040"/>
+            <a:ext cx="3444240" cy="822960"/>
+          </a:xfrm>
+          <a:prstGeom prst="rect">
+            <a:avLst/>
+          </a:prstGeom>
+          <a:noFill/>
+          <a:ln/>
+        </p:spPr>
+        <p:txBody>
+          <a:bodyPr wrap="square" lIns="0" tIns="0" rIns="0" bIns="0" rtlCol="0" anchor="ctr"/>
+          <a:lstStyle/>
+          <a:p>
+            <a:pPr indent="0" marL="0">
+              <a:buNone/>
+            </a:pPr>
+            <a:r>
+              <a:rPr lang="en-US" sz="3000" b="1" dirty="0">
+                <a:solidFill>
+                  <a:schemeClr val="accent1"/>
+                </a:solidFill>
+              </a:rPr>
+              <a:t> 8   </a:t>
+            </a:r>
+            <a:pPr indent="0" marL="0">
+              <a:buNone/>
+            </a:pPr>
+            <a:r>
+              <a:rPr lang="en-US" sz="3000" b="1" dirty="0">
+                <a:solidFill>
+                  <a:schemeClr val="bg1"/>
+                </a:solidFill>
+              </a:rPr>
+              <a:t>BEAD</a:t>
+            </a:r>
+            <a:endParaRPr lang="en-US" sz="3000" dirty="0"/>
+          </a:p>
+        </p:txBody>
+      </p:sp>
+      <p:sp>
+        <p:nvSpPr>
+          <p:cNvPr id="11" name="Answer Answers: Treble clef 9"/>
+          <p:cNvSpPr txBox="1"/>
+          <p:nvPr/>
+        </p:nvSpPr>
+        <p:spPr>
+          <a:xfrm>
+            <a:off x="7894320" y="1737360"/>
+            <a:ext cx="3444240" cy="822960"/>
+          </a:xfrm>
+          <a:prstGeom prst="rect">
+            <a:avLst/>
+          </a:prstGeom>
+          <a:noFill/>
+          <a:ln/>
+        </p:spPr>
+        <p:txBody>
+          <a:bodyPr wrap="square" lIns="0" tIns="0" rIns="0" bIns="0" rtlCol="0" anchor="ctr"/>
+          <a:lstStyle/>
+          <a:p>
+            <a:pPr indent="0" marL="0">
+              <a:buNone/>
+            </a:pPr>
+            <a:r>
+              <a:rPr lang="en-US" sz="3000" b="1" dirty="0">
+                <a:solidFill>
+                  <a:schemeClr val="accent1"/>
+                </a:solidFill>
+              </a:rPr>
+              <a:t> 9   </a:t>
+            </a:r>
+            <a:pPr indent="0" marL="0">
+              <a:buNone/>
+            </a:pPr>
+            <a:r>
+              <a:rPr lang="en-US" sz="3000" b="1" dirty="0">
+                <a:solidFill>
+                  <a:schemeClr val="bg1"/>
+                </a:solidFill>
+              </a:rPr>
+              <a:t>FEED</a:t>
+            </a:r>
+            <a:endParaRPr lang="en-US" sz="3000" dirty="0"/>
+          </a:p>
+        </p:txBody>
+      </p:sp>
+      <p:sp>
+        <p:nvSpPr>
+          <p:cNvPr id="12" name="Answer Answers: Treble clef 10"/>
+          <p:cNvSpPr txBox="1"/>
+          <p:nvPr/>
+        </p:nvSpPr>
+        <p:spPr>
+          <a:xfrm>
+            <a:off x="7894320" y="2788920"/>
+            <a:ext cx="3444240" cy="822960"/>
+          </a:xfrm>
+          <a:prstGeom prst="rect">
+            <a:avLst/>
+          </a:prstGeom>
+          <a:noFill/>
+          <a:ln/>
+        </p:spPr>
+        <p:txBody>
+          <a:bodyPr wrap="square" lIns="0" tIns="0" rIns="0" bIns="0" rtlCol="0" anchor="ctr"/>
+          <a:lstStyle/>
+          <a:p>
+            <a:pPr indent="0" marL="0">
+              <a:buNone/>
+            </a:pPr>
+            <a:r>
+              <a:rPr lang="en-US" sz="3000" b="1" dirty="0">
+                <a:solidFill>
+                  <a:schemeClr val="accent1"/>
+                </a:solidFill>
+              </a:rPr>
+              <a:t>10   </a:t>
+            </a:r>
+            <a:pPr indent="0" marL="0">
+              <a:buNone/>
+            </a:pPr>
+            <a:r>
+              <a:rPr lang="en-US" sz="3000" b="1" dirty="0">
+                <a:solidFill>
+                  <a:schemeClr val="bg1"/>
+                </a:solidFill>
+              </a:rPr>
+              <a:t>BADGE</a:t>
+            </a:r>
+            <a:endParaRPr lang="en-US" sz="3000" dirty="0"/>
+          </a:p>
+        </p:txBody>
+      </p:sp>
+      <p:sp>
+        <p:nvSpPr>
+          <p:cNvPr id="13" name="Answer Answers: Treble clef 11"/>
+          <p:cNvSpPr txBox="1"/>
+          <p:nvPr/>
+        </p:nvSpPr>
+        <p:spPr>
+          <a:xfrm>
+            <a:off x="7894320" y="3840480"/>
+            <a:ext cx="3444240" cy="822960"/>
+          </a:xfrm>
+          <a:prstGeom prst="rect">
+            <a:avLst/>
+          </a:prstGeom>
+          <a:noFill/>
+          <a:ln/>
+        </p:spPr>
+        <p:txBody>
+          <a:bodyPr wrap="square" lIns="0" tIns="0" rIns="0" bIns="0" rtlCol="0" anchor="ctr"/>
+          <a:lstStyle/>
+          <a:p>
+            <a:pPr indent="0" marL="0">
+              <a:buNone/>
+            </a:pPr>
+            <a:r>
+              <a:rPr lang="en-US" sz="3000" b="1" dirty="0">
+                <a:solidFill>
+                  <a:schemeClr val="accent1"/>
+                </a:solidFill>
+              </a:rPr>
+              <a:t>11   </a:t>
+            </a:r>
+            <a:pPr indent="0" marL="0">
+              <a:buNone/>
+            </a:pPr>
+            <a:r>
+              <a:rPr lang="en-US" sz="3000" b="1" dirty="0">
+                <a:solidFill>
+                  <a:schemeClr val="bg1"/>
+                </a:solidFill>
+              </a:rPr>
+              <a:t>DECADE</a:t>
+            </a:r>
+            <a:endParaRPr lang="en-US" sz="3000" dirty="0"/>
+          </a:p>
+        </p:txBody>
+      </p:sp>
+      <p:sp>
+        <p:nvSpPr>
+          <p:cNvPr id="14" name="Answer Answers: Treble clef 12"/>
+          <p:cNvSpPr txBox="1"/>
+          <p:nvPr/>
+        </p:nvSpPr>
+        <p:spPr>
+          <a:xfrm>
+            <a:off x="7894320" y="4892040"/>
+            <a:ext cx="3444240" cy="822960"/>
+          </a:xfrm>
+          <a:prstGeom prst="rect">
+            <a:avLst/>
+          </a:prstGeom>
+          <a:noFill/>
+          <a:ln/>
+        </p:spPr>
+        <p:txBody>
+          <a:bodyPr wrap="square" lIns="0" tIns="0" rIns="0" bIns="0" rtlCol="0" anchor="ctr"/>
+          <a:lstStyle/>
+          <a:p>
+            <a:pPr indent="0" marL="0">
+              <a:buNone/>
+            </a:pPr>
+            <a:r>
+              <a:rPr lang="en-US" sz="3000" b="1" dirty="0">
+                <a:solidFill>
+                  <a:schemeClr val="accent1"/>
+                </a:solidFill>
+              </a:rPr>
+              <a:t>12   </a:t>
+            </a:r>
+            <a:pPr indent="0" marL="0">
+              <a:buNone/>
+            </a:pPr>
+            <a:r>
+              <a:rPr lang="en-US" sz="3000" b="1" dirty="0">
+                <a:solidFill>
+                  <a:schemeClr val="bg1"/>
+                </a:solidFill>
+              </a:rPr>
+              <a:t>FACADE</a:t>
+            </a:r>
+            <a:endParaRPr lang="en-US" sz="3000" dirty="0"/>
+          </a:p>
+        </p:txBody>
+      </p:sp>
+    </p:spTree>
+  </p:cSld>
+  <p:clrMapOvr>
+    <a:masterClrMapping/>
+  </p:clrMapOvr>
+</p:sld>
+</file>
+
+<file path=ppt/slides/slide22.xml><?xml version="1.0" encoding="utf-8"?>
+<p:sld xmlns:a="http://schemas.openxmlformats.org/drawingml/2006/main" xmlns:r="http://schemas.openxmlformats.org/officeDocument/2006/relationships" xmlns:p="http://schemas.openxmlformats.org/presentationml/2006/main">
+  <p:cSld name="Slide 22">
+    <p:spTree>
+      <p:nvGrpSpPr>
+        <p:cNvPr id="1" name=""/>
+        <p:cNvGrpSpPr/>
+        <p:nvPr/>
+      </p:nvGrpSpPr>
+      <p:grpSpPr>
+        <a:xfrm>
+          <a:off x="0" y="0"/>
+          <a:ext cx="0" cy="0"/>
+          <a:chOff x="0" y="0"/>
+          <a:chExt cx="0" cy="0"/>
+        </a:xfrm>
+      </p:grpSpPr>
+      <p:sp>
+        <p:nvSpPr>
+          <p:cNvPr id="2" name="Text 0"/>
+          <p:cNvSpPr/>
+          <p:nvPr>
+            <p:ph idx="100" type="title" hasCustomPrompt="1"/>
+          </p:nvPr>
+        </p:nvSpPr>
+        <p:spPr>
+          <a:xfrm>
+            <a:off x="640080" y="457200"/>
+            <a:ext cx="10881360" cy="914400"/>
+          </a:xfrm>
+          <a:prstGeom prst="rect">
+            <a:avLst/>
+          </a:prstGeom>
+          <a:noFill/>
+          <a:ln/>
+        </p:spPr>
+        <p:txBody>
+          <a:bodyPr wrap="square" lIns="0" tIns="0" rIns="0" bIns="0" rtlCol="0" anchor="ctr"/>
+          <a:lstStyle/>
+          <a:p>
+            <a:pPr algn="l" indent="0" marL="0">
+              <a:buNone/>
+            </a:pPr>
+            <a:r>
+              <a:rPr lang="en-US" sz="4400" b="1" dirty="0">
+                <a:solidFill>
+                  <a:schemeClr val="bg1"/>
+                </a:solidFill>
+                <a:latin typeface="Cambria" pitchFamily="34" charset="0"/>
+                <a:ea typeface="Cambria" pitchFamily="34" charset="-122"/>
+                <a:cs typeface="Cambria" pitchFamily="34" charset="-120"/>
+              </a:rPr>
+              <a:t>Answers: Bass clef</a:t>
+            </a:r>
+            <a:endParaRPr lang="en-US" sz="4400" dirty="0"/>
+          </a:p>
+        </p:txBody>
+      </p:sp>
+      <p:sp>
+        <p:nvSpPr>
+          <p:cNvPr id="3" name="Answer Answers: Bass clef 1"/>
+          <p:cNvSpPr txBox="1"/>
+          <p:nvPr/>
+        </p:nvSpPr>
+        <p:spPr>
+          <a:xfrm>
+            <a:off x="640080" y="1737360"/>
+            <a:ext cx="3444240" cy="822960"/>
+          </a:xfrm>
+          <a:prstGeom prst="rect">
+            <a:avLst/>
+          </a:prstGeom>
+          <a:noFill/>
+          <a:ln/>
+        </p:spPr>
+        <p:txBody>
+          <a:bodyPr wrap="square" lIns="0" tIns="0" rIns="0" bIns="0" rtlCol="0" anchor="ctr"/>
+          <a:lstStyle/>
+          <a:p>
+            <a:pPr indent="0" marL="0">
+              <a:buNone/>
+            </a:pPr>
+            <a:r>
+              <a:rPr lang="en-US" sz="3000" b="1" dirty="0">
+                <a:solidFill>
+                  <a:schemeClr val="accent1"/>
+                </a:solidFill>
+              </a:rPr>
+              <a:t> 1   </a:t>
+            </a:r>
+            <a:pPr indent="0" marL="0">
+              <a:buNone/>
+            </a:pPr>
+            <a:r>
+              <a:rPr lang="en-US" sz="3000" b="1" dirty="0">
+                <a:solidFill>
+                  <a:schemeClr val="bg1"/>
+                </a:solidFill>
+              </a:rPr>
+              <a:t>ADD</a:t>
+            </a:r>
+            <a:endParaRPr lang="en-US" sz="3000" dirty="0"/>
+          </a:p>
+        </p:txBody>
+      </p:sp>
+      <p:sp>
+        <p:nvSpPr>
+          <p:cNvPr id="4" name="Answer Answers: Bass clef 2"/>
+          <p:cNvSpPr txBox="1"/>
+          <p:nvPr/>
+        </p:nvSpPr>
+        <p:spPr>
+          <a:xfrm>
+            <a:off x="640080" y="2788920"/>
+            <a:ext cx="3444240" cy="822960"/>
+          </a:xfrm>
+          <a:prstGeom prst="rect">
+            <a:avLst/>
+          </a:prstGeom>
+          <a:noFill/>
+          <a:ln/>
+        </p:spPr>
+        <p:txBody>
+          <a:bodyPr wrap="square" lIns="0" tIns="0" rIns="0" bIns="0" rtlCol="0" anchor="ctr"/>
+          <a:lstStyle/>
+          <a:p>
+            <a:pPr indent="0" marL="0">
+              <a:buNone/>
+            </a:pPr>
+            <a:r>
+              <a:rPr lang="en-US" sz="3000" b="1" dirty="0">
+                <a:solidFill>
+                  <a:schemeClr val="accent1"/>
+                </a:solidFill>
+              </a:rPr>
+              <a:t> 2   </a:t>
+            </a:r>
+            <a:pPr indent="0" marL="0">
+              <a:buNone/>
+            </a:pPr>
+            <a:r>
+              <a:rPr lang="en-US" sz="3000" b="1" dirty="0">
+                <a:solidFill>
+                  <a:schemeClr val="bg1"/>
+                </a:solidFill>
+              </a:rPr>
+              <a:t>ACE</a:t>
+            </a:r>
+            <a:endParaRPr lang="en-US" sz="3000" dirty="0"/>
+          </a:p>
+        </p:txBody>
+      </p:sp>
+      <p:sp>
+        <p:nvSpPr>
+          <p:cNvPr id="5" name="Answer Answers: Bass clef 3"/>
+          <p:cNvSpPr txBox="1"/>
+          <p:nvPr/>
+        </p:nvSpPr>
+        <p:spPr>
+          <a:xfrm>
+            <a:off x="640080" y="3840480"/>
+            <a:ext cx="3444240" cy="822960"/>
+          </a:xfrm>
+          <a:prstGeom prst="rect">
+            <a:avLst/>
+          </a:prstGeom>
+          <a:noFill/>
+          <a:ln/>
+        </p:spPr>
+        <p:txBody>
+          <a:bodyPr wrap="square" lIns="0" tIns="0" rIns="0" bIns="0" rtlCol="0" anchor="ctr"/>
+          <a:lstStyle/>
+          <a:p>
+            <a:pPr indent="0" marL="0">
+              <a:buNone/>
+            </a:pPr>
+            <a:r>
+              <a:rPr lang="en-US" sz="3000" b="1" dirty="0">
+                <a:solidFill>
+                  <a:schemeClr val="accent1"/>
+                </a:solidFill>
+              </a:rPr>
+              <a:t> 3   </a:t>
+            </a:r>
+            <a:pPr indent="0" marL="0">
+              <a:buNone/>
+            </a:pPr>
+            <a:r>
+              <a:rPr lang="en-US" sz="3000" b="1" dirty="0">
+                <a:solidFill>
+                  <a:schemeClr val="bg1"/>
+                </a:solidFill>
+              </a:rPr>
+              <a:t>BEG</a:t>
+            </a:r>
+            <a:endParaRPr lang="en-US" sz="3000" dirty="0"/>
+          </a:p>
+        </p:txBody>
+      </p:sp>
+      <p:sp>
+        <p:nvSpPr>
+          <p:cNvPr id="6" name="Answer Answers: Bass clef 4"/>
+          <p:cNvSpPr txBox="1"/>
+          <p:nvPr/>
+        </p:nvSpPr>
+        <p:spPr>
+          <a:xfrm>
+            <a:off x="640080" y="4892040"/>
+            <a:ext cx="3444240" cy="822960"/>
+          </a:xfrm>
+          <a:prstGeom prst="rect">
+            <a:avLst/>
+          </a:prstGeom>
+          <a:noFill/>
+          <a:ln/>
+        </p:spPr>
+        <p:txBody>
+          <a:bodyPr wrap="square" lIns="0" tIns="0" rIns="0" bIns="0" rtlCol="0" anchor="ctr"/>
+          <a:lstStyle/>
+          <a:p>
+            <a:pPr indent="0" marL="0">
+              <a:buNone/>
+            </a:pPr>
+            <a:r>
+              <a:rPr lang="en-US" sz="3000" b="1" dirty="0">
+                <a:solidFill>
+                  <a:schemeClr val="accent1"/>
+                </a:solidFill>
+              </a:rPr>
+              <a:t> 4   </a:t>
+            </a:r>
+            <a:pPr indent="0" marL="0">
+              <a:buNone/>
+            </a:pPr>
+            <a:r>
+              <a:rPr lang="en-US" sz="3000" b="1" dirty="0">
+                <a:solidFill>
+                  <a:schemeClr val="bg1"/>
+                </a:solidFill>
+              </a:rPr>
+              <a:t>BED</a:t>
+            </a:r>
+            <a:endParaRPr lang="en-US" sz="3000" dirty="0"/>
+          </a:p>
+        </p:txBody>
+      </p:sp>
+      <p:sp>
+        <p:nvSpPr>
+          <p:cNvPr id="7" name="Answer Answers: Bass clef 5"/>
+          <p:cNvSpPr txBox="1"/>
+          <p:nvPr/>
+        </p:nvSpPr>
+        <p:spPr>
+          <a:xfrm>
+            <a:off x="4267200" y="1737360"/>
+            <a:ext cx="3444240" cy="822960"/>
+          </a:xfrm>
+          <a:prstGeom prst="rect">
+            <a:avLst/>
+          </a:prstGeom>
+          <a:noFill/>
+          <a:ln/>
+        </p:spPr>
+        <p:txBody>
+          <a:bodyPr wrap="square" lIns="0" tIns="0" rIns="0" bIns="0" rtlCol="0" anchor="ctr"/>
+          <a:lstStyle/>
+          <a:p>
+            <a:pPr indent="0" marL="0">
+              <a:buNone/>
+            </a:pPr>
+            <a:r>
+              <a:rPr lang="en-US" sz="3000" b="1" dirty="0">
+                <a:solidFill>
+                  <a:schemeClr val="accent1"/>
+                </a:solidFill>
+              </a:rPr>
+              <a:t> 5   </a:t>
+            </a:r>
+            <a:pPr indent="0" marL="0">
+              <a:buNone/>
+            </a:pPr>
+            <a:r>
+              <a:rPr lang="en-US" sz="3000" b="1" dirty="0">
+                <a:solidFill>
+                  <a:schemeClr val="bg1"/>
+                </a:solidFill>
+              </a:rPr>
+              <a:t>CAFE</a:t>
+            </a:r>
+            <a:endParaRPr lang="en-US" sz="3000" dirty="0"/>
+          </a:p>
+        </p:txBody>
+      </p:sp>
+      <p:sp>
+        <p:nvSpPr>
+          <p:cNvPr id="8" name="Answer Answers: Bass clef 6"/>
+          <p:cNvSpPr txBox="1"/>
+          <p:nvPr/>
+        </p:nvSpPr>
+        <p:spPr>
+          <a:xfrm>
+            <a:off x="4267200" y="2788920"/>
+            <a:ext cx="3444240" cy="822960"/>
+          </a:xfrm>
+          <a:prstGeom prst="rect">
+            <a:avLst/>
+          </a:prstGeom>
+          <a:noFill/>
+          <a:ln/>
+        </p:spPr>
+        <p:txBody>
+          <a:bodyPr wrap="square" lIns="0" tIns="0" rIns="0" bIns="0" rtlCol="0" anchor="ctr"/>
+          <a:lstStyle/>
+          <a:p>
+            <a:pPr indent="0" marL="0">
+              <a:buNone/>
+            </a:pPr>
+            <a:r>
+              <a:rPr lang="en-US" sz="3000" b="1" dirty="0">
+                <a:solidFill>
+                  <a:schemeClr val="accent1"/>
+                </a:solidFill>
+              </a:rPr>
+              <a:t> 6   </a:t>
+            </a:r>
+            <a:pPr indent="0" marL="0">
+              <a:buNone/>
+            </a:pPr>
+            <a:r>
+              <a:rPr lang="en-US" sz="3000" b="1" dirty="0">
+                <a:solidFill>
+                  <a:schemeClr val="bg1"/>
+                </a:solidFill>
+              </a:rPr>
+              <a:t>FACE</a:t>
+            </a:r>
+            <a:endParaRPr lang="en-US" sz="3000" dirty="0"/>
+          </a:p>
+        </p:txBody>
+      </p:sp>
+      <p:sp>
+        <p:nvSpPr>
+          <p:cNvPr id="9" name="Answer Answers: Bass clef 7"/>
+          <p:cNvSpPr txBox="1"/>
+          <p:nvPr/>
+        </p:nvSpPr>
+        <p:spPr>
+          <a:xfrm>
+            <a:off x="4267200" y="3840480"/>
+            <a:ext cx="3444240" cy="822960"/>
+          </a:xfrm>
+          <a:prstGeom prst="rect">
+            <a:avLst/>
+          </a:prstGeom>
+          <a:noFill/>
+          <a:ln/>
+        </p:spPr>
+        <p:txBody>
+          <a:bodyPr wrap="square" lIns="0" tIns="0" rIns="0" bIns="0" rtlCol="0" anchor="ctr"/>
+          <a:lstStyle/>
+          <a:p>
+            <a:pPr indent="0" marL="0">
+              <a:buNone/>
+            </a:pPr>
+            <a:r>
+              <a:rPr lang="en-US" sz="3000" b="1" dirty="0">
+                <a:solidFill>
+                  <a:schemeClr val="accent1"/>
+                </a:solidFill>
+              </a:rPr>
+              <a:t> 7   </a:t>
+            </a:r>
+            <a:pPr indent="0" marL="0">
+              <a:buNone/>
+            </a:pPr>
+            <a:r>
+              <a:rPr lang="en-US" sz="3000" b="1" dirty="0">
+                <a:solidFill>
+                  <a:schemeClr val="bg1"/>
+                </a:solidFill>
+              </a:rPr>
+              <a:t>FEED</a:t>
+            </a:r>
+            <a:endParaRPr lang="en-US" sz="3000" dirty="0"/>
+          </a:p>
+        </p:txBody>
+      </p:sp>
+      <p:sp>
+        <p:nvSpPr>
+          <p:cNvPr id="10" name="Answer Answers: Bass clef 8"/>
+          <p:cNvSpPr txBox="1"/>
+          <p:nvPr/>
+        </p:nvSpPr>
+        <p:spPr>
+          <a:xfrm>
+            <a:off x="4267200" y="4892040"/>
+            <a:ext cx="3444240" cy="822960"/>
+          </a:xfrm>
+          <a:prstGeom prst="rect">
+            <a:avLst/>
+          </a:prstGeom>
+          <a:noFill/>
+          <a:ln/>
+        </p:spPr>
+        <p:txBody>
+          <a:bodyPr wrap="square" lIns="0" tIns="0" rIns="0" bIns="0" rtlCol="0" anchor="ctr"/>
+          <a:lstStyle/>
+          <a:p>
+            <a:pPr indent="0" marL="0">
+              <a:buNone/>
+            </a:pPr>
+            <a:r>
+              <a:rPr lang="en-US" sz="3000" b="1" dirty="0">
+                <a:solidFill>
+                  <a:schemeClr val="accent1"/>
+                </a:solidFill>
+              </a:rPr>
+              <a:t> 8   </a:t>
+            </a:r>
+            <a:pPr indent="0" marL="0">
+              <a:buNone/>
+            </a:pPr>
+            <a:r>
+              <a:rPr lang="en-US" sz="3000" b="1" dirty="0">
+                <a:solidFill>
+                  <a:schemeClr val="bg1"/>
+                </a:solidFill>
+              </a:rPr>
+              <a:t>BEAD</a:t>
+            </a:r>
+            <a:endParaRPr lang="en-US" sz="3000" dirty="0"/>
+          </a:p>
+        </p:txBody>
+      </p:sp>
+      <p:sp>
+        <p:nvSpPr>
+          <p:cNvPr id="11" name="Answer Answers: Bass clef 9"/>
+          <p:cNvSpPr txBox="1"/>
+          <p:nvPr/>
+        </p:nvSpPr>
+        <p:spPr>
+          <a:xfrm>
+            <a:off x="7894320" y="1737360"/>
+            <a:ext cx="3444240" cy="822960"/>
+          </a:xfrm>
+          <a:prstGeom prst="rect">
+            <a:avLst/>
+          </a:prstGeom>
+          <a:noFill/>
+          <a:ln/>
+        </p:spPr>
+        <p:txBody>
+          <a:bodyPr wrap="square" lIns="0" tIns="0" rIns="0" bIns="0" rtlCol="0" anchor="ctr"/>
+          <a:lstStyle/>
+          <a:p>
+            <a:pPr indent="0" marL="0">
+              <a:buNone/>
+            </a:pPr>
+            <a:r>
+              <a:rPr lang="en-US" sz="3000" b="1" dirty="0">
+                <a:solidFill>
+                  <a:schemeClr val="accent1"/>
+                </a:solidFill>
+              </a:rPr>
+              <a:t> 9   </a:t>
+            </a:r>
+            <a:pPr indent="0" marL="0">
+              <a:buNone/>
+            </a:pPr>
+            <a:r>
+              <a:rPr lang="en-US" sz="3000" b="1" dirty="0">
+                <a:solidFill>
+                  <a:schemeClr val="bg1"/>
+                </a:solidFill>
+              </a:rPr>
+              <a:t>BADGE</a:t>
+            </a:r>
+            <a:endParaRPr lang="en-US" sz="3000" dirty="0"/>
+          </a:p>
+        </p:txBody>
+      </p:sp>
+      <p:sp>
+        <p:nvSpPr>
+          <p:cNvPr id="12" name="Answer Answers: Bass clef 10"/>
+          <p:cNvSpPr txBox="1"/>
+          <p:nvPr/>
+        </p:nvSpPr>
+        <p:spPr>
+          <a:xfrm>
+            <a:off x="7894320" y="2788920"/>
+            <a:ext cx="3444240" cy="822960"/>
+          </a:xfrm>
+          <a:prstGeom prst="rect">
+            <a:avLst/>
+          </a:prstGeom>
+          <a:noFill/>
+          <a:ln/>
+        </p:spPr>
+        <p:txBody>
+          <a:bodyPr wrap="square" lIns="0" tIns="0" rIns="0" bIns="0" rtlCol="0" anchor="ctr"/>
+          <a:lstStyle/>
+          <a:p>
+            <a:pPr indent="0" marL="0">
+              <a:buNone/>
+            </a:pPr>
+            <a:r>
+              <a:rPr lang="en-US" sz="3000" b="1" dirty="0">
+                <a:solidFill>
+                  <a:schemeClr val="accent1"/>
+                </a:solidFill>
+              </a:rPr>
+              <a:t>10   </a:t>
+            </a:r>
+            <a:pPr indent="0" marL="0">
+              <a:buNone/>
+            </a:pPr>
+            <a:r>
+              <a:rPr lang="en-US" sz="3000" b="1" dirty="0">
+                <a:solidFill>
+                  <a:schemeClr val="bg1"/>
+                </a:solidFill>
+              </a:rPr>
+              <a:t>FADED</a:t>
+            </a:r>
+            <a:endParaRPr lang="en-US" sz="3000" dirty="0"/>
+          </a:p>
+        </p:txBody>
+      </p:sp>
+      <p:sp>
+        <p:nvSpPr>
+          <p:cNvPr id="13" name="Answer Answers: Bass clef 11"/>
+          <p:cNvSpPr txBox="1"/>
+          <p:nvPr/>
+        </p:nvSpPr>
+        <p:spPr>
+          <a:xfrm>
+            <a:off x="7894320" y="3840480"/>
+            <a:ext cx="3444240" cy="822960"/>
+          </a:xfrm>
+          <a:prstGeom prst="rect">
+            <a:avLst/>
+          </a:prstGeom>
+          <a:noFill/>
+          <a:ln/>
+        </p:spPr>
+        <p:txBody>
+          <a:bodyPr wrap="square" lIns="0" tIns="0" rIns="0" bIns="0" rtlCol="0" anchor="ctr"/>
+          <a:lstStyle/>
+          <a:p>
+            <a:pPr indent="0" marL="0">
+              <a:buNone/>
+            </a:pPr>
+            <a:r>
+              <a:rPr lang="en-US" sz="3000" b="1" dirty="0">
+                <a:solidFill>
+                  <a:schemeClr val="accent1"/>
+                </a:solidFill>
+              </a:rPr>
+              <a:t>11   </a:t>
+            </a:r>
+            <a:pPr indent="0" marL="0">
+              <a:buNone/>
+            </a:pPr>
+            <a:r>
+              <a:rPr lang="en-US" sz="3000" b="1" dirty="0">
+                <a:solidFill>
+                  <a:schemeClr val="bg1"/>
+                </a:solidFill>
+              </a:rPr>
+              <a:t>DEFACE</a:t>
+            </a:r>
+            <a:endParaRPr lang="en-US" sz="3000" dirty="0"/>
+          </a:p>
+        </p:txBody>
+      </p:sp>
+      <p:sp>
+        <p:nvSpPr>
+          <p:cNvPr id="14" name="Answer Answers: Bass clef 12"/>
+          <p:cNvSpPr txBox="1"/>
+          <p:nvPr/>
+        </p:nvSpPr>
+        <p:spPr>
+          <a:xfrm>
+            <a:off x="7894320" y="4892040"/>
+            <a:ext cx="3444240" cy="822960"/>
+          </a:xfrm>
+          <a:prstGeom prst="rect">
+            <a:avLst/>
+          </a:prstGeom>
+          <a:noFill/>
+          <a:ln/>
+        </p:spPr>
+        <p:txBody>
+          <a:bodyPr wrap="square" lIns="0" tIns="0" rIns="0" bIns="0" rtlCol="0" anchor="ctr"/>
+          <a:lstStyle/>
+          <a:p>
+            <a:pPr indent="0" marL="0">
+              <a:buNone/>
+            </a:pPr>
+            <a:r>
+              <a:rPr lang="en-US" sz="3000" b="1" dirty="0">
+                <a:solidFill>
+                  <a:schemeClr val="accent1"/>
+                </a:solidFill>
+              </a:rPr>
+              <a:t>12   </a:t>
+            </a:r>
+            <a:pPr indent="0" marL="0">
+              <a:buNone/>
+            </a:pPr>
+            <a:r>
+              <a:rPr lang="en-US" sz="3000" b="1" dirty="0">
+                <a:solidFill>
+                  <a:schemeClr val="bg1"/>
+                </a:solidFill>
+              </a:rPr>
+              <a:t>DECADE</a:t>
+            </a:r>
+            <a:endParaRPr lang="en-US" sz="3000" dirty="0"/>
+          </a:p>
+        </p:txBody>
+      </p:sp>
+    </p:spTree>
+  </p:cSld>
+  <p:clrMapOvr>
+    <a:masterClrMapping/>
+  </p:clrMapOvr>
+</p:sld>
+</file>
+
+<file path=ppt/slides/slide23.xml><?xml version="1.0" encoding="utf-8"?>
+<p:sld xmlns:a="http://schemas.openxmlformats.org/drawingml/2006/main" xmlns:r="http://schemas.openxmlformats.org/officeDocument/2006/relationships" xmlns:p="http://schemas.openxmlformats.org/presentationml/2006/main">
+  <p:cSld name="Slide 23">
+    <p:spTree>
+      <p:nvGrpSpPr>
+        <p:cNvPr id="1" name=""/>
+        <p:cNvGrpSpPr/>
+        <p:nvPr/>
+      </p:nvGrpSpPr>
+      <p:grpSpPr>
+        <a:xfrm>
+          <a:off x="0" y="0"/>
+          <a:ext cx="0" cy="0"/>
+          <a:chOff x="0" y="0"/>
+          <a:chExt cx="0" cy="0"/>
+        </a:xfrm>
+      </p:grpSpPr>
+      <p:sp>
+        <p:nvSpPr>
+          <p:cNvPr id="2" name="Text 0"/>
+          <p:cNvSpPr/>
+          <p:nvPr>
+            <p:ph idx="100" type="title" hasCustomPrompt="1"/>
+          </p:nvPr>
+        </p:nvSpPr>
+        <p:spPr>
+          <a:xfrm>
+            <a:off x="640080" y="457200"/>
+            <a:ext cx="10881360" cy="914400"/>
+          </a:xfrm>
+          <a:prstGeom prst="rect">
+            <a:avLst/>
+          </a:prstGeom>
+          <a:noFill/>
+          <a:ln/>
+        </p:spPr>
+        <p:txBody>
+          <a:bodyPr wrap="square" lIns="0" tIns="0" rIns="0" bIns="0" rtlCol="0" anchor="ctr"/>
+          <a:lstStyle/>
+          <a:p>
+            <a:pPr algn="l" indent="0" marL="0">
+              <a:buNone/>
+            </a:pPr>
+            <a:r>
+              <a:rPr lang="en-US" sz="4400" b="1" dirty="0">
+                <a:solidFill>
+                  <a:schemeClr val="bg1"/>
+                </a:solidFill>
+                <a:latin typeface="Cambria" pitchFamily="34" charset="0"/>
+                <a:ea typeface="Cambria" pitchFamily="34" charset="-122"/>
+                <a:cs typeface="Cambria" pitchFamily="34" charset="-120"/>
+              </a:rPr>
+              <a:t>Answers: Mixed clefs</a:t>
+            </a:r>
+            <a:endParaRPr lang="en-US" sz="4400" dirty="0"/>
+          </a:p>
+        </p:txBody>
+      </p:sp>
+      <p:sp>
+        <p:nvSpPr>
+          <p:cNvPr id="3" name="Answer Answers: Mixed clefs 1"/>
+          <p:cNvSpPr txBox="1"/>
+          <p:nvPr/>
+        </p:nvSpPr>
+        <p:spPr>
+          <a:xfrm>
+            <a:off x="640080" y="1737360"/>
+            <a:ext cx="5257800" cy="822960"/>
+          </a:xfrm>
+          <a:prstGeom prst="rect">
+            <a:avLst/>
+          </a:prstGeom>
+          <a:noFill/>
+          <a:ln/>
+        </p:spPr>
+        <p:txBody>
+          <a:bodyPr wrap="square" lIns="0" tIns="0" rIns="0" bIns="0" rtlCol="0" anchor="ctr"/>
+          <a:lstStyle/>
+          <a:p>
+            <a:pPr indent="0" marL="0">
+              <a:buNone/>
+            </a:pPr>
+            <a:r>
+              <a:rPr lang="en-US" sz="3000" b="1" dirty="0">
+                <a:solidFill>
+                  <a:schemeClr val="accent1"/>
+                </a:solidFill>
+              </a:rPr>
+              <a:t> 1   </a:t>
+            </a:r>
+            <a:pPr indent="0" marL="0">
+              <a:buNone/>
+            </a:pPr>
+            <a:r>
+              <a:rPr lang="en-US" sz="3000" b="1" dirty="0">
+                <a:solidFill>
+                  <a:schemeClr val="bg1"/>
+                </a:solidFill>
+              </a:rPr>
+              <a:t>BAD EGG</a:t>
+            </a:r>
+            <a:endParaRPr lang="en-US" sz="3000" dirty="0"/>
+          </a:p>
+        </p:txBody>
+      </p:sp>
+      <p:sp>
+        <p:nvSpPr>
+          <p:cNvPr id="4" name="Answer Answers: Mixed clefs 2"/>
+          <p:cNvSpPr txBox="1"/>
+          <p:nvPr/>
+        </p:nvSpPr>
+        <p:spPr>
+          <a:xfrm>
+            <a:off x="640080" y="2788920"/>
+            <a:ext cx="5257800" cy="822960"/>
+          </a:xfrm>
+          <a:prstGeom prst="rect">
+            <a:avLst/>
+          </a:prstGeom>
+          <a:noFill/>
+          <a:ln/>
+        </p:spPr>
+        <p:txBody>
+          <a:bodyPr wrap="square" lIns="0" tIns="0" rIns="0" bIns="0" rtlCol="0" anchor="ctr"/>
+          <a:lstStyle/>
+          <a:p>
+            <a:pPr indent="0" marL="0">
+              <a:buNone/>
+            </a:pPr>
+            <a:r>
+              <a:rPr lang="en-US" sz="3000" b="1" dirty="0">
+                <a:solidFill>
+                  <a:schemeClr val="accent1"/>
+                </a:solidFill>
+              </a:rPr>
+              <a:t> 2   </a:t>
+            </a:r>
+            <a:pPr indent="0" marL="0">
+              <a:buNone/>
+            </a:pPr>
+            <a:r>
+              <a:rPr lang="en-US" sz="3000" b="1" dirty="0">
+                <a:solidFill>
+                  <a:schemeClr val="bg1"/>
+                </a:solidFill>
+              </a:rPr>
+              <a:t>CAGE FEED</a:t>
+            </a:r>
+            <a:endParaRPr lang="en-US" sz="3000" dirty="0"/>
+          </a:p>
+        </p:txBody>
+      </p:sp>
+      <p:sp>
+        <p:nvSpPr>
+          <p:cNvPr id="5" name="Answer Answers: Mixed clefs 3"/>
+          <p:cNvSpPr txBox="1"/>
+          <p:nvPr/>
+        </p:nvSpPr>
+        <p:spPr>
+          <a:xfrm>
+            <a:off x="640080" y="3840480"/>
+            <a:ext cx="5257800" cy="822960"/>
+          </a:xfrm>
+          <a:prstGeom prst="rect">
+            <a:avLst/>
+          </a:prstGeom>
+          <a:noFill/>
+          <a:ln/>
+        </p:spPr>
+        <p:txBody>
+          <a:bodyPr wrap="square" lIns="0" tIns="0" rIns="0" bIns="0" rtlCol="0" anchor="ctr"/>
+          <a:lstStyle/>
+          <a:p>
+            <a:pPr indent="0" marL="0">
+              <a:buNone/>
+            </a:pPr>
+            <a:r>
+              <a:rPr lang="en-US" sz="3000" b="1" dirty="0">
+                <a:solidFill>
+                  <a:schemeClr val="accent1"/>
+                </a:solidFill>
+              </a:rPr>
+              <a:t> 3   </a:t>
+            </a:r>
+            <a:pPr indent="0" marL="0">
+              <a:buNone/>
+            </a:pPr>
+            <a:r>
+              <a:rPr lang="en-US" sz="3000" b="1" dirty="0">
+                <a:solidFill>
+                  <a:schemeClr val="bg1"/>
+                </a:solidFill>
+              </a:rPr>
+              <a:t>A BADGE</a:t>
+            </a:r>
+            <a:endParaRPr lang="en-US" sz="3000" dirty="0"/>
+          </a:p>
+        </p:txBody>
+      </p:sp>
+      <p:sp>
+        <p:nvSpPr>
+          <p:cNvPr id="6" name="Answer Answers: Mixed clefs 4"/>
+          <p:cNvSpPr txBox="1"/>
+          <p:nvPr/>
+        </p:nvSpPr>
+        <p:spPr>
+          <a:xfrm>
+            <a:off x="640080" y="4892040"/>
+            <a:ext cx="5257800" cy="822960"/>
+          </a:xfrm>
+          <a:prstGeom prst="rect">
+            <a:avLst/>
+          </a:prstGeom>
+          <a:noFill/>
+          <a:ln/>
+        </p:spPr>
+        <p:txBody>
+          <a:bodyPr wrap="square" lIns="0" tIns="0" rIns="0" bIns="0" rtlCol="0" anchor="ctr"/>
+          <a:lstStyle/>
+          <a:p>
+            <a:pPr indent="0" marL="0">
+              <a:buNone/>
+            </a:pPr>
+            <a:r>
+              <a:rPr lang="en-US" sz="3000" b="1" dirty="0">
+                <a:solidFill>
+                  <a:schemeClr val="accent1"/>
+                </a:solidFill>
+              </a:rPr>
+              <a:t> 4   </a:t>
+            </a:r>
+            <a:pPr indent="0" marL="0">
+              <a:buNone/>
+            </a:pPr>
+            <a:r>
+              <a:rPr lang="en-US" sz="3000" b="1" dirty="0">
+                <a:solidFill>
+                  <a:schemeClr val="bg1"/>
+                </a:solidFill>
+              </a:rPr>
+              <a:t>FACE CAFE</a:t>
+            </a:r>
+            <a:endParaRPr lang="en-US" sz="3000" dirty="0"/>
+          </a:p>
+        </p:txBody>
+      </p:sp>
+      <p:sp>
+        <p:nvSpPr>
+          <p:cNvPr id="7" name="Answer Answers: Mixed clefs 5"/>
+          <p:cNvSpPr txBox="1"/>
+          <p:nvPr/>
+        </p:nvSpPr>
+        <p:spPr>
+          <a:xfrm>
+            <a:off x="6080760" y="1737360"/>
+            <a:ext cx="5257800" cy="822960"/>
+          </a:xfrm>
+          <a:prstGeom prst="rect">
+            <a:avLst/>
+          </a:prstGeom>
+          <a:noFill/>
+          <a:ln/>
+        </p:spPr>
+        <p:txBody>
+          <a:bodyPr wrap="square" lIns="0" tIns="0" rIns="0" bIns="0" rtlCol="0" anchor="ctr"/>
+          <a:lstStyle/>
+          <a:p>
+            <a:pPr indent="0" marL="0">
+              <a:buNone/>
+            </a:pPr>
+            <a:r>
+              <a:rPr lang="en-US" sz="3000" b="1" dirty="0">
+                <a:solidFill>
+                  <a:schemeClr val="accent1"/>
+                </a:solidFill>
+              </a:rPr>
+              <a:t> 5   </a:t>
+            </a:r>
+            <a:pPr indent="0" marL="0">
+              <a:buNone/>
+            </a:pPr>
+            <a:r>
+              <a:rPr lang="en-US" sz="3000" b="1" dirty="0">
+                <a:solidFill>
+                  <a:schemeClr val="bg1"/>
+                </a:solidFill>
+              </a:rPr>
+              <a:t>BEG DAD</a:t>
+            </a:r>
+            <a:endParaRPr lang="en-US" sz="3000" dirty="0"/>
+          </a:p>
+        </p:txBody>
+      </p:sp>
+      <p:sp>
+        <p:nvSpPr>
+          <p:cNvPr id="8" name="Answer Answers: Mixed clefs 6"/>
+          <p:cNvSpPr txBox="1"/>
+          <p:nvPr/>
+        </p:nvSpPr>
+        <p:spPr>
+          <a:xfrm>
+            <a:off x="6080760" y="2788920"/>
+            <a:ext cx="5257800" cy="822960"/>
+          </a:xfrm>
+          <a:prstGeom prst="rect">
+            <a:avLst/>
+          </a:prstGeom>
+          <a:noFill/>
+          <a:ln/>
+        </p:spPr>
+        <p:txBody>
+          <a:bodyPr wrap="square" lIns="0" tIns="0" rIns="0" bIns="0" rtlCol="0" anchor="ctr"/>
+          <a:lstStyle/>
+          <a:p>
+            <a:pPr indent="0" marL="0">
+              <a:buNone/>
+            </a:pPr>
+            <a:r>
+              <a:rPr lang="en-US" sz="3000" b="1" dirty="0">
+                <a:solidFill>
+                  <a:schemeClr val="accent1"/>
+                </a:solidFill>
+              </a:rPr>
+              <a:t> 6   </a:t>
+            </a:r>
+            <a:pPr indent="0" marL="0">
+              <a:buNone/>
+            </a:pPr>
+            <a:r>
+              <a:rPr lang="en-US" sz="3000" b="1" dirty="0">
+                <a:solidFill>
+                  <a:schemeClr val="bg1"/>
+                </a:solidFill>
+              </a:rPr>
+              <a:t>ADD EGG</a:t>
+            </a:r>
+            <a:endParaRPr lang="en-US" sz="3000" dirty="0"/>
+          </a:p>
+        </p:txBody>
+      </p:sp>
+      <p:sp>
+        <p:nvSpPr>
+          <p:cNvPr id="9" name="Answer Answers: Mixed clefs 7"/>
+          <p:cNvSpPr txBox="1"/>
+          <p:nvPr/>
+        </p:nvSpPr>
+        <p:spPr>
+          <a:xfrm>
+            <a:off x="6080760" y="3840480"/>
+            <a:ext cx="5257800" cy="822960"/>
+          </a:xfrm>
+          <a:prstGeom prst="rect">
+            <a:avLst/>
+          </a:prstGeom>
+          <a:noFill/>
+          <a:ln/>
+        </p:spPr>
+        <p:txBody>
+          <a:bodyPr wrap="square" lIns="0" tIns="0" rIns="0" bIns="0" rtlCol="0" anchor="ctr"/>
+          <a:lstStyle/>
+          <a:p>
+            <a:pPr indent="0" marL="0">
+              <a:buNone/>
+            </a:pPr>
+            <a:r>
+              <a:rPr lang="en-US" sz="3000" b="1" dirty="0">
+                <a:solidFill>
+                  <a:schemeClr val="accent1"/>
+                </a:solidFill>
+              </a:rPr>
+              <a:t> 7   </a:t>
+            </a:r>
+            <a:pPr indent="0" marL="0">
+              <a:buNone/>
+            </a:pPr>
+            <a:r>
+              <a:rPr lang="en-US" sz="3000" b="1" dirty="0">
+                <a:solidFill>
+                  <a:schemeClr val="bg1"/>
+                </a:solidFill>
+              </a:rPr>
+              <a:t>BEAD BAG</a:t>
+            </a:r>
+            <a:endParaRPr lang="en-US" sz="3000" dirty="0"/>
+          </a:p>
+        </p:txBody>
+      </p:sp>
+      <p:sp>
+        <p:nvSpPr>
+          <p:cNvPr id="10" name="Answer Answers: Mixed clefs 8"/>
+          <p:cNvSpPr txBox="1"/>
+          <p:nvPr/>
+        </p:nvSpPr>
+        <p:spPr>
+          <a:xfrm>
+            <a:off x="6080760" y="4892040"/>
+            <a:ext cx="5257800" cy="822960"/>
+          </a:xfrm>
+          <a:prstGeom prst="rect">
+            <a:avLst/>
+          </a:prstGeom>
+          <a:noFill/>
+          <a:ln/>
+        </p:spPr>
+        <p:txBody>
+          <a:bodyPr wrap="square" lIns="0" tIns="0" rIns="0" bIns="0" rtlCol="0" anchor="ctr"/>
+          <a:lstStyle/>
+          <a:p>
+            <a:pPr indent="0" marL="0">
+              <a:buNone/>
+            </a:pPr>
+            <a:r>
+              <a:rPr lang="en-US" sz="3000" b="1" dirty="0">
+                <a:solidFill>
+                  <a:schemeClr val="accent1"/>
+                </a:solidFill>
+              </a:rPr>
+              <a:t> 8   </a:t>
+            </a:r>
+            <a:pPr indent="0" marL="0">
+              <a:buNone/>
+            </a:pPr>
+            <a:r>
+              <a:rPr lang="en-US" sz="3000" b="1" dirty="0">
+                <a:solidFill>
+                  <a:schemeClr val="bg1"/>
+                </a:solidFill>
+              </a:rPr>
+              <a:t>A DECADE</a:t>
+            </a:r>
+            <a:endParaRPr lang="en-US" sz="3000" dirty="0"/>
           </a:p>
         </p:txBody>
       </p:sp>
@@ -3188,15 +9149,76 @@
                 <a:ea typeface="Cambria" pitchFamily="34" charset="-122"/>
                 <a:cs typeface="Cambria" pitchFamily="34" charset="-120"/>
               </a:rPr>
-              <a:t>Round 1: Treble clef</a:t>
+              <a:t>Treble clef: 1 and 2</a:t>
             </a:r>
             <a:endParaRPr lang="en-US" sz="4000" dirty="0"/>
+          </a:p>
+        </p:txBody>
+      </p:sp>
+      <p:sp>
+        <p:nvSpPr>
+          <p:cNvPr id="3" name="Treble clef 1 badge"/>
+          <p:cNvSpPr/>
+          <p:nvPr/>
+        </p:nvSpPr>
+        <p:spPr>
+          <a:xfrm>
+            <a:off x="640080" y="1417320"/>
+            <a:ext cx="548640" cy="548640"/>
+          </a:xfrm>
+          <a:prstGeom prst="ellipse">
+            <a:avLst/>
+          </a:prstGeom>
+          <a:solidFill>
+            <a:schemeClr val="accent1"/>
+          </a:solidFill>
+          <a:ln w="12700">
+            <a:solidFill>
+              <a:schemeClr val="accent1"/>
+            </a:solidFill>
+            <a:prstDash val="solid"/>
+          </a:ln>
+        </p:spPr>
+      </p:sp>
+      <p:sp>
+        <p:nvSpPr>
+          <p:cNvPr id="4" name="Treble clef 1 number"/>
+          <p:cNvSpPr txBox="1"/>
+          <p:nvPr/>
+        </p:nvSpPr>
+        <p:spPr>
+          <a:xfrm>
+            <a:off x="640080" y="1417320"/>
+            <a:ext cx="548640" cy="548640"/>
+          </a:xfrm>
+          <a:prstGeom prst="rect">
+            <a:avLst/>
+          </a:prstGeom>
+          <a:noFill/>
+          <a:ln/>
+        </p:spPr>
+        <p:txBody>
+          <a:bodyPr wrap="square" lIns="0" tIns="0" rIns="0" bIns="0" rtlCol="0" anchor="ctr"/>
+          <a:lstStyle/>
+          <a:p>
+            <a:pPr algn="ctr" indent="0" marL="0">
+              <a:buNone/>
+            </a:pPr>
+            <a:r>
+              <a:rPr lang="en-US" sz="2200" b="1" dirty="0">
+                <a:solidFill>
+                  <a:schemeClr val="tx1"/>
+                </a:solidFill>
+              </a:rPr>
+              <a:t>1</a:t>
+            </a:r>
+            <a:endParaRPr lang="en-US" sz="2200" dirty="0"/>
           </a:p>
         </p:txBody>
       </p:sp>
       <p:pic>
         <p:nvPicPr>
-          <p:cNvPr id="3" name="r1_face" descr="Treble stave with four notes and four empty answer boxes">    </p:cNvPr>
+          <p:cNvPr id="5" name="t01" descr="Treble clef code 1: stave with 3 notes and 3 empty answer boxes">    </p:cNvPr>
           <p:cNvPicPr>
             <a:picLocks noChangeAspect="1"/>
           </p:cNvPicPr>
@@ -3210,8 +9232,8 @@
         </p:blipFill>
         <p:spPr>
           <a:xfrm>
-            <a:off x="640080" y="1691640"/>
-            <a:ext cx="6949440" cy="4308653"/>
+            <a:off x="640080" y="2148840"/>
+            <a:ext cx="5303520" cy="4042847"/>
           </a:xfrm>
           <a:prstGeom prst="rect">
             <a:avLst/>
@@ -3220,26 +9242,24 @@
       </p:pic>
       <p:sp>
         <p:nvSpPr>
-          <p:cNvPr id="4" name="Hint card"/>
+          <p:cNvPr id="6" name="Treble clef 2 badge"/>
           <p:cNvSpPr/>
           <p:nvPr/>
         </p:nvSpPr>
         <p:spPr>
           <a:xfrm>
-            <a:off x="8229600" y="1920240"/>
-            <a:ext cx="3337560" cy="3291840"/>
-          </a:xfrm>
-          <a:prstGeom prst="roundRect">
-            <a:avLst>
-              <a:gd name="adj" fmla="val 4167"/>
-            </a:avLst>
+            <a:off x="6309360" y="1417320"/>
+            <a:ext cx="548640" cy="548640"/>
+          </a:xfrm>
+          <a:prstGeom prst="ellipse">
+            <a:avLst/>
           </a:prstGeom>
           <a:solidFill>
-            <a:schemeClr val="bg2"/>
+            <a:schemeClr val="accent1"/>
           </a:solidFill>
           <a:ln w="12700">
             <a:solidFill>
-              <a:schemeClr val="bg2"/>
+              <a:schemeClr val="accent1"/>
             </a:solidFill>
             <a:prstDash val="solid"/>
           </a:ln>
@@ -3247,14 +9267,74 @@
       </p:sp>
       <p:sp>
         <p:nvSpPr>
-          <p:cNvPr id="5" name="Clue heading"/>
+          <p:cNvPr id="7" name="Treble clef 2 number"/>
           <p:cNvSpPr txBox="1"/>
           <p:nvPr/>
         </p:nvSpPr>
         <p:spPr>
           <a:xfrm>
-            <a:off x="8503920" y="2148840"/>
-            <a:ext cx="2834640" cy="457200"/>
+            <a:off x="6309360" y="1417320"/>
+            <a:ext cx="548640" cy="548640"/>
+          </a:xfrm>
+          <a:prstGeom prst="rect">
+            <a:avLst/>
+          </a:prstGeom>
+          <a:noFill/>
+          <a:ln/>
+        </p:spPr>
+        <p:txBody>
+          <a:bodyPr wrap="square" lIns="0" tIns="0" rIns="0" bIns="0" rtlCol="0" anchor="ctr"/>
+          <a:lstStyle/>
+          <a:p>
+            <a:pPr algn="ctr" indent="0" marL="0">
+              <a:buNone/>
+            </a:pPr>
+            <a:r>
+              <a:rPr lang="en-US" sz="2200" b="1" dirty="0">
+                <a:solidFill>
+                  <a:schemeClr val="tx1"/>
+                </a:solidFill>
+              </a:rPr>
+              <a:t>2</a:t>
+            </a:r>
+            <a:endParaRPr lang="en-US" sz="2200" dirty="0"/>
+          </a:p>
+        </p:txBody>
+      </p:sp>
+      <p:pic>
+        <p:nvPicPr>
+          <p:cNvPr id="8" name="t02" descr="Treble clef code 2: stave with 3 notes and 3 empty answer boxes">    </p:cNvPr>
+          <p:cNvPicPr>
+            <a:picLocks noChangeAspect="1"/>
+          </p:cNvPicPr>
+          <p:nvPr/>
+        </p:nvPicPr>
+        <p:blipFill>
+          <a:blip r:embed="rId2"/>
+          <a:stretch>
+            <a:fillRect/>
+          </a:stretch>
+        </p:blipFill>
+        <p:spPr>
+          <a:xfrm>
+            <a:off x="6309360" y="2148840"/>
+            <a:ext cx="5303520" cy="4042847"/>
+          </a:xfrm>
+          <a:prstGeom prst="rect">
+            <a:avLst/>
+          </a:prstGeom>
+        </p:spPr>
+      </p:pic>
+      <p:sp>
+        <p:nvSpPr>
+          <p:cNvPr id="9" name="Key reminder"/>
+          <p:cNvSpPr txBox="1"/>
+          <p:nvPr/>
+        </p:nvSpPr>
+        <p:spPr>
+          <a:xfrm>
+            <a:off x="640080" y="6172200"/>
+            <a:ext cx="10881360" cy="365760"/>
           </a:xfrm>
           <a:prstGeom prst="rect">
             <a:avLst/>
@@ -3270,84 +9350,12 @@
               <a:buNone/>
             </a:pPr>
             <a:r>
-              <a:rPr lang="en-US" sz="2200" b="1" dirty="0">
+              <a:rPr lang="en-US" sz="1600" i="1" dirty="0">
                 <a:solidFill>
                   <a:schemeClr val="tx1"/>
                 </a:solidFill>
               </a:rPr>
-              <a:t>Your clue</a:t>
-            </a:r>
-            <a:endParaRPr lang="en-US" sz="2200" dirty="0"/>
-          </a:p>
-        </p:txBody>
-      </p:sp>
-      <p:sp>
-        <p:nvSpPr>
-          <p:cNvPr id="6" name="Clue text"/>
-          <p:cNvSpPr txBox="1"/>
-          <p:nvPr/>
-        </p:nvSpPr>
-        <p:spPr>
-          <a:xfrm>
-            <a:off x="8503920" y="2697480"/>
-            <a:ext cx="2834640" cy="1280160"/>
-          </a:xfrm>
-          <a:prstGeom prst="rect">
-            <a:avLst/>
-          </a:prstGeom>
-          <a:noFill/>
-          <a:ln/>
-        </p:spPr>
-        <p:txBody>
-          <a:bodyPr wrap="square" lIns="0" tIns="0" rIns="0" bIns="0" rtlCol="0" anchor="t"/>
-          <a:lstStyle/>
-          <a:p>
-            <a:pPr indent="0" marL="0">
-              <a:buNone/>
-            </a:pPr>
-            <a:r>
-              <a:rPr lang="en-US" sz="2000" dirty="0">
-                <a:solidFill>
-                  <a:schemeClr val="tx1"/>
-                </a:solidFill>
-              </a:rPr>
-              <a:t>Something you can see in the mirror.</a:t>
-            </a:r>
-            <a:endParaRPr lang="en-US" sz="2000" dirty="0"/>
-          </a:p>
-        </p:txBody>
-      </p:sp>
-      <p:sp>
-        <p:nvSpPr>
-          <p:cNvPr id="7" name="Key reminder"/>
-          <p:cNvSpPr txBox="1"/>
-          <p:nvPr/>
-        </p:nvSpPr>
-        <p:spPr>
-          <a:xfrm>
-            <a:off x="8503920" y="4206240"/>
-            <a:ext cx="2834640" cy="731520"/>
-          </a:xfrm>
-          <a:prstGeom prst="rect">
-            <a:avLst/>
-          </a:prstGeom>
-          <a:noFill/>
-          <a:ln/>
-        </p:spPr>
-        <p:txBody>
-          <a:bodyPr wrap="square" lIns="0" tIns="0" rIns="0" bIns="0" rtlCol="0" anchor="t"/>
-          <a:lstStyle/>
-          <a:p>
-            <a:pPr indent="0" marL="0">
-              <a:buNone/>
-            </a:pPr>
-            <a:r>
-              <a:rPr lang="en-US" sz="1600" i="1" dirty="0">
-                <a:solidFill>
-                  <a:schemeClr val="tx1"/>
-                </a:solidFill>
-              </a:rPr>
-              <a:t>Treble key on the previous slides</a:t>
+              <a:t>Lines: E G B D F   |   Spaces: F A C E</a:t>
             </a:r>
             <a:endParaRPr lang="en-US" sz="1600" dirty="0"/>
           </a:p>
@@ -3413,15 +9421,76 @@
                 <a:ea typeface="Cambria" pitchFamily="34" charset="-122"/>
                 <a:cs typeface="Cambria" pitchFamily="34" charset="-120"/>
               </a:rPr>
-              <a:t>Round 2: Bass clef</a:t>
+              <a:t>Treble clef: 3 and 4</a:t>
             </a:r>
             <a:endParaRPr lang="en-US" sz="4000" dirty="0"/>
+          </a:p>
+        </p:txBody>
+      </p:sp>
+      <p:sp>
+        <p:nvSpPr>
+          <p:cNvPr id="3" name="Treble clef 3 badge"/>
+          <p:cNvSpPr/>
+          <p:nvPr/>
+        </p:nvSpPr>
+        <p:spPr>
+          <a:xfrm>
+            <a:off x="640080" y="1417320"/>
+            <a:ext cx="548640" cy="548640"/>
+          </a:xfrm>
+          <a:prstGeom prst="ellipse">
+            <a:avLst/>
+          </a:prstGeom>
+          <a:solidFill>
+            <a:schemeClr val="accent1"/>
+          </a:solidFill>
+          <a:ln w="12700">
+            <a:solidFill>
+              <a:schemeClr val="accent1"/>
+            </a:solidFill>
+            <a:prstDash val="solid"/>
+          </a:ln>
+        </p:spPr>
+      </p:sp>
+      <p:sp>
+        <p:nvSpPr>
+          <p:cNvPr id="4" name="Treble clef 3 number"/>
+          <p:cNvSpPr txBox="1"/>
+          <p:nvPr/>
+        </p:nvSpPr>
+        <p:spPr>
+          <a:xfrm>
+            <a:off x="640080" y="1417320"/>
+            <a:ext cx="548640" cy="548640"/>
+          </a:xfrm>
+          <a:prstGeom prst="rect">
+            <a:avLst/>
+          </a:prstGeom>
+          <a:noFill/>
+          <a:ln/>
+        </p:spPr>
+        <p:txBody>
+          <a:bodyPr wrap="square" lIns="0" tIns="0" rIns="0" bIns="0" rtlCol="0" anchor="ctr"/>
+          <a:lstStyle/>
+          <a:p>
+            <a:pPr algn="ctr" indent="0" marL="0">
+              <a:buNone/>
+            </a:pPr>
+            <a:r>
+              <a:rPr lang="en-US" sz="2200" b="1" dirty="0">
+                <a:solidFill>
+                  <a:schemeClr val="tx1"/>
+                </a:solidFill>
+              </a:rPr>
+              <a:t>3</a:t>
+            </a:r>
+            <a:endParaRPr lang="en-US" sz="2200" dirty="0"/>
           </a:p>
         </p:txBody>
       </p:sp>
       <p:pic>
         <p:nvPicPr>
-          <p:cNvPr id="3" name="r2_bead" descr="Bass stave with four notes and four empty answer boxes">    </p:cNvPr>
+          <p:cNvPr id="5" name="t03" descr="Treble clef code 3: stave with 3 notes and 3 empty answer boxes">    </p:cNvPr>
           <p:cNvPicPr>
             <a:picLocks noChangeAspect="1"/>
           </p:cNvPicPr>
@@ -3435,8 +9504,8 @@
         </p:blipFill>
         <p:spPr>
           <a:xfrm>
-            <a:off x="640080" y="1691640"/>
-            <a:ext cx="6949440" cy="3737254"/>
+            <a:off x="640080" y="2148840"/>
+            <a:ext cx="5303520" cy="4042847"/>
           </a:xfrm>
           <a:prstGeom prst="rect">
             <a:avLst/>
@@ -3445,26 +9514,24 @@
       </p:pic>
       <p:sp>
         <p:nvSpPr>
-          <p:cNvPr id="4" name="Hint card"/>
+          <p:cNvPr id="6" name="Treble clef 4 badge"/>
           <p:cNvSpPr/>
           <p:nvPr/>
         </p:nvSpPr>
         <p:spPr>
           <a:xfrm>
-            <a:off x="8229600" y="1920240"/>
-            <a:ext cx="3337560" cy="3291840"/>
-          </a:xfrm>
-          <a:prstGeom prst="roundRect">
-            <a:avLst>
-              <a:gd name="adj" fmla="val 4167"/>
-            </a:avLst>
+            <a:off x="6309360" y="1417320"/>
+            <a:ext cx="548640" cy="548640"/>
+          </a:xfrm>
+          <a:prstGeom prst="ellipse">
+            <a:avLst/>
           </a:prstGeom>
           <a:solidFill>
-            <a:schemeClr val="bg2"/>
+            <a:schemeClr val="accent1"/>
           </a:solidFill>
           <a:ln w="12700">
             <a:solidFill>
-              <a:schemeClr val="bg2"/>
+              <a:schemeClr val="accent1"/>
             </a:solidFill>
             <a:prstDash val="solid"/>
           </a:ln>
@@ -3472,14 +9539,74 @@
       </p:sp>
       <p:sp>
         <p:nvSpPr>
-          <p:cNvPr id="5" name="Clue heading"/>
+          <p:cNvPr id="7" name="Treble clef 4 number"/>
           <p:cNvSpPr txBox="1"/>
           <p:nvPr/>
         </p:nvSpPr>
         <p:spPr>
           <a:xfrm>
-            <a:off x="8503920" y="2148840"/>
-            <a:ext cx="2834640" cy="457200"/>
+            <a:off x="6309360" y="1417320"/>
+            <a:ext cx="548640" cy="548640"/>
+          </a:xfrm>
+          <a:prstGeom prst="rect">
+            <a:avLst/>
+          </a:prstGeom>
+          <a:noFill/>
+          <a:ln/>
+        </p:spPr>
+        <p:txBody>
+          <a:bodyPr wrap="square" lIns="0" tIns="0" rIns="0" bIns="0" rtlCol="0" anchor="ctr"/>
+          <a:lstStyle/>
+          <a:p>
+            <a:pPr algn="ctr" indent="0" marL="0">
+              <a:buNone/>
+            </a:pPr>
+            <a:r>
+              <a:rPr lang="en-US" sz="2200" b="1" dirty="0">
+                <a:solidFill>
+                  <a:schemeClr val="tx1"/>
+                </a:solidFill>
+              </a:rPr>
+              <a:t>4</a:t>
+            </a:r>
+            <a:endParaRPr lang="en-US" sz="2200" dirty="0"/>
+          </a:p>
+        </p:txBody>
+      </p:sp>
+      <p:pic>
+        <p:nvPicPr>
+          <p:cNvPr id="8" name="t04" descr="Treble clef code 4: stave with 3 notes and 3 empty answer boxes">    </p:cNvPr>
+          <p:cNvPicPr>
+            <a:picLocks noChangeAspect="1"/>
+          </p:cNvPicPr>
+          <p:nvPr/>
+        </p:nvPicPr>
+        <p:blipFill>
+          <a:blip r:embed="rId2"/>
+          <a:stretch>
+            <a:fillRect/>
+          </a:stretch>
+        </p:blipFill>
+        <p:spPr>
+          <a:xfrm>
+            <a:off x="6309360" y="2148840"/>
+            <a:ext cx="5303520" cy="4042847"/>
+          </a:xfrm>
+          <a:prstGeom prst="rect">
+            <a:avLst/>
+          </a:prstGeom>
+        </p:spPr>
+      </p:pic>
+      <p:sp>
+        <p:nvSpPr>
+          <p:cNvPr id="9" name="Key reminder"/>
+          <p:cNvSpPr txBox="1"/>
+          <p:nvPr/>
+        </p:nvSpPr>
+        <p:spPr>
+          <a:xfrm>
+            <a:off x="640080" y="6172200"/>
+            <a:ext cx="10881360" cy="365760"/>
           </a:xfrm>
           <a:prstGeom prst="rect">
             <a:avLst/>
@@ -3495,84 +9622,12 @@
               <a:buNone/>
             </a:pPr>
             <a:r>
-              <a:rPr lang="en-US" sz="2200" b="1" dirty="0">
+              <a:rPr lang="en-US" sz="1600" i="1" dirty="0">
                 <a:solidFill>
                   <a:schemeClr val="tx1"/>
                 </a:solidFill>
               </a:rPr>
-              <a:t>Your clue</a:t>
-            </a:r>
-            <a:endParaRPr lang="en-US" sz="2200" dirty="0"/>
-          </a:p>
-        </p:txBody>
-      </p:sp>
-      <p:sp>
-        <p:nvSpPr>
-          <p:cNvPr id="6" name="Clue text"/>
-          <p:cNvSpPr txBox="1"/>
-          <p:nvPr/>
-        </p:nvSpPr>
-        <p:spPr>
-          <a:xfrm>
-            <a:off x="8503920" y="2697480"/>
-            <a:ext cx="2834640" cy="1280160"/>
-          </a:xfrm>
-          <a:prstGeom prst="rect">
-            <a:avLst/>
-          </a:prstGeom>
-          <a:noFill/>
-          <a:ln/>
-        </p:spPr>
-        <p:txBody>
-          <a:bodyPr wrap="square" lIns="0" tIns="0" rIns="0" bIns="0" rtlCol="0" anchor="t"/>
-          <a:lstStyle/>
-          <a:p>
-            <a:pPr indent="0" marL="0">
-              <a:buNone/>
-            </a:pPr>
-            <a:r>
-              <a:rPr lang="en-US" sz="2000" dirty="0">
-                <a:solidFill>
-                  <a:schemeClr val="tx1"/>
-                </a:solidFill>
-              </a:rPr>
-              <a:t>A small ball with a hole, for a necklace.</a:t>
-            </a:r>
-            <a:endParaRPr lang="en-US" sz="2000" dirty="0"/>
-          </a:p>
-        </p:txBody>
-      </p:sp>
-      <p:sp>
-        <p:nvSpPr>
-          <p:cNvPr id="7" name="Key reminder"/>
-          <p:cNvSpPr txBox="1"/>
-          <p:nvPr/>
-        </p:nvSpPr>
-        <p:spPr>
-          <a:xfrm>
-            <a:off x="8503920" y="4206240"/>
-            <a:ext cx="2834640" cy="731520"/>
-          </a:xfrm>
-          <a:prstGeom prst="rect">
-            <a:avLst/>
-          </a:prstGeom>
-          <a:noFill/>
-          <a:ln/>
-        </p:spPr>
-        <p:txBody>
-          <a:bodyPr wrap="square" lIns="0" tIns="0" rIns="0" bIns="0" rtlCol="0" anchor="t"/>
-          <a:lstStyle/>
-          <a:p>
-            <a:pPr indent="0" marL="0">
-              <a:buNone/>
-            </a:pPr>
-            <a:r>
-              <a:rPr lang="en-US" sz="1600" i="1" dirty="0">
-                <a:solidFill>
-                  <a:schemeClr val="tx1"/>
-                </a:solidFill>
-              </a:rPr>
-              <a:t>Bass key on the previous slides</a:t>
+              <a:t>Lines: E G B D F   |   Spaces: F A C E</a:t>
             </a:r>
             <a:endParaRPr lang="en-US" sz="1600" dirty="0"/>
           </a:p>
@@ -3638,7 +9693,7 @@
                 <a:ea typeface="Cambria" pitchFamily="34" charset="-122"/>
                 <a:cs typeface="Cambria" pitchFamily="34" charset="-120"/>
               </a:rPr>
-              <a:t>Round 3: Two clefs, one message</a:t>
+              <a:t>Treble clef: 5 and 6</a:t>
             </a:r>
             <a:endParaRPr lang="en-US" sz="4000" dirty="0"/>
           </a:p>
@@ -3646,43 +9701,68 @@
       </p:sp>
       <p:sp>
         <p:nvSpPr>
-          <p:cNvPr id="3" name="Treble heading"/>
+          <p:cNvPr id="3" name="Treble clef 5 badge"/>
+          <p:cNvSpPr/>
+          <p:nvPr/>
+        </p:nvSpPr>
+        <p:spPr>
+          <a:xfrm>
+            <a:off x="640080" y="1417320"/>
+            <a:ext cx="548640" cy="548640"/>
+          </a:xfrm>
+          <a:prstGeom prst="ellipse">
+            <a:avLst/>
+          </a:prstGeom>
+          <a:solidFill>
+            <a:schemeClr val="accent1"/>
+          </a:solidFill>
+          <a:ln w="12700">
+            <a:solidFill>
+              <a:schemeClr val="accent1"/>
+            </a:solidFill>
+            <a:prstDash val="solid"/>
+          </a:ln>
+        </p:spPr>
+      </p:sp>
+      <p:sp>
+        <p:nvSpPr>
+          <p:cNvPr id="4" name="Treble clef 5 number"/>
           <p:cNvSpPr txBox="1"/>
           <p:nvPr/>
         </p:nvSpPr>
         <p:spPr>
           <a:xfrm>
-            <a:off x="685800" y="1371600"/>
-            <a:ext cx="5120640" cy="365760"/>
-          </a:xfrm>
-          <a:prstGeom prst="rect">
-            <a:avLst/>
-          </a:prstGeom>
-          <a:noFill/>
-          <a:ln/>
-        </p:spPr>
-        <p:txBody>
-          <a:bodyPr wrap="square" lIns="0" tIns="0" rIns="0" bIns="0" rtlCol="0" anchor="ctr"/>
-          <a:lstStyle/>
-          <a:p>
-            <a:pPr indent="0" marL="0">
-              <a:buNone/>
-            </a:pPr>
-            <a:r>
-              <a:rPr lang="en-US" sz="2000" b="1" dirty="0">
-                <a:solidFill>
-                  <a:schemeClr val="accent2"/>
-                </a:solidFill>
-              </a:rPr>
-              <a:t>Treble clef</a:t>
-            </a:r>
-            <a:endParaRPr lang="en-US" sz="2000" dirty="0"/>
+            <a:off x="640080" y="1417320"/>
+            <a:ext cx="548640" cy="548640"/>
+          </a:xfrm>
+          <a:prstGeom prst="rect">
+            <a:avLst/>
+          </a:prstGeom>
+          <a:noFill/>
+          <a:ln/>
+        </p:spPr>
+        <p:txBody>
+          <a:bodyPr wrap="square" lIns="0" tIns="0" rIns="0" bIns="0" rtlCol="0" anchor="ctr"/>
+          <a:lstStyle/>
+          <a:p>
+            <a:pPr algn="ctr" indent="0" marL="0">
+              <a:buNone/>
+            </a:pPr>
+            <a:r>
+              <a:rPr lang="en-US" sz="2200" b="1" dirty="0">
+                <a:solidFill>
+                  <a:schemeClr val="tx1"/>
+                </a:solidFill>
+              </a:rPr>
+              <a:t>5</a:t>
+            </a:r>
+            <a:endParaRPr lang="en-US" sz="2200" dirty="0"/>
           </a:p>
         </p:txBody>
       </p:sp>
       <p:pic>
         <p:nvPicPr>
-          <p:cNvPr id="4" name="r3a_bad" descr="Treble clef stave with three notes and three empty answer boxes">    </p:cNvPr>
+          <p:cNvPr id="5" name="t05" descr="Treble clef code 5: stave with 4 notes and 4 empty answer boxes">    </p:cNvPr>
           <p:cNvPicPr>
             <a:picLocks noChangeAspect="1"/>
           </p:cNvPicPr>
@@ -3696,8 +9776,8 @@
         </p:blipFill>
         <p:spPr>
           <a:xfrm>
-            <a:off x="685800" y="1828800"/>
-            <a:ext cx="4937760" cy="3764030"/>
+            <a:off x="640080" y="2148840"/>
+            <a:ext cx="5303520" cy="3288182"/>
           </a:xfrm>
           <a:prstGeom prst="rect">
             <a:avLst/>
@@ -3706,43 +9786,68 @@
       </p:pic>
       <p:sp>
         <p:nvSpPr>
-          <p:cNvPr id="5" name="Bass heading"/>
+          <p:cNvPr id="6" name="Treble clef 6 badge"/>
+          <p:cNvSpPr/>
+          <p:nvPr/>
+        </p:nvSpPr>
+        <p:spPr>
+          <a:xfrm>
+            <a:off x="6309360" y="1417320"/>
+            <a:ext cx="548640" cy="548640"/>
+          </a:xfrm>
+          <a:prstGeom prst="ellipse">
+            <a:avLst/>
+          </a:prstGeom>
+          <a:solidFill>
+            <a:schemeClr val="accent1"/>
+          </a:solidFill>
+          <a:ln w="12700">
+            <a:solidFill>
+              <a:schemeClr val="accent1"/>
+            </a:solidFill>
+            <a:prstDash val="solid"/>
+          </a:ln>
+        </p:spPr>
+      </p:sp>
+      <p:sp>
+        <p:nvSpPr>
+          <p:cNvPr id="7" name="Treble clef 6 number"/>
           <p:cNvSpPr txBox="1"/>
           <p:nvPr/>
         </p:nvSpPr>
         <p:spPr>
           <a:xfrm>
-            <a:off x="6400800" y="1371600"/>
-            <a:ext cx="5120640" cy="365760"/>
-          </a:xfrm>
-          <a:prstGeom prst="rect">
-            <a:avLst/>
-          </a:prstGeom>
-          <a:noFill/>
-          <a:ln/>
-        </p:spPr>
-        <p:txBody>
-          <a:bodyPr wrap="square" lIns="0" tIns="0" rIns="0" bIns="0" rtlCol="0" anchor="ctr"/>
-          <a:lstStyle/>
-          <a:p>
-            <a:pPr indent="0" marL="0">
-              <a:buNone/>
-            </a:pPr>
-            <a:r>
-              <a:rPr lang="en-US" sz="2000" b="1" dirty="0">
-                <a:solidFill>
-                  <a:schemeClr val="accent2"/>
-                </a:solidFill>
-              </a:rPr>
-              <a:t>Bass clef</a:t>
-            </a:r>
-            <a:endParaRPr lang="en-US" sz="2000" dirty="0"/>
+            <a:off x="6309360" y="1417320"/>
+            <a:ext cx="548640" cy="548640"/>
+          </a:xfrm>
+          <a:prstGeom prst="rect">
+            <a:avLst/>
+          </a:prstGeom>
+          <a:noFill/>
+          <a:ln/>
+        </p:spPr>
+        <p:txBody>
+          <a:bodyPr wrap="square" lIns="0" tIns="0" rIns="0" bIns="0" rtlCol="0" anchor="ctr"/>
+          <a:lstStyle/>
+          <a:p>
+            <a:pPr algn="ctr" indent="0" marL="0">
+              <a:buNone/>
+            </a:pPr>
+            <a:r>
+              <a:rPr lang="en-US" sz="2200" b="1" dirty="0">
+                <a:solidFill>
+                  <a:schemeClr val="tx1"/>
+                </a:solidFill>
+              </a:rPr>
+              <a:t>6</a:t>
+            </a:r>
+            <a:endParaRPr lang="en-US" sz="2200" dirty="0"/>
           </a:p>
         </p:txBody>
       </p:sp>
       <p:pic>
         <p:nvPicPr>
-          <p:cNvPr id="6" name="r3b_egg" descr="Bass clef stave with three notes and three empty answer boxes">    </p:cNvPr>
+          <p:cNvPr id="8" name="t06" descr="Treble clef code 6: stave with 4 notes and 4 empty answer boxes">    </p:cNvPr>
           <p:cNvPicPr>
             <a:picLocks noChangeAspect="1"/>
           </p:cNvPicPr>
@@ -3756,8 +9861,8 @@
         </p:blipFill>
         <p:spPr>
           <a:xfrm>
-            <a:off x="6400800" y="1828800"/>
-            <a:ext cx="4937760" cy="3264858"/>
+            <a:off x="6309360" y="2148840"/>
+            <a:ext cx="5303520" cy="3288182"/>
           </a:xfrm>
           <a:prstGeom prst="rect">
             <a:avLst/>
@@ -3766,14 +9871,14 @@
       </p:pic>
       <p:sp>
         <p:nvSpPr>
-          <p:cNvPr id="7" name="Hint"/>
+          <p:cNvPr id="9" name="Key reminder"/>
           <p:cNvSpPr txBox="1"/>
           <p:nvPr/>
         </p:nvSpPr>
         <p:spPr>
           <a:xfrm>
-            <a:off x="685800" y="5943600"/>
-            <a:ext cx="10789920" cy="457200"/>
+            <a:off x="640080" y="6172200"/>
+            <a:ext cx="10881360" cy="365760"/>
           </a:xfrm>
           <a:prstGeom prst="rect">
             <a:avLst/>
@@ -3789,14 +9894,14 @@
               <a:buNone/>
             </a:pPr>
             <a:r>
-              <a:rPr lang="en-US" sz="2200" b="1" dirty="0">
+              <a:rPr lang="en-US" sz="1600" i="1" dirty="0">
                 <a:solidFill>
                   <a:schemeClr val="tx1"/>
                 </a:solidFill>
               </a:rPr>
-              <a:t>Hint: do not eat this one!</a:t>
-            </a:r>
-            <a:endParaRPr lang="en-US" sz="2200" dirty="0"/>
+              <a:t>Lines: E G B D F   |   Spaces: F A C E</a:t>
+            </a:r>
+            <a:endParaRPr lang="en-US" sz="1600" dirty="0"/>
           </a:p>
         </p:txBody>
       </p:sp>
@@ -3860,7 +9965,7 @@
                 <a:ea typeface="Cambria" pitchFamily="34" charset="-122"/>
                 <a:cs typeface="Cambria" pitchFamily="34" charset="-120"/>
               </a:rPr>
-              <a:t>Your turn: write a code</a:t>
+              <a:t>Treble clef: 7 and 8</a:t>
             </a:r>
             <a:endParaRPr lang="en-US" sz="4000" dirty="0"/>
           </a:p>
@@ -3868,14 +9973,14 @@
       </p:sp>
       <p:sp>
         <p:nvSpPr>
-          <p:cNvPr id="3" name="Step 1 badge"/>
+          <p:cNvPr id="3" name="Treble clef 7 badge"/>
           <p:cNvSpPr/>
           <p:nvPr/>
         </p:nvSpPr>
         <p:spPr>
           <a:xfrm>
-            <a:off x="640080" y="1554480"/>
-            <a:ext cx="685800" cy="685800"/>
+            <a:off x="640080" y="1417320"/>
+            <a:ext cx="548640" cy="548640"/>
           </a:xfrm>
           <a:prstGeom prst="ellipse">
             <a:avLst/>
@@ -3893,14 +9998,14 @@
       </p:sp>
       <p:sp>
         <p:nvSpPr>
-          <p:cNvPr id="4" name="Step 1 number"/>
+          <p:cNvPr id="4" name="Treble clef 7 number"/>
           <p:cNvSpPr txBox="1"/>
           <p:nvPr/>
         </p:nvSpPr>
         <p:spPr>
           <a:xfrm>
-            <a:off x="640080" y="1554480"/>
-            <a:ext cx="685800" cy="685800"/>
+            <a:off x="640080" y="1417320"/>
+            <a:ext cx="548640" cy="548640"/>
           </a:xfrm>
           <a:prstGeom prst="rect">
             <a:avLst/>
@@ -3916,63 +10021,51 @@
               <a:buNone/>
             </a:pPr>
             <a:r>
-              <a:rPr lang="en-US" sz="2600" b="1" dirty="0">
+              <a:rPr lang="en-US" sz="2200" b="1" dirty="0">
                 <a:solidFill>
                   <a:schemeClr val="tx1"/>
                 </a:solidFill>
               </a:rPr>
-              <a:t>1</a:t>
-            </a:r>
-            <a:endParaRPr lang="en-US" sz="2600" dirty="0"/>
-          </a:p>
-        </p:txBody>
-      </p:sp>
-      <p:sp>
-        <p:nvSpPr>
-          <p:cNvPr id="5" name="Step 1 text"/>
-          <p:cNvSpPr txBox="1"/>
-          <p:nvPr/>
-        </p:nvSpPr>
-        <p:spPr>
-          <a:xfrm>
-            <a:off x="1554480" y="1554480"/>
-            <a:ext cx="9601200" cy="685800"/>
-          </a:xfrm>
-          <a:prstGeom prst="rect">
-            <a:avLst/>
-          </a:prstGeom>
-          <a:noFill/>
-          <a:ln/>
-        </p:spPr>
-        <p:txBody>
-          <a:bodyPr wrap="square" lIns="0" tIns="0" rIns="0" bIns="0" rtlCol="0" anchor="ctr"/>
-          <a:lstStyle/>
-          <a:p>
-            <a:pPr indent="0" marL="0">
-              <a:buNone/>
-            </a:pPr>
-            <a:r>
-              <a:rPr lang="en-US" sz="2400" dirty="0">
-                <a:solidFill>
-                  <a:schemeClr val="tx1"/>
-                </a:solidFill>
-              </a:rPr>
-              <a:t>Choose a word that uses only the letters A to G.</a:t>
-            </a:r>
-            <a:endParaRPr lang="en-US" sz="2400" dirty="0"/>
-          </a:p>
-        </p:txBody>
-      </p:sp>
-      <p:sp>
-        <p:nvSpPr>
-          <p:cNvPr id="6" name="Step 2 badge"/>
+              <a:t>7</a:t>
+            </a:r>
+            <a:endParaRPr lang="en-US" sz="2200" dirty="0"/>
+          </a:p>
+        </p:txBody>
+      </p:sp>
+      <p:pic>
+        <p:nvPicPr>
+          <p:cNvPr id="5" name="t07" descr="Treble clef code 7: stave with 4 notes and 4 empty answer boxes">    </p:cNvPr>
+          <p:cNvPicPr>
+            <a:picLocks noChangeAspect="1"/>
+          </p:cNvPicPr>
+          <p:nvPr/>
+        </p:nvPicPr>
+        <p:blipFill>
+          <a:blip r:embed="rId1"/>
+          <a:stretch>
+            <a:fillRect/>
+          </a:stretch>
+        </p:blipFill>
+        <p:spPr>
+          <a:xfrm>
+            <a:off x="640080" y="2148840"/>
+            <a:ext cx="5303520" cy="3288182"/>
+          </a:xfrm>
+          <a:prstGeom prst="rect">
+            <a:avLst/>
+          </a:prstGeom>
+        </p:spPr>
+      </p:pic>
+      <p:sp>
+        <p:nvSpPr>
+          <p:cNvPr id="6" name="Treble clef 8 badge"/>
           <p:cNvSpPr/>
           <p:nvPr/>
         </p:nvSpPr>
         <p:spPr>
           <a:xfrm>
-            <a:off x="640080" y="2606040"/>
-            <a:ext cx="685800" cy="685800"/>
+            <a:off x="6309360" y="1417320"/>
+            <a:ext cx="548640" cy="548640"/>
           </a:xfrm>
           <a:prstGeom prst="ellipse">
             <a:avLst/>
@@ -3990,14 +10083,14 @@
       </p:sp>
       <p:sp>
         <p:nvSpPr>
-          <p:cNvPr id="7" name="Step 2 number"/>
+          <p:cNvPr id="7" name="Treble clef 8 number"/>
           <p:cNvSpPr txBox="1"/>
           <p:nvPr/>
         </p:nvSpPr>
         <p:spPr>
           <a:xfrm>
-            <a:off x="640080" y="2606040"/>
-            <a:ext cx="685800" cy="685800"/>
+            <a:off x="6309360" y="1417320"/>
+            <a:ext cx="548640" cy="548640"/>
           </a:xfrm>
           <a:prstGeom prst="rect">
             <a:avLst/>
@@ -4013,27 +10106,51 @@
               <a:buNone/>
             </a:pPr>
             <a:r>
-              <a:rPr lang="en-US" sz="2600" b="1" dirty="0">
+              <a:rPr lang="en-US" sz="2200" b="1" dirty="0">
                 <a:solidFill>
                   <a:schemeClr val="tx1"/>
                 </a:solidFill>
               </a:rPr>
-              <a:t>2</a:t>
-            </a:r>
-            <a:endParaRPr lang="en-US" sz="2600" dirty="0"/>
-          </a:p>
-        </p:txBody>
-      </p:sp>
-      <p:sp>
-        <p:nvSpPr>
-          <p:cNvPr id="8" name="Step 2 text"/>
+              <a:t>8</a:t>
+            </a:r>
+            <a:endParaRPr lang="en-US" sz="2200" dirty="0"/>
+          </a:p>
+        </p:txBody>
+      </p:sp>
+      <p:pic>
+        <p:nvPicPr>
+          <p:cNvPr id="8" name="t08" descr="Treble clef code 8: stave with 4 notes and 4 empty answer boxes">    </p:cNvPr>
+          <p:cNvPicPr>
+            <a:picLocks noChangeAspect="1"/>
+          </p:cNvPicPr>
+          <p:nvPr/>
+        </p:nvPicPr>
+        <p:blipFill>
+          <a:blip r:embed="rId2"/>
+          <a:stretch>
+            <a:fillRect/>
+          </a:stretch>
+        </p:blipFill>
+        <p:spPr>
+          <a:xfrm>
+            <a:off x="6309360" y="2148840"/>
+            <a:ext cx="5303520" cy="3288182"/>
+          </a:xfrm>
+          <a:prstGeom prst="rect">
+            <a:avLst/>
+          </a:prstGeom>
+        </p:spPr>
+      </p:pic>
+      <p:sp>
+        <p:nvSpPr>
+          <p:cNvPr id="9" name="Key reminder"/>
           <p:cNvSpPr txBox="1"/>
           <p:nvPr/>
         </p:nvSpPr>
         <p:spPr>
           <a:xfrm>
-            <a:off x="1554480" y="2606040"/>
-            <a:ext cx="9601200" cy="685800"/>
+            <a:off x="640080" y="6172200"/>
+            <a:ext cx="10881360" cy="365760"/>
           </a:xfrm>
           <a:prstGeom prst="rect">
             <a:avLst/>
@@ -4049,588 +10166,14 @@
               <a:buNone/>
             </a:pPr>
             <a:r>
-              <a:rPr lang="en-US" sz="2400" dirty="0">
+              <a:rPr lang="en-US" sz="1600" i="1" dirty="0">
                 <a:solidFill>
                   <a:schemeClr val="tx1"/>
                 </a:solidFill>
               </a:rPr>
-              <a:t>Draw its notes on a stave on paper, using either clef.</a:t>
-            </a:r>
-            <a:endParaRPr lang="en-US" sz="2400" dirty="0"/>
-          </a:p>
-        </p:txBody>
-      </p:sp>
-      <p:sp>
-        <p:nvSpPr>
-          <p:cNvPr id="9" name="Step 3 badge"/>
-          <p:cNvSpPr/>
-          <p:nvPr/>
-        </p:nvSpPr>
-        <p:spPr>
-          <a:xfrm>
-            <a:off x="640080" y="3657600"/>
-            <a:ext cx="685800" cy="685800"/>
-          </a:xfrm>
-          <a:prstGeom prst="ellipse">
-            <a:avLst/>
-          </a:prstGeom>
-          <a:solidFill>
-            <a:schemeClr val="accent1"/>
-          </a:solidFill>
-          <a:ln w="12700">
-            <a:solidFill>
-              <a:schemeClr val="accent1"/>
-            </a:solidFill>
-            <a:prstDash val="solid"/>
-          </a:ln>
-        </p:spPr>
-      </p:sp>
-      <p:sp>
-        <p:nvSpPr>
-          <p:cNvPr id="10" name="Step 3 number"/>
-          <p:cNvSpPr txBox="1"/>
-          <p:nvPr/>
-        </p:nvSpPr>
-        <p:spPr>
-          <a:xfrm>
-            <a:off x="640080" y="3657600"/>
-            <a:ext cx="685800" cy="685800"/>
-          </a:xfrm>
-          <a:prstGeom prst="rect">
-            <a:avLst/>
-          </a:prstGeom>
-          <a:noFill/>
-          <a:ln/>
-        </p:spPr>
-        <p:txBody>
-          <a:bodyPr wrap="square" lIns="0" tIns="0" rIns="0" bIns="0" rtlCol="0" anchor="ctr"/>
-          <a:lstStyle/>
-          <a:p>
-            <a:pPr algn="ctr" indent="0" marL="0">
-              <a:buNone/>
-            </a:pPr>
-            <a:r>
-              <a:rPr lang="en-US" sz="2600" b="1" dirty="0">
-                <a:solidFill>
-                  <a:schemeClr val="tx1"/>
-                </a:solidFill>
-              </a:rPr>
-              <a:t>3</a:t>
-            </a:r>
-            <a:endParaRPr lang="en-US" sz="2600" dirty="0"/>
-          </a:p>
-        </p:txBody>
-      </p:sp>
-      <p:sp>
-        <p:nvSpPr>
-          <p:cNvPr id="11" name="Step 3 text"/>
-          <p:cNvSpPr txBox="1"/>
-          <p:nvPr/>
-        </p:nvSpPr>
-        <p:spPr>
-          <a:xfrm>
-            <a:off x="1554480" y="3657600"/>
-            <a:ext cx="9601200" cy="685800"/>
-          </a:xfrm>
-          <a:prstGeom prst="rect">
-            <a:avLst/>
-          </a:prstGeom>
-          <a:noFill/>
-          <a:ln/>
-        </p:spPr>
-        <p:txBody>
-          <a:bodyPr wrap="square" lIns="0" tIns="0" rIns="0" bIns="0" rtlCol="0" anchor="ctr"/>
-          <a:lstStyle/>
-          <a:p>
-            <a:pPr indent="0" marL="0">
-              <a:buNone/>
-            </a:pPr>
-            <a:r>
-              <a:rPr lang="en-US" sz="2400" dirty="0">
-                <a:solidFill>
-                  <a:schemeClr val="tx1"/>
-                </a:solidFill>
-              </a:rPr>
-              <a:t>Hold it under the iPad camera. The room cracks the code on screen.</a:t>
-            </a:r>
-            <a:endParaRPr lang="en-US" sz="2400" dirty="0"/>
-          </a:p>
-        </p:txBody>
-      </p:sp>
-      <p:sp>
-        <p:nvSpPr>
-          <p:cNvPr id="12" name="Words heading"/>
-          <p:cNvSpPr txBox="1"/>
-          <p:nvPr/>
-        </p:nvSpPr>
-        <p:spPr>
-          <a:xfrm>
-            <a:off x="640080" y="4846320"/>
-            <a:ext cx="3657600" cy="365760"/>
-          </a:xfrm>
-          <a:prstGeom prst="rect">
-            <a:avLst/>
-          </a:prstGeom>
-          <a:noFill/>
-          <a:ln/>
-        </p:spPr>
-        <p:txBody>
-          <a:bodyPr wrap="square" lIns="0" tIns="0" rIns="0" bIns="0" rtlCol="0" anchor="ctr"/>
-          <a:lstStyle/>
-          <a:p>
-            <a:pPr indent="0" marL="0">
-              <a:buNone/>
-            </a:pPr>
-            <a:r>
-              <a:rPr lang="en-US" sz="1800" b="1" dirty="0">
-                <a:solidFill>
-                  <a:schemeClr val="tx1"/>
-                </a:solidFill>
-              </a:rPr>
-              <a:t>Words to try</a:t>
-            </a:r>
-            <a:endParaRPr lang="en-US" sz="1800" dirty="0"/>
-          </a:p>
-        </p:txBody>
-      </p:sp>
-      <p:sp>
-        <p:nvSpPr>
-          <p:cNvPr id="13" name="Chip BAG"/>
-          <p:cNvSpPr/>
-          <p:nvPr/>
-        </p:nvSpPr>
-        <p:spPr>
-          <a:xfrm>
-            <a:off x="640080" y="5349240"/>
-            <a:ext cx="969264" cy="594360"/>
-          </a:xfrm>
-          <a:prstGeom prst="roundRect">
-            <a:avLst>
-              <a:gd name="adj" fmla="val 46154"/>
-            </a:avLst>
-          </a:prstGeom>
-          <a:solidFill>
-            <a:schemeClr val="bg2"/>
-          </a:solidFill>
-          <a:ln w="12700">
-            <a:solidFill>
-              <a:schemeClr val="bg2"/>
-            </a:solidFill>
-            <a:prstDash val="solid"/>
-          </a:ln>
-        </p:spPr>
-      </p:sp>
-      <p:sp>
-        <p:nvSpPr>
-          <p:cNvPr id="14" name="Chip text BAG"/>
-          <p:cNvSpPr txBox="1"/>
-          <p:nvPr/>
-        </p:nvSpPr>
-        <p:spPr>
-          <a:xfrm>
-            <a:off x="640080" y="5349240"/>
-            <a:ext cx="969264" cy="594360"/>
-          </a:xfrm>
-          <a:prstGeom prst="rect">
-            <a:avLst/>
-          </a:prstGeom>
-          <a:noFill/>
-          <a:ln/>
-        </p:spPr>
-        <p:txBody>
-          <a:bodyPr wrap="square" lIns="0" tIns="0" rIns="0" bIns="0" rtlCol="0" anchor="ctr"/>
-          <a:lstStyle/>
-          <a:p>
-            <a:pPr algn="ctr" indent="0" marL="0">
-              <a:buNone/>
-            </a:pPr>
-            <a:r>
-              <a:rPr lang="en-US" sz="1800" b="1" dirty="0">
-                <a:solidFill>
-                  <a:schemeClr val="tx1"/>
-                </a:solidFill>
-              </a:rPr>
-              <a:t>BAG</a:t>
-            </a:r>
-            <a:endParaRPr lang="en-US" sz="1800" dirty="0"/>
-          </a:p>
-        </p:txBody>
-      </p:sp>
-      <p:sp>
-        <p:nvSpPr>
-          <p:cNvPr id="15" name="Chip BED"/>
-          <p:cNvSpPr/>
-          <p:nvPr/>
-        </p:nvSpPr>
-        <p:spPr>
-          <a:xfrm>
-            <a:off x="1792224" y="5349240"/>
-            <a:ext cx="969264" cy="594360"/>
-          </a:xfrm>
-          <a:prstGeom prst="roundRect">
-            <a:avLst>
-              <a:gd name="adj" fmla="val 46154"/>
-            </a:avLst>
-          </a:prstGeom>
-          <a:solidFill>
-            <a:schemeClr val="bg2"/>
-          </a:solidFill>
-          <a:ln w="12700">
-            <a:solidFill>
-              <a:schemeClr val="bg2"/>
-            </a:solidFill>
-            <a:prstDash val="solid"/>
-          </a:ln>
-        </p:spPr>
-      </p:sp>
-      <p:sp>
-        <p:nvSpPr>
-          <p:cNvPr id="16" name="Chip text BED"/>
-          <p:cNvSpPr txBox="1"/>
-          <p:nvPr/>
-        </p:nvSpPr>
-        <p:spPr>
-          <a:xfrm>
-            <a:off x="1792224" y="5349240"/>
-            <a:ext cx="969264" cy="594360"/>
-          </a:xfrm>
-          <a:prstGeom prst="rect">
-            <a:avLst/>
-          </a:prstGeom>
-          <a:noFill/>
-          <a:ln/>
-        </p:spPr>
-        <p:txBody>
-          <a:bodyPr wrap="square" lIns="0" tIns="0" rIns="0" bIns="0" rtlCol="0" anchor="ctr"/>
-          <a:lstStyle/>
-          <a:p>
-            <a:pPr algn="ctr" indent="0" marL="0">
-              <a:buNone/>
-            </a:pPr>
-            <a:r>
-              <a:rPr lang="en-US" sz="1800" b="1" dirty="0">
-                <a:solidFill>
-                  <a:schemeClr val="tx1"/>
-                </a:solidFill>
-              </a:rPr>
-              <a:t>BED</a:t>
-            </a:r>
-            <a:endParaRPr lang="en-US" sz="1800" dirty="0"/>
-          </a:p>
-        </p:txBody>
-      </p:sp>
-      <p:sp>
-        <p:nvSpPr>
-          <p:cNvPr id="17" name="Chip CAGE"/>
-          <p:cNvSpPr/>
-          <p:nvPr/>
-        </p:nvSpPr>
-        <p:spPr>
-          <a:xfrm>
-            <a:off x="2944368" y="5349240"/>
-            <a:ext cx="1170432" cy="594360"/>
-          </a:xfrm>
-          <a:prstGeom prst="roundRect">
-            <a:avLst>
-              <a:gd name="adj" fmla="val 46154"/>
-            </a:avLst>
-          </a:prstGeom>
-          <a:solidFill>
-            <a:schemeClr val="bg2"/>
-          </a:solidFill>
-          <a:ln w="12700">
-            <a:solidFill>
-              <a:schemeClr val="bg2"/>
-            </a:solidFill>
-            <a:prstDash val="solid"/>
-          </a:ln>
-        </p:spPr>
-      </p:sp>
-      <p:sp>
-        <p:nvSpPr>
-          <p:cNvPr id="18" name="Chip text CAGE"/>
-          <p:cNvSpPr txBox="1"/>
-          <p:nvPr/>
-        </p:nvSpPr>
-        <p:spPr>
-          <a:xfrm>
-            <a:off x="2944368" y="5349240"/>
-            <a:ext cx="1170432" cy="594360"/>
-          </a:xfrm>
-          <a:prstGeom prst="rect">
-            <a:avLst/>
-          </a:prstGeom>
-          <a:noFill/>
-          <a:ln/>
-        </p:spPr>
-        <p:txBody>
-          <a:bodyPr wrap="square" lIns="0" tIns="0" rIns="0" bIns="0" rtlCol="0" anchor="ctr"/>
-          <a:lstStyle/>
-          <a:p>
-            <a:pPr algn="ctr" indent="0" marL="0">
-              <a:buNone/>
-            </a:pPr>
-            <a:r>
-              <a:rPr lang="en-US" sz="1800" b="1" dirty="0">
-                <a:solidFill>
-                  <a:schemeClr val="tx1"/>
-                </a:solidFill>
-              </a:rPr>
-              <a:t>CAGE</a:t>
-            </a:r>
-            <a:endParaRPr lang="en-US" sz="1800" dirty="0"/>
-          </a:p>
-        </p:txBody>
-      </p:sp>
-      <p:sp>
-        <p:nvSpPr>
-          <p:cNvPr id="19" name="Chip FACE"/>
-          <p:cNvSpPr/>
-          <p:nvPr/>
-        </p:nvSpPr>
-        <p:spPr>
-          <a:xfrm>
-            <a:off x="4297680" y="5349240"/>
-            <a:ext cx="1170432" cy="594360"/>
-          </a:xfrm>
-          <a:prstGeom prst="roundRect">
-            <a:avLst>
-              <a:gd name="adj" fmla="val 46154"/>
-            </a:avLst>
-          </a:prstGeom>
-          <a:solidFill>
-            <a:schemeClr val="bg2"/>
-          </a:solidFill>
-          <a:ln w="12700">
-            <a:solidFill>
-              <a:schemeClr val="bg2"/>
-            </a:solidFill>
-            <a:prstDash val="solid"/>
-          </a:ln>
-        </p:spPr>
-      </p:sp>
-      <p:sp>
-        <p:nvSpPr>
-          <p:cNvPr id="20" name="Chip text FACE"/>
-          <p:cNvSpPr txBox="1"/>
-          <p:nvPr/>
-        </p:nvSpPr>
-        <p:spPr>
-          <a:xfrm>
-            <a:off x="4297680" y="5349240"/>
-            <a:ext cx="1170432" cy="594360"/>
-          </a:xfrm>
-          <a:prstGeom prst="rect">
-            <a:avLst/>
-          </a:prstGeom>
-          <a:noFill/>
-          <a:ln/>
-        </p:spPr>
-        <p:txBody>
-          <a:bodyPr wrap="square" lIns="0" tIns="0" rIns="0" bIns="0" rtlCol="0" anchor="ctr"/>
-          <a:lstStyle/>
-          <a:p>
-            <a:pPr algn="ctr" indent="0" marL="0">
-              <a:buNone/>
-            </a:pPr>
-            <a:r>
-              <a:rPr lang="en-US" sz="1800" b="1" dirty="0">
-                <a:solidFill>
-                  <a:schemeClr val="tx1"/>
-                </a:solidFill>
-              </a:rPr>
-              <a:t>FACE</a:t>
-            </a:r>
-            <a:endParaRPr lang="en-US" sz="1800" dirty="0"/>
-          </a:p>
-        </p:txBody>
-      </p:sp>
-      <p:sp>
-        <p:nvSpPr>
-          <p:cNvPr id="21" name="Chip BADGE"/>
-          <p:cNvSpPr/>
-          <p:nvPr/>
-        </p:nvSpPr>
-        <p:spPr>
-          <a:xfrm>
-            <a:off x="5650992" y="5349240"/>
-            <a:ext cx="1371600" cy="594360"/>
-          </a:xfrm>
-          <a:prstGeom prst="roundRect">
-            <a:avLst>
-              <a:gd name="adj" fmla="val 46154"/>
-            </a:avLst>
-          </a:prstGeom>
-          <a:solidFill>
-            <a:schemeClr val="bg2"/>
-          </a:solidFill>
-          <a:ln w="12700">
-            <a:solidFill>
-              <a:schemeClr val="bg2"/>
-            </a:solidFill>
-            <a:prstDash val="solid"/>
-          </a:ln>
-        </p:spPr>
-      </p:sp>
-      <p:sp>
-        <p:nvSpPr>
-          <p:cNvPr id="22" name="Chip text BADGE"/>
-          <p:cNvSpPr txBox="1"/>
-          <p:nvPr/>
-        </p:nvSpPr>
-        <p:spPr>
-          <a:xfrm>
-            <a:off x="5650992" y="5349240"/>
-            <a:ext cx="1371600" cy="594360"/>
-          </a:xfrm>
-          <a:prstGeom prst="rect">
-            <a:avLst/>
-          </a:prstGeom>
-          <a:noFill/>
-          <a:ln/>
-        </p:spPr>
-        <p:txBody>
-          <a:bodyPr wrap="square" lIns="0" tIns="0" rIns="0" bIns="0" rtlCol="0" anchor="ctr"/>
-          <a:lstStyle/>
-          <a:p>
-            <a:pPr algn="ctr" indent="0" marL="0">
-              <a:buNone/>
-            </a:pPr>
-            <a:r>
-              <a:rPr lang="en-US" sz="1800" b="1" dirty="0">
-                <a:solidFill>
-                  <a:schemeClr val="tx1"/>
-                </a:solidFill>
-              </a:rPr>
-              <a:t>BADGE</a:t>
-            </a:r>
-            <a:endParaRPr lang="en-US" sz="1800" dirty="0"/>
-          </a:p>
-        </p:txBody>
-      </p:sp>
-      <p:sp>
-        <p:nvSpPr>
-          <p:cNvPr id="23" name="Chip DECADE"/>
-          <p:cNvSpPr/>
-          <p:nvPr/>
-        </p:nvSpPr>
-        <p:spPr>
-          <a:xfrm>
-            <a:off x="7205472" y="5349240"/>
-            <a:ext cx="1572768" cy="594360"/>
-          </a:xfrm>
-          <a:prstGeom prst="roundRect">
-            <a:avLst>
-              <a:gd name="adj" fmla="val 46154"/>
-            </a:avLst>
-          </a:prstGeom>
-          <a:solidFill>
-            <a:schemeClr val="bg2"/>
-          </a:solidFill>
-          <a:ln w="12700">
-            <a:solidFill>
-              <a:schemeClr val="bg2"/>
-            </a:solidFill>
-            <a:prstDash val="solid"/>
-          </a:ln>
-        </p:spPr>
-      </p:sp>
-      <p:sp>
-        <p:nvSpPr>
-          <p:cNvPr id="24" name="Chip text DECADE"/>
-          <p:cNvSpPr txBox="1"/>
-          <p:nvPr/>
-        </p:nvSpPr>
-        <p:spPr>
-          <a:xfrm>
-            <a:off x="7205472" y="5349240"/>
-            <a:ext cx="1572768" cy="594360"/>
-          </a:xfrm>
-          <a:prstGeom prst="rect">
-            <a:avLst/>
-          </a:prstGeom>
-          <a:noFill/>
-          <a:ln/>
-        </p:spPr>
-        <p:txBody>
-          <a:bodyPr wrap="square" lIns="0" tIns="0" rIns="0" bIns="0" rtlCol="0" anchor="ctr"/>
-          <a:lstStyle/>
-          <a:p>
-            <a:pPr algn="ctr" indent="0" marL="0">
-              <a:buNone/>
-            </a:pPr>
-            <a:r>
-              <a:rPr lang="en-US" sz="1800" b="1" dirty="0">
-                <a:solidFill>
-                  <a:schemeClr val="tx1"/>
-                </a:solidFill>
-              </a:rPr>
-              <a:t>DECADE</a:t>
-            </a:r>
-            <a:endParaRPr lang="en-US" sz="1800" dirty="0"/>
-          </a:p>
-        </p:txBody>
-      </p:sp>
-      <p:sp>
-        <p:nvSpPr>
-          <p:cNvPr id="25" name="Chip CABBAGE"/>
-          <p:cNvSpPr/>
-          <p:nvPr/>
-        </p:nvSpPr>
-        <p:spPr>
-          <a:xfrm>
-            <a:off x="8961120" y="5349240"/>
-            <a:ext cx="1773936" cy="594360"/>
-          </a:xfrm>
-          <a:prstGeom prst="roundRect">
-            <a:avLst>
-              <a:gd name="adj" fmla="val 46154"/>
-            </a:avLst>
-          </a:prstGeom>
-          <a:solidFill>
-            <a:schemeClr val="bg2"/>
-          </a:solidFill>
-          <a:ln w="12700">
-            <a:solidFill>
-              <a:schemeClr val="bg2"/>
-            </a:solidFill>
-            <a:prstDash val="solid"/>
-          </a:ln>
-        </p:spPr>
-      </p:sp>
-      <p:sp>
-        <p:nvSpPr>
-          <p:cNvPr id="26" name="Chip text CABBAGE"/>
-          <p:cNvSpPr txBox="1"/>
-          <p:nvPr/>
-        </p:nvSpPr>
-        <p:spPr>
-          <a:xfrm>
-            <a:off x="8961120" y="5349240"/>
-            <a:ext cx="1773936" cy="594360"/>
-          </a:xfrm>
-          <a:prstGeom prst="rect">
-            <a:avLst/>
-          </a:prstGeom>
-          <a:noFill/>
-          <a:ln/>
-        </p:spPr>
-        <p:txBody>
-          <a:bodyPr wrap="square" lIns="0" tIns="0" rIns="0" bIns="0" rtlCol="0" anchor="ctr"/>
-          <a:lstStyle/>
-          <a:p>
-            <a:pPr algn="ctr" indent="0" marL="0">
-              <a:buNone/>
-            </a:pPr>
-            <a:r>
-              <a:rPr lang="en-US" sz="1800" b="1" dirty="0">
-                <a:solidFill>
-                  <a:schemeClr val="tx1"/>
-                </a:solidFill>
-              </a:rPr>
-              <a:t>CABBAGE</a:t>
-            </a:r>
-            <a:endParaRPr lang="en-US" sz="1800" dirty="0"/>
+              <a:t>Lines: E G B D F   |   Spaces: F A C E</a:t>
+            </a:r>
+            <a:endParaRPr lang="en-US" sz="1600" dirty="0"/>
           </a:p>
         </p:txBody>
       </p:sp>
@@ -4669,8 +10212,8 @@
         </p:nvSpPr>
         <p:spPr>
           <a:xfrm>
-            <a:off x="640080" y="457200"/>
-            <a:ext cx="10881360" cy="914400"/>
+            <a:off x="640080" y="320040"/>
+            <a:ext cx="10881360" cy="868680"/>
           </a:xfrm>
           <a:prstGeom prst="rect">
             <a:avLst/>
@@ -4686,30 +10229,200 @@
               <a:buNone/>
             </a:pPr>
             <a:r>
-              <a:rPr lang="en-US" sz="4400" b="1" dirty="0">
-                <a:solidFill>
-                  <a:schemeClr val="bg1"/>
+              <a:rPr lang="en-US" sz="4000" b="1" dirty="0">
+                <a:solidFill>
+                  <a:schemeClr val="tx1"/>
                 </a:solidFill>
                 <a:latin typeface="Cambria" pitchFamily="34" charset="0"/>
                 <a:ea typeface="Cambria" pitchFamily="34" charset="-122"/>
                 <a:cs typeface="Cambria" pitchFamily="34" charset="-120"/>
               </a:rPr>
-              <a:t>Answers</a:t>
-            </a:r>
-            <a:endParaRPr lang="en-US" sz="4400" dirty="0"/>
-          </a:p>
-        </p:txBody>
-      </p:sp>
-      <p:sp>
-        <p:nvSpPr>
-          <p:cNvPr id="3" name="On screen heading"/>
+              <a:t>Treble clef: 9 and 10</a:t>
+            </a:r>
+            <a:endParaRPr lang="en-US" sz="4000" dirty="0"/>
+          </a:p>
+        </p:txBody>
+      </p:sp>
+      <p:sp>
+        <p:nvSpPr>
+          <p:cNvPr id="3" name="Treble clef 9 badge"/>
+          <p:cNvSpPr/>
+          <p:nvPr/>
+        </p:nvSpPr>
+        <p:spPr>
+          <a:xfrm>
+            <a:off x="640080" y="1417320"/>
+            <a:ext cx="548640" cy="548640"/>
+          </a:xfrm>
+          <a:prstGeom prst="ellipse">
+            <a:avLst/>
+          </a:prstGeom>
+          <a:solidFill>
+            <a:schemeClr val="accent1"/>
+          </a:solidFill>
+          <a:ln w="12700">
+            <a:solidFill>
+              <a:schemeClr val="accent1"/>
+            </a:solidFill>
+            <a:prstDash val="solid"/>
+          </a:ln>
+        </p:spPr>
+      </p:sp>
+      <p:sp>
+        <p:nvSpPr>
+          <p:cNvPr id="4" name="Treble clef 9 number"/>
           <p:cNvSpPr txBox="1"/>
           <p:nvPr/>
         </p:nvSpPr>
         <p:spPr>
           <a:xfrm>
-            <a:off x="640080" y="1737360"/>
-            <a:ext cx="5120640" cy="457200"/>
+            <a:off x="640080" y="1417320"/>
+            <a:ext cx="548640" cy="548640"/>
+          </a:xfrm>
+          <a:prstGeom prst="rect">
+            <a:avLst/>
+          </a:prstGeom>
+          <a:noFill/>
+          <a:ln/>
+        </p:spPr>
+        <p:txBody>
+          <a:bodyPr wrap="square" lIns="0" tIns="0" rIns="0" bIns="0" rtlCol="0" anchor="ctr"/>
+          <a:lstStyle/>
+          <a:p>
+            <a:pPr algn="ctr" indent="0" marL="0">
+              <a:buNone/>
+            </a:pPr>
+            <a:r>
+              <a:rPr lang="en-US" sz="2200" b="1" dirty="0">
+                <a:solidFill>
+                  <a:schemeClr val="tx1"/>
+                </a:solidFill>
+              </a:rPr>
+              <a:t>9</a:t>
+            </a:r>
+            <a:endParaRPr lang="en-US" sz="2200" dirty="0"/>
+          </a:p>
+        </p:txBody>
+      </p:sp>
+      <p:pic>
+        <p:nvPicPr>
+          <p:cNvPr id="5" name="t09" descr="Treble clef code 9: stave with 4 notes and 4 empty answer boxes">    </p:cNvPr>
+          <p:cNvPicPr>
+            <a:picLocks noChangeAspect="1"/>
+          </p:cNvPicPr>
+          <p:nvPr/>
+        </p:nvPicPr>
+        <p:blipFill>
+          <a:blip r:embed="rId1"/>
+          <a:stretch>
+            <a:fillRect/>
+          </a:stretch>
+        </p:blipFill>
+        <p:spPr>
+          <a:xfrm>
+            <a:off x="640080" y="2148840"/>
+            <a:ext cx="5303520" cy="3288182"/>
+          </a:xfrm>
+          <a:prstGeom prst="rect">
+            <a:avLst/>
+          </a:prstGeom>
+        </p:spPr>
+      </p:pic>
+      <p:sp>
+        <p:nvSpPr>
+          <p:cNvPr id="6" name="Treble clef 10 badge"/>
+          <p:cNvSpPr/>
+          <p:nvPr/>
+        </p:nvSpPr>
+        <p:spPr>
+          <a:xfrm>
+            <a:off x="6309360" y="1417320"/>
+            <a:ext cx="548640" cy="548640"/>
+          </a:xfrm>
+          <a:prstGeom prst="ellipse">
+            <a:avLst/>
+          </a:prstGeom>
+          <a:solidFill>
+            <a:schemeClr val="accent1"/>
+          </a:solidFill>
+          <a:ln w="12700">
+            <a:solidFill>
+              <a:schemeClr val="accent1"/>
+            </a:solidFill>
+            <a:prstDash val="solid"/>
+          </a:ln>
+        </p:spPr>
+      </p:sp>
+      <p:sp>
+        <p:nvSpPr>
+          <p:cNvPr id="7" name="Treble clef 10 number"/>
+          <p:cNvSpPr txBox="1"/>
+          <p:nvPr/>
+        </p:nvSpPr>
+        <p:spPr>
+          <a:xfrm>
+            <a:off x="6309360" y="1417320"/>
+            <a:ext cx="548640" cy="548640"/>
+          </a:xfrm>
+          <a:prstGeom prst="rect">
+            <a:avLst/>
+          </a:prstGeom>
+          <a:noFill/>
+          <a:ln/>
+        </p:spPr>
+        <p:txBody>
+          <a:bodyPr wrap="square" lIns="0" tIns="0" rIns="0" bIns="0" rtlCol="0" anchor="ctr"/>
+          <a:lstStyle/>
+          <a:p>
+            <a:pPr algn="ctr" indent="0" marL="0">
+              <a:buNone/>
+            </a:pPr>
+            <a:r>
+              <a:rPr lang="en-US" sz="2200" b="1" dirty="0">
+                <a:solidFill>
+                  <a:schemeClr val="tx1"/>
+                </a:solidFill>
+              </a:rPr>
+              <a:t>10</a:t>
+            </a:r>
+            <a:endParaRPr lang="en-US" sz="2200" dirty="0"/>
+          </a:p>
+        </p:txBody>
+      </p:sp>
+      <p:pic>
+        <p:nvPicPr>
+          <p:cNvPr id="8" name="t10" descr="Treble clef code 10: stave with 5 notes and 5 empty answer boxes">    </p:cNvPr>
+          <p:cNvPicPr>
+            <a:picLocks noChangeAspect="1"/>
+          </p:cNvPicPr>
+          <p:nvPr/>
+        </p:nvPicPr>
+        <p:blipFill>
+          <a:blip r:embed="rId2"/>
+          <a:stretch>
+            <a:fillRect/>
+          </a:stretch>
+        </p:blipFill>
+        <p:spPr>
+          <a:xfrm>
+            <a:off x="6309360" y="2148840"/>
+            <a:ext cx="5303520" cy="2770940"/>
+          </a:xfrm>
+          <a:prstGeom prst="rect">
+            <a:avLst/>
+          </a:prstGeom>
+        </p:spPr>
+      </p:pic>
+      <p:sp>
+        <p:nvSpPr>
+          <p:cNvPr id="9" name="Key reminder"/>
+          <p:cNvSpPr txBox="1"/>
+          <p:nvPr/>
+        </p:nvSpPr>
+        <p:spPr>
+          <a:xfrm>
+            <a:off x="640080" y="6172200"/>
+            <a:ext cx="10881360" cy="365760"/>
           </a:xfrm>
           <a:prstGeom prst="rect">
             <a:avLst/>
@@ -4725,332 +10438,14 @@
               <a:buNone/>
             </a:pPr>
             <a:r>
-              <a:rPr lang="en-US" sz="2200" b="1" dirty="0">
-                <a:solidFill>
-                  <a:schemeClr val="accent1"/>
-                </a:solidFill>
-              </a:rPr>
-              <a:t>On screen</a:t>
-            </a:r>
-            <a:endParaRPr lang="en-US" sz="2200" dirty="0"/>
-          </a:p>
-        </p:txBody>
-      </p:sp>
-      <p:sp>
-        <p:nvSpPr>
-          <p:cNvPr id="4" name="On screen row 1"/>
-          <p:cNvSpPr txBox="1"/>
-          <p:nvPr/>
-        </p:nvSpPr>
-        <p:spPr>
-          <a:xfrm>
-            <a:off x="640080" y="2377440"/>
-            <a:ext cx="5120640" cy="731520"/>
-          </a:xfrm>
-          <a:prstGeom prst="rect">
-            <a:avLst/>
-          </a:prstGeom>
-          <a:noFill/>
-          <a:ln/>
-        </p:spPr>
-        <p:txBody>
-          <a:bodyPr wrap="square" lIns="0" tIns="0" rIns="0" bIns="0" rtlCol="0" anchor="ctr"/>
-          <a:lstStyle/>
-          <a:p>
-            <a:pPr indent="0" marL="0">
-              <a:buNone/>
-            </a:pPr>
-            <a:r>
-              <a:rPr lang="en-US" sz="2800" dirty="0">
-                <a:solidFill>
-                  <a:schemeClr val="bg2"/>
-                </a:solidFill>
-              </a:rPr>
-              <a:t>Round 1, treble   </a:t>
-            </a:r>
-            <a:pPr indent="0" marL="0">
-              <a:buNone/>
-            </a:pPr>
-            <a:r>
-              <a:rPr lang="en-US" sz="2800" b="1" dirty="0">
-                <a:solidFill>
-                  <a:schemeClr val="bg1"/>
-                </a:solidFill>
-              </a:rPr>
-              <a:t>FACE</a:t>
-            </a:r>
-            <a:endParaRPr lang="en-US" sz="2800" dirty="0"/>
-          </a:p>
-        </p:txBody>
-      </p:sp>
-      <p:sp>
-        <p:nvSpPr>
-          <p:cNvPr id="5" name="On screen row 2"/>
-          <p:cNvSpPr txBox="1"/>
-          <p:nvPr/>
-        </p:nvSpPr>
-        <p:spPr>
-          <a:xfrm>
-            <a:off x="640080" y="3246120"/>
-            <a:ext cx="5120640" cy="731520"/>
-          </a:xfrm>
-          <a:prstGeom prst="rect">
-            <a:avLst/>
-          </a:prstGeom>
-          <a:noFill/>
-          <a:ln/>
-        </p:spPr>
-        <p:txBody>
-          <a:bodyPr wrap="square" lIns="0" tIns="0" rIns="0" bIns="0" rtlCol="0" anchor="ctr"/>
-          <a:lstStyle/>
-          <a:p>
-            <a:pPr indent="0" marL="0">
-              <a:buNone/>
-            </a:pPr>
-            <a:r>
-              <a:rPr lang="en-US" sz="2800" dirty="0">
-                <a:solidFill>
-                  <a:schemeClr val="bg2"/>
-                </a:solidFill>
-              </a:rPr>
-              <a:t>Round 2, bass   </a:t>
-            </a:r>
-            <a:pPr indent="0" marL="0">
-              <a:buNone/>
-            </a:pPr>
-            <a:r>
-              <a:rPr lang="en-US" sz="2800" b="1" dirty="0">
-                <a:solidFill>
-                  <a:schemeClr val="bg1"/>
-                </a:solidFill>
-              </a:rPr>
-              <a:t>BEAD</a:t>
-            </a:r>
-            <a:endParaRPr lang="en-US" sz="2800" dirty="0"/>
-          </a:p>
-        </p:txBody>
-      </p:sp>
-      <p:sp>
-        <p:nvSpPr>
-          <p:cNvPr id="6" name="On screen row 3"/>
-          <p:cNvSpPr txBox="1"/>
-          <p:nvPr/>
-        </p:nvSpPr>
-        <p:spPr>
-          <a:xfrm>
-            <a:off x="640080" y="4114800"/>
-            <a:ext cx="5120640" cy="731520"/>
-          </a:xfrm>
-          <a:prstGeom prst="rect">
-            <a:avLst/>
-          </a:prstGeom>
-          <a:noFill/>
-          <a:ln/>
-        </p:spPr>
-        <p:txBody>
-          <a:bodyPr wrap="square" lIns="0" tIns="0" rIns="0" bIns="0" rtlCol="0" anchor="ctr"/>
-          <a:lstStyle/>
-          <a:p>
-            <a:pPr indent="0" marL="0">
-              <a:buNone/>
-            </a:pPr>
-            <a:r>
-              <a:rPr lang="en-US" sz="2800" dirty="0">
-                <a:solidFill>
-                  <a:schemeClr val="bg2"/>
-                </a:solidFill>
-              </a:rPr>
-              <a:t>Round 3, mixed   </a:t>
-            </a:r>
-            <a:pPr indent="0" marL="0">
-              <a:buNone/>
-            </a:pPr>
-            <a:r>
-              <a:rPr lang="en-US" sz="2800" b="1" dirty="0">
-                <a:solidFill>
-                  <a:schemeClr val="bg1"/>
-                </a:solidFill>
-              </a:rPr>
-              <a:t>BAD EGG</a:t>
-            </a:r>
-            <a:endParaRPr lang="en-US" sz="2800" dirty="0"/>
-          </a:p>
-        </p:txBody>
-      </p:sp>
-      <p:sp>
-        <p:nvSpPr>
-          <p:cNvPr id="7" name="Worksheet heading"/>
-          <p:cNvSpPr txBox="1"/>
-          <p:nvPr/>
-        </p:nvSpPr>
-        <p:spPr>
-          <a:xfrm>
-            <a:off x="6400800" y="1737360"/>
-            <a:ext cx="5120640" cy="457200"/>
-          </a:xfrm>
-          <a:prstGeom prst="rect">
-            <a:avLst/>
-          </a:prstGeom>
-          <a:noFill/>
-          <a:ln/>
-        </p:spPr>
-        <p:txBody>
-          <a:bodyPr wrap="square" lIns="0" tIns="0" rIns="0" bIns="0" rtlCol="0" anchor="ctr"/>
-          <a:lstStyle/>
-          <a:p>
-            <a:pPr indent="0" marL="0">
-              <a:buNone/>
-            </a:pPr>
-            <a:r>
-              <a:rPr lang="en-US" sz="2200" b="1" dirty="0">
-                <a:solidFill>
-                  <a:schemeClr val="accent1"/>
-                </a:solidFill>
-              </a:rPr>
-              <a:t>Worksheet</a:t>
-            </a:r>
-            <a:endParaRPr lang="en-US" sz="2200" dirty="0"/>
-          </a:p>
-        </p:txBody>
-      </p:sp>
-      <p:sp>
-        <p:nvSpPr>
-          <p:cNvPr id="8" name="Worksheet row 1"/>
-          <p:cNvSpPr txBox="1"/>
-          <p:nvPr/>
-        </p:nvSpPr>
-        <p:spPr>
-          <a:xfrm>
-            <a:off x="6400800" y="2377440"/>
-            <a:ext cx="5120640" cy="731520"/>
-          </a:xfrm>
-          <a:prstGeom prst="rect">
-            <a:avLst/>
-          </a:prstGeom>
-          <a:noFill/>
-          <a:ln/>
-        </p:spPr>
-        <p:txBody>
-          <a:bodyPr wrap="square" lIns="0" tIns="0" rIns="0" bIns="0" rtlCol="0" anchor="ctr"/>
-          <a:lstStyle/>
-          <a:p>
-            <a:pPr indent="0" marL="0">
-              <a:buNone/>
-            </a:pPr>
-            <a:r>
-              <a:rPr lang="en-US" sz="2800" dirty="0">
-                <a:solidFill>
-                  <a:schemeClr val="bg2"/>
-                </a:solidFill>
-              </a:rPr>
-              <a:t>Page 1, treble   </a:t>
-            </a:r>
-            <a:pPr indent="0" marL="0">
-              <a:buNone/>
-            </a:pPr>
-            <a:r>
-              <a:rPr lang="en-US" sz="2800" b="1" dirty="0">
-                <a:solidFill>
-                  <a:schemeClr val="bg1"/>
-                </a:solidFill>
-              </a:rPr>
-              <a:t>BADGE</a:t>
-            </a:r>
-            <a:endParaRPr lang="en-US" sz="2800" dirty="0"/>
-          </a:p>
-        </p:txBody>
-      </p:sp>
-      <p:sp>
-        <p:nvSpPr>
-          <p:cNvPr id="9" name="Worksheet row 2"/>
-          <p:cNvSpPr txBox="1"/>
-          <p:nvPr/>
-        </p:nvSpPr>
-        <p:spPr>
-          <a:xfrm>
-            <a:off x="6400800" y="3246120"/>
-            <a:ext cx="5120640" cy="731520"/>
-          </a:xfrm>
-          <a:prstGeom prst="rect">
-            <a:avLst/>
-          </a:prstGeom>
-          <a:noFill/>
-          <a:ln/>
-        </p:spPr>
-        <p:txBody>
-          <a:bodyPr wrap="square" lIns="0" tIns="0" rIns="0" bIns="0" rtlCol="0" anchor="ctr"/>
-          <a:lstStyle/>
-          <a:p>
-            <a:pPr indent="0" marL="0">
-              <a:buNone/>
-            </a:pPr>
-            <a:r>
-              <a:rPr lang="en-US" sz="2800" dirty="0">
-                <a:solidFill>
-                  <a:schemeClr val="bg2"/>
-                </a:solidFill>
-              </a:rPr>
-              <a:t>Page 2, bass   </a:t>
-            </a:r>
-            <a:pPr indent="0" marL="0">
-              <a:buNone/>
-            </a:pPr>
-            <a:r>
-              <a:rPr lang="en-US" sz="2800" b="1" dirty="0">
-                <a:solidFill>
-                  <a:schemeClr val="bg1"/>
-                </a:solidFill>
-              </a:rPr>
-              <a:t>DECADE</a:t>
-            </a:r>
-            <a:endParaRPr lang="en-US" sz="2800" dirty="0"/>
-          </a:p>
-        </p:txBody>
-      </p:sp>
-      <p:sp>
-        <p:nvSpPr>
-          <p:cNvPr id="10" name="Worksheet row 3"/>
-          <p:cNvSpPr txBox="1"/>
-          <p:nvPr/>
-        </p:nvSpPr>
-        <p:spPr>
-          <a:xfrm>
-            <a:off x="6400800" y="4114800"/>
-            <a:ext cx="5120640" cy="731520"/>
-          </a:xfrm>
-          <a:prstGeom prst="rect">
-            <a:avLst/>
-          </a:prstGeom>
-          <a:noFill/>
-          <a:ln/>
-        </p:spPr>
-        <p:txBody>
-          <a:bodyPr wrap="square" lIns="0" tIns="0" rIns="0" bIns="0" rtlCol="0" anchor="ctr"/>
-          <a:lstStyle/>
-          <a:p>
-            <a:pPr indent="0" marL="0">
-              <a:buNone/>
-            </a:pPr>
-            <a:r>
-              <a:rPr lang="en-US" sz="2800" dirty="0">
-                <a:solidFill>
-                  <a:schemeClr val="bg2"/>
-                </a:solidFill>
-              </a:rPr>
-              <a:t>Page 3, mixed   </a:t>
-            </a:r>
-            <a:pPr indent="0" marL="0">
-              <a:buNone/>
-            </a:pPr>
-            <a:r>
-              <a:rPr lang="en-US" sz="2800" b="1" dirty="0">
-                <a:solidFill>
-                  <a:schemeClr val="bg1"/>
-                </a:solidFill>
-              </a:rPr>
-              <a:t>CAGE FEED</a:t>
-            </a:r>
-            <a:endParaRPr lang="en-US" sz="2800" dirty="0"/>
+              <a:rPr lang="en-US" sz="1600" i="1" dirty="0">
+                <a:solidFill>
+                  <a:schemeClr val="tx1"/>
+                </a:solidFill>
+              </a:rPr>
+              <a:t>Lines: E G B D F   |   Spaces: F A C E</a:t>
+            </a:r>
+            <a:endParaRPr lang="en-US" sz="1600" dirty="0"/>
           </a:p>
         </p:txBody>
       </p:sp>
